--- a/1. 일정/1. Weekly Plan/보고자료/프로젝트/연구소_주간업무_오세영_250806.pptx
+++ b/1. 일정/1. Weekly Plan/보고자료/프로젝트/연구소_주간업무_오세영_250806.pptx
@@ -24,7 +24,7 @@
     <p:sldId id="1006" r:id="rId12"/>
   </p:sldIdLst>
   <p:sldSz cx="9144000" cy="6858000" type="screen4x3"/>
-  <p:notesSz cx="6802438" cy="9934575"/>
+  <p:notesSz cx="6807200" cy="9939338"/>
   <p:defaultTextStyle>
     <a:defPPr>
       <a:defRPr lang="ko-KR"/>
@@ -210,14 +210,14 @@
         <p:spPr>
           <a:xfrm>
             <a:off x="0" y="0"/>
-            <a:ext cx="2947988" cy="498475"/>
+            <a:ext cx="2950052" cy="498714"/>
           </a:xfrm>
           <a:prstGeom prst="rect">
             <a:avLst/>
           </a:prstGeom>
         </p:spPr>
         <p:txBody>
-          <a:bodyPr vert="horz" lIns="91440" tIns="45720" rIns="91440" bIns="45720"/>
+          <a:bodyPr vert="horz" lIns="91486" tIns="45743" rIns="91486" bIns="45743"/>
           <a:lstStyle>
             <a:lvl1pPr algn="l" fontAlgn="auto">
               <a:spcBef>
@@ -252,15 +252,15 @@
         </p:nvSpPr>
         <p:spPr>
           <a:xfrm>
-            <a:off x="3852863" y="0"/>
-            <a:ext cx="2947987" cy="498475"/>
+            <a:off x="3855561" y="0"/>
+            <a:ext cx="2950051" cy="498714"/>
           </a:xfrm>
           <a:prstGeom prst="rect">
             <a:avLst/>
           </a:prstGeom>
         </p:spPr>
         <p:txBody>
-          <a:bodyPr vert="horz" lIns="91440" tIns="45720" rIns="91440" bIns="45720"/>
+          <a:bodyPr vert="horz" lIns="91486" tIns="45743" rIns="91486" bIns="45743"/>
           <a:lstStyle>
             <a:lvl1pPr algn="r" fontAlgn="auto">
               <a:spcBef>
@@ -284,7 +284,7 @@
               <a:pPr>
                 <a:defRPr/>
               </a:pPr>
-              <a:t>2025-08-05</a:t>
+              <a:t>2025-08-07</a:t>
             </a:fld>
             <a:endParaRPr lang="ko-KR" altLang="en-US"/>
           </a:p>
@@ -302,15 +302,15 @@
         </p:nvSpPr>
         <p:spPr>
           <a:xfrm>
-            <a:off x="0" y="9436100"/>
-            <a:ext cx="2947988" cy="498475"/>
+            <a:off x="0" y="9440625"/>
+            <a:ext cx="2950052" cy="498714"/>
           </a:xfrm>
           <a:prstGeom prst="rect">
             <a:avLst/>
           </a:prstGeom>
         </p:spPr>
         <p:txBody>
-          <a:bodyPr vert="horz" lIns="91440" tIns="45720" rIns="91440" bIns="45720" anchor="b"/>
+          <a:bodyPr vert="horz" lIns="91486" tIns="45743" rIns="91486" bIns="45743" anchor="b"/>
           <a:lstStyle>
             <a:lvl1pPr algn="l" fontAlgn="auto">
               <a:spcBef>
@@ -345,15 +345,15 @@
         </p:nvSpPr>
         <p:spPr>
           <a:xfrm>
-            <a:off x="3852863" y="9436100"/>
-            <a:ext cx="2947987" cy="498475"/>
+            <a:off x="3855561" y="9440625"/>
+            <a:ext cx="2950051" cy="498714"/>
           </a:xfrm>
           <a:prstGeom prst="rect">
             <a:avLst/>
           </a:prstGeom>
         </p:spPr>
         <p:txBody>
-          <a:bodyPr vert="horz" wrap="square" lIns="91440" tIns="45720" rIns="91440" bIns="45720" anchor="b" anchorCtr="0">
+          <a:bodyPr vert="horz" wrap="square" lIns="91486" tIns="45743" rIns="91486" bIns="45743" anchor="b" anchorCtr="0">
             <a:prstTxWarp prst="textNoShape">
               <a:avLst/>
             </a:prstTxWarp>
@@ -426,14 +426,14 @@
         <p:spPr>
           <a:xfrm>
             <a:off x="0" y="0"/>
-            <a:ext cx="2947988" cy="498475"/>
+            <a:ext cx="2950052" cy="498714"/>
           </a:xfrm>
           <a:prstGeom prst="rect">
             <a:avLst/>
           </a:prstGeom>
         </p:spPr>
         <p:txBody>
-          <a:bodyPr vert="horz" lIns="91440" tIns="45720" rIns="91440" bIns="45720"/>
+          <a:bodyPr vert="horz" lIns="91486" tIns="45743" rIns="91486" bIns="45743"/>
           <a:lstStyle>
             <a:lvl1pPr algn="l" fontAlgn="auto">
               <a:spcBef>
@@ -468,15 +468,15 @@
         </p:nvSpPr>
         <p:spPr>
           <a:xfrm>
-            <a:off x="3852863" y="0"/>
-            <a:ext cx="2947987" cy="498475"/>
+            <a:off x="3855561" y="0"/>
+            <a:ext cx="2950051" cy="498714"/>
           </a:xfrm>
           <a:prstGeom prst="rect">
             <a:avLst/>
           </a:prstGeom>
         </p:spPr>
         <p:txBody>
-          <a:bodyPr vert="horz" lIns="91440" tIns="45720" rIns="91440" bIns="45720"/>
+          <a:bodyPr vert="horz" lIns="91486" tIns="45743" rIns="91486" bIns="45743"/>
           <a:lstStyle>
             <a:lvl1pPr algn="r" fontAlgn="auto">
               <a:spcBef>
@@ -500,7 +500,7 @@
               <a:pPr>
                 <a:defRPr/>
               </a:pPr>
-              <a:t>2025-08-05</a:t>
+              <a:t>2025-08-07</a:t>
             </a:fld>
             <a:endParaRPr lang="ko-KR" altLang="en-US"/>
           </a:p>
@@ -518,8 +518,8 @@
         </p:nvSpPr>
         <p:spPr>
           <a:xfrm>
-            <a:off x="1166813" y="1241425"/>
-            <a:ext cx="4468812" cy="3352800"/>
+            <a:off x="1168400" y="1241425"/>
+            <a:ext cx="4470400" cy="3354388"/>
           </a:xfrm>
           <a:prstGeom prst="rect">
             <a:avLst/>
@@ -532,7 +532,7 @@
           </a:ln>
         </p:spPr>
         <p:txBody>
-          <a:bodyPr vert="horz" lIns="91440" tIns="45720" rIns="91440" bIns="45720" anchor="ctr"/>
+          <a:bodyPr vert="horz" lIns="91486" tIns="45743" rIns="91486" bIns="45743" anchor="ctr"/>
           <a:lstStyle/>
           <a:p>
             <a:pPr lvl="0">
@@ -554,15 +554,15 @@
         </p:nvSpPr>
         <p:spPr>
           <a:xfrm>
-            <a:off x="681038" y="4781550"/>
-            <a:ext cx="5441950" cy="3911600"/>
+            <a:off x="681515" y="4783843"/>
+            <a:ext cx="5445760" cy="3913475"/>
           </a:xfrm>
           <a:prstGeom prst="rect">
             <a:avLst/>
           </a:prstGeom>
         </p:spPr>
         <p:txBody>
-          <a:bodyPr vert="horz" lIns="91440" tIns="45720" rIns="91440" bIns="45720"/>
+          <a:bodyPr vert="horz" lIns="91486" tIns="45743" rIns="91486" bIns="45743"/>
           <a:lstStyle/>
           <a:p>
             <a:pPr lvl="0">
@@ -623,15 +623,15 @@
         </p:nvSpPr>
         <p:spPr>
           <a:xfrm>
-            <a:off x="0" y="9436100"/>
-            <a:ext cx="2947988" cy="498475"/>
+            <a:off x="0" y="9440625"/>
+            <a:ext cx="2950052" cy="498714"/>
           </a:xfrm>
           <a:prstGeom prst="rect">
             <a:avLst/>
           </a:prstGeom>
         </p:spPr>
         <p:txBody>
-          <a:bodyPr vert="horz" lIns="91440" tIns="45720" rIns="91440" bIns="45720" anchor="b"/>
+          <a:bodyPr vert="horz" lIns="91486" tIns="45743" rIns="91486" bIns="45743" anchor="b"/>
           <a:lstStyle>
             <a:lvl1pPr algn="l" fontAlgn="auto">
               <a:spcBef>
@@ -666,15 +666,15 @@
         </p:nvSpPr>
         <p:spPr>
           <a:xfrm>
-            <a:off x="3852863" y="9436100"/>
-            <a:ext cx="2947987" cy="498475"/>
+            <a:off x="3855561" y="9440625"/>
+            <a:ext cx="2950051" cy="498714"/>
           </a:xfrm>
           <a:prstGeom prst="rect">
             <a:avLst/>
           </a:prstGeom>
         </p:spPr>
         <p:txBody>
-          <a:bodyPr vert="horz" wrap="square" lIns="91440" tIns="45720" rIns="91440" bIns="45720" anchor="b" anchorCtr="0">
+          <a:bodyPr vert="horz" wrap="square" lIns="91486" tIns="45743" rIns="91486" bIns="45743" anchor="b" anchorCtr="0">
             <a:prstTxWarp prst="textNoShape">
               <a:avLst/>
             </a:prstTxWarp>
@@ -1009,70 +1009,38 @@
           <a:bodyPr/>
           <a:lstStyle/>
           <a:p>
-            <a:pPr marL="0" marR="0" lvl="0" indent="0" algn="r" defTabSz="914400" rtl="0" eaLnBrk="1" fontAlgn="auto" latinLnBrk="1" hangingPunct="1">
-              <a:lnSpc>
-                <a:spcPct val="100000"/>
-              </a:lnSpc>
+            <a:pPr defTabSz="914857" fontAlgn="auto">
               <a:spcBef>
                 <a:spcPts val="0"/>
               </a:spcBef>
               <a:spcAft>
                 <a:spcPts val="0"/>
               </a:spcAft>
-              <a:buClrTx/>
-              <a:buSzTx/>
-              <a:buFontTx/>
-              <a:buNone/>
-              <a:tabLst/>
               <a:defRPr/>
             </a:pPr>
             <a:fld id="{14475004-9454-4C07-A18A-CD2DC04A4F75}" type="slidenum">
-              <a:rPr kumimoji="0" lang="en-US" altLang="ko-KR" sz="1200" b="0" i="0" u="none" strike="noStrike" kern="1200" cap="none" spc="0" normalizeH="0" baseline="0" noProof="0" smtClean="0">
-                <a:ln>
-                  <a:noFill/>
-                </a:ln>
+              <a:rPr lang="en-US" altLang="ko-KR">
                 <a:solidFill>
                   <a:prstClr val="black"/>
                 </a:solidFill>
-                <a:effectLst/>
-                <a:uLnTx/>
-                <a:uFillTx/>
-                <a:latin typeface="맑은 고딕"/>
                 <a:ea typeface="맑은 고딕" panose="020B0503020000020004" pitchFamily="50" charset="-127"/>
-                <a:cs typeface="+mn-cs"/>
               </a:rPr>
-              <a:pPr marL="0" marR="0" lvl="0" indent="0" algn="r" defTabSz="914400" rtl="0" eaLnBrk="1" fontAlgn="auto" latinLnBrk="1" hangingPunct="1">
-                <a:lnSpc>
-                  <a:spcPct val="100000"/>
-                </a:lnSpc>
+              <a:pPr defTabSz="914857" fontAlgn="auto">
                 <a:spcBef>
                   <a:spcPts val="0"/>
                 </a:spcBef>
                 <a:spcAft>
                   <a:spcPts val="0"/>
                 </a:spcAft>
-                <a:buClrTx/>
-                <a:buSzTx/>
-                <a:buFontTx/>
-                <a:buNone/>
-                <a:tabLst/>
                 <a:defRPr/>
               </a:pPr>
               <a:t>9</a:t>
             </a:fld>
-            <a:endParaRPr kumimoji="0" lang="en-US" altLang="ko-KR" sz="1200" b="0" i="0" u="none" strike="noStrike" kern="1200" cap="none" spc="0" normalizeH="0" baseline="0" noProof="0">
-              <a:ln>
-                <a:noFill/>
-              </a:ln>
+            <a:endParaRPr lang="en-US" altLang="ko-KR">
               <a:solidFill>
                 <a:prstClr val="black"/>
               </a:solidFill>
-              <a:effectLst/>
-              <a:uLnTx/>
-              <a:uFillTx/>
-              <a:latin typeface="맑은 고딕"/>
               <a:ea typeface="맑은 고딕" panose="020B0503020000020004" pitchFamily="50" charset="-127"/>
-              <a:cs typeface="+mn-cs"/>
             </a:endParaRPr>
           </a:p>
         </p:txBody>
@@ -1153,70 +1121,38 @@
           <a:bodyPr/>
           <a:lstStyle/>
           <a:p>
-            <a:pPr marL="0" marR="0" lvl="0" indent="0" algn="r" defTabSz="914400" rtl="0" eaLnBrk="1" fontAlgn="auto" latinLnBrk="1" hangingPunct="1">
-              <a:lnSpc>
-                <a:spcPct val="100000"/>
-              </a:lnSpc>
+            <a:pPr defTabSz="914857" fontAlgn="auto">
               <a:spcBef>
                 <a:spcPts val="0"/>
               </a:spcBef>
               <a:spcAft>
                 <a:spcPts val="0"/>
               </a:spcAft>
-              <a:buClrTx/>
-              <a:buSzTx/>
-              <a:buFontTx/>
-              <a:buNone/>
-              <a:tabLst/>
               <a:defRPr/>
             </a:pPr>
             <a:fld id="{14475004-9454-4C07-A18A-CD2DC04A4F75}" type="slidenum">
-              <a:rPr kumimoji="0" lang="en-US" altLang="ko-KR" sz="1200" b="0" i="0" u="none" strike="noStrike" kern="1200" cap="none" spc="0" normalizeH="0" baseline="0" noProof="0" smtClean="0">
-                <a:ln>
-                  <a:noFill/>
-                </a:ln>
+              <a:rPr lang="en-US" altLang="ko-KR">
                 <a:solidFill>
                   <a:prstClr val="black"/>
                 </a:solidFill>
-                <a:effectLst/>
-                <a:uLnTx/>
-                <a:uFillTx/>
-                <a:latin typeface="맑은 고딕"/>
                 <a:ea typeface="맑은 고딕" panose="020B0503020000020004" pitchFamily="50" charset="-127"/>
-                <a:cs typeface="+mn-cs"/>
               </a:rPr>
-              <a:pPr marL="0" marR="0" lvl="0" indent="0" algn="r" defTabSz="914400" rtl="0" eaLnBrk="1" fontAlgn="auto" latinLnBrk="1" hangingPunct="1">
-                <a:lnSpc>
-                  <a:spcPct val="100000"/>
-                </a:lnSpc>
+              <a:pPr defTabSz="914857" fontAlgn="auto">
                 <a:spcBef>
                   <a:spcPts val="0"/>
                 </a:spcBef>
                 <a:spcAft>
                   <a:spcPts val="0"/>
                 </a:spcAft>
-                <a:buClrTx/>
-                <a:buSzTx/>
-                <a:buFontTx/>
-                <a:buNone/>
-                <a:tabLst/>
                 <a:defRPr/>
               </a:pPr>
               <a:t>10</a:t>
             </a:fld>
-            <a:endParaRPr kumimoji="0" lang="en-US" altLang="ko-KR" sz="1200" b="0" i="0" u="none" strike="noStrike" kern="1200" cap="none" spc="0" normalizeH="0" baseline="0" noProof="0">
-              <a:ln>
-                <a:noFill/>
-              </a:ln>
+            <a:endParaRPr lang="en-US" altLang="ko-KR">
               <a:solidFill>
                 <a:prstClr val="black"/>
               </a:solidFill>
-              <a:effectLst/>
-              <a:uLnTx/>
-              <a:uFillTx/>
-              <a:latin typeface="맑은 고딕"/>
               <a:ea typeface="맑은 고딕" panose="020B0503020000020004" pitchFamily="50" charset="-127"/>
-              <a:cs typeface="+mn-cs"/>
             </a:endParaRPr>
           </a:p>
         </p:txBody>
@@ -1297,70 +1233,38 @@
           <a:bodyPr/>
           <a:lstStyle/>
           <a:p>
-            <a:pPr marL="0" marR="0" lvl="0" indent="0" algn="r" defTabSz="914400" rtl="0" eaLnBrk="1" fontAlgn="auto" latinLnBrk="1" hangingPunct="1">
-              <a:lnSpc>
-                <a:spcPct val="100000"/>
-              </a:lnSpc>
+            <a:pPr defTabSz="914857" fontAlgn="auto">
               <a:spcBef>
                 <a:spcPts val="0"/>
               </a:spcBef>
               <a:spcAft>
                 <a:spcPts val="0"/>
               </a:spcAft>
-              <a:buClrTx/>
-              <a:buSzTx/>
-              <a:buFontTx/>
-              <a:buNone/>
-              <a:tabLst/>
               <a:defRPr/>
             </a:pPr>
             <a:fld id="{14475004-9454-4C07-A18A-CD2DC04A4F75}" type="slidenum">
-              <a:rPr kumimoji="0" lang="en-US" altLang="ko-KR" sz="1200" b="0" i="0" u="none" strike="noStrike" kern="1200" cap="none" spc="0" normalizeH="0" baseline="0" noProof="0" smtClean="0">
-                <a:ln>
-                  <a:noFill/>
-                </a:ln>
+              <a:rPr lang="en-US" altLang="ko-KR">
                 <a:solidFill>
                   <a:prstClr val="black"/>
                 </a:solidFill>
-                <a:effectLst/>
-                <a:uLnTx/>
-                <a:uFillTx/>
-                <a:latin typeface="맑은 고딕"/>
                 <a:ea typeface="맑은 고딕" panose="020B0503020000020004" pitchFamily="50" charset="-127"/>
-                <a:cs typeface="+mn-cs"/>
               </a:rPr>
-              <a:pPr marL="0" marR="0" lvl="0" indent="0" algn="r" defTabSz="914400" rtl="0" eaLnBrk="1" fontAlgn="auto" latinLnBrk="1" hangingPunct="1">
-                <a:lnSpc>
-                  <a:spcPct val="100000"/>
-                </a:lnSpc>
+              <a:pPr defTabSz="914857" fontAlgn="auto">
                 <a:spcBef>
                   <a:spcPts val="0"/>
                 </a:spcBef>
                 <a:spcAft>
                   <a:spcPts val="0"/>
                 </a:spcAft>
-                <a:buClrTx/>
-                <a:buSzTx/>
-                <a:buFontTx/>
-                <a:buNone/>
-                <a:tabLst/>
                 <a:defRPr/>
               </a:pPr>
               <a:t>1</a:t>
             </a:fld>
-            <a:endParaRPr kumimoji="0" lang="en-US" altLang="ko-KR" sz="1200" b="0" i="0" u="none" strike="noStrike" kern="1200" cap="none" spc="0" normalizeH="0" baseline="0" noProof="0">
-              <a:ln>
-                <a:noFill/>
-              </a:ln>
+            <a:endParaRPr lang="en-US" altLang="ko-KR">
               <a:solidFill>
                 <a:prstClr val="black"/>
               </a:solidFill>
-              <a:effectLst/>
-              <a:uLnTx/>
-              <a:uFillTx/>
-              <a:latin typeface="맑은 고딕"/>
               <a:ea typeface="맑은 고딕" panose="020B0503020000020004" pitchFamily="50" charset="-127"/>
-              <a:cs typeface="+mn-cs"/>
             </a:endParaRPr>
           </a:p>
         </p:txBody>
@@ -1441,70 +1345,38 @@
           <a:bodyPr/>
           <a:lstStyle/>
           <a:p>
-            <a:pPr marL="0" marR="0" lvl="0" indent="0" algn="r" defTabSz="914400" rtl="0" eaLnBrk="1" fontAlgn="auto" latinLnBrk="1" hangingPunct="1">
-              <a:lnSpc>
-                <a:spcPct val="100000"/>
-              </a:lnSpc>
+            <a:pPr defTabSz="914857" fontAlgn="auto">
               <a:spcBef>
                 <a:spcPts val="0"/>
               </a:spcBef>
               <a:spcAft>
                 <a:spcPts val="0"/>
               </a:spcAft>
-              <a:buClrTx/>
-              <a:buSzTx/>
-              <a:buFontTx/>
-              <a:buNone/>
-              <a:tabLst/>
               <a:defRPr/>
             </a:pPr>
             <a:fld id="{14475004-9454-4C07-A18A-CD2DC04A4F75}" type="slidenum">
-              <a:rPr kumimoji="0" lang="en-US" altLang="ko-KR" sz="1200" b="0" i="0" u="none" strike="noStrike" kern="1200" cap="none" spc="0" normalizeH="0" baseline="0" noProof="0" smtClean="0">
-                <a:ln>
-                  <a:noFill/>
-                </a:ln>
+              <a:rPr lang="en-US" altLang="ko-KR">
                 <a:solidFill>
                   <a:prstClr val="black"/>
                 </a:solidFill>
-                <a:effectLst/>
-                <a:uLnTx/>
-                <a:uFillTx/>
-                <a:latin typeface="맑은 고딕"/>
                 <a:ea typeface="맑은 고딕" panose="020B0503020000020004" pitchFamily="50" charset="-127"/>
-                <a:cs typeface="+mn-cs"/>
               </a:rPr>
-              <a:pPr marL="0" marR="0" lvl="0" indent="0" algn="r" defTabSz="914400" rtl="0" eaLnBrk="1" fontAlgn="auto" latinLnBrk="1" hangingPunct="1">
-                <a:lnSpc>
-                  <a:spcPct val="100000"/>
-                </a:lnSpc>
+              <a:pPr defTabSz="914857" fontAlgn="auto">
                 <a:spcBef>
                   <a:spcPts val="0"/>
                 </a:spcBef>
                 <a:spcAft>
                   <a:spcPts val="0"/>
                 </a:spcAft>
-                <a:buClrTx/>
-                <a:buSzTx/>
-                <a:buFontTx/>
-                <a:buNone/>
-                <a:tabLst/>
                 <a:defRPr/>
               </a:pPr>
               <a:t>2</a:t>
             </a:fld>
-            <a:endParaRPr kumimoji="0" lang="en-US" altLang="ko-KR" sz="1200" b="0" i="0" u="none" strike="noStrike" kern="1200" cap="none" spc="0" normalizeH="0" baseline="0" noProof="0">
-              <a:ln>
-                <a:noFill/>
-              </a:ln>
+            <a:endParaRPr lang="en-US" altLang="ko-KR">
               <a:solidFill>
                 <a:prstClr val="black"/>
               </a:solidFill>
-              <a:effectLst/>
-              <a:uLnTx/>
-              <a:uFillTx/>
-              <a:latin typeface="맑은 고딕"/>
               <a:ea typeface="맑은 고딕" panose="020B0503020000020004" pitchFamily="50" charset="-127"/>
-              <a:cs typeface="+mn-cs"/>
             </a:endParaRPr>
           </a:p>
         </p:txBody>
@@ -1585,70 +1457,38 @@
           <a:bodyPr/>
           <a:lstStyle/>
           <a:p>
-            <a:pPr marL="0" marR="0" lvl="0" indent="0" algn="r" defTabSz="914400" rtl="0" eaLnBrk="1" fontAlgn="auto" latinLnBrk="1" hangingPunct="1">
-              <a:lnSpc>
-                <a:spcPct val="100000"/>
-              </a:lnSpc>
+            <a:pPr defTabSz="914857" fontAlgn="auto">
               <a:spcBef>
                 <a:spcPts val="0"/>
               </a:spcBef>
               <a:spcAft>
                 <a:spcPts val="0"/>
               </a:spcAft>
-              <a:buClrTx/>
-              <a:buSzTx/>
-              <a:buFontTx/>
-              <a:buNone/>
-              <a:tabLst/>
               <a:defRPr/>
             </a:pPr>
             <a:fld id="{14475004-9454-4C07-A18A-CD2DC04A4F75}" type="slidenum">
-              <a:rPr kumimoji="0" lang="en-US" altLang="ko-KR" sz="1200" b="0" i="0" u="none" strike="noStrike" kern="1200" cap="none" spc="0" normalizeH="0" baseline="0" noProof="0" smtClean="0">
-                <a:ln>
-                  <a:noFill/>
-                </a:ln>
+              <a:rPr lang="en-US" altLang="ko-KR">
                 <a:solidFill>
                   <a:prstClr val="black"/>
                 </a:solidFill>
-                <a:effectLst/>
-                <a:uLnTx/>
-                <a:uFillTx/>
-                <a:latin typeface="맑은 고딕"/>
                 <a:ea typeface="맑은 고딕" panose="020B0503020000020004" pitchFamily="50" charset="-127"/>
-                <a:cs typeface="+mn-cs"/>
               </a:rPr>
-              <a:pPr marL="0" marR="0" lvl="0" indent="0" algn="r" defTabSz="914400" rtl="0" eaLnBrk="1" fontAlgn="auto" latinLnBrk="1" hangingPunct="1">
-                <a:lnSpc>
-                  <a:spcPct val="100000"/>
-                </a:lnSpc>
+              <a:pPr defTabSz="914857" fontAlgn="auto">
                 <a:spcBef>
                   <a:spcPts val="0"/>
                 </a:spcBef>
                 <a:spcAft>
                   <a:spcPts val="0"/>
                 </a:spcAft>
-                <a:buClrTx/>
-                <a:buSzTx/>
-                <a:buFontTx/>
-                <a:buNone/>
-                <a:tabLst/>
                 <a:defRPr/>
               </a:pPr>
               <a:t>3</a:t>
             </a:fld>
-            <a:endParaRPr kumimoji="0" lang="en-US" altLang="ko-KR" sz="1200" b="0" i="0" u="none" strike="noStrike" kern="1200" cap="none" spc="0" normalizeH="0" baseline="0" noProof="0">
-              <a:ln>
-                <a:noFill/>
-              </a:ln>
+            <a:endParaRPr lang="en-US" altLang="ko-KR">
               <a:solidFill>
                 <a:prstClr val="black"/>
               </a:solidFill>
-              <a:effectLst/>
-              <a:uLnTx/>
-              <a:uFillTx/>
-              <a:latin typeface="맑은 고딕"/>
               <a:ea typeface="맑은 고딕" panose="020B0503020000020004" pitchFamily="50" charset="-127"/>
-              <a:cs typeface="+mn-cs"/>
             </a:endParaRPr>
           </a:p>
         </p:txBody>
@@ -1729,70 +1569,38 @@
           <a:bodyPr/>
           <a:lstStyle/>
           <a:p>
-            <a:pPr marL="0" marR="0" lvl="0" indent="0" algn="r" defTabSz="914400" rtl="0" eaLnBrk="1" fontAlgn="auto" latinLnBrk="1" hangingPunct="1">
-              <a:lnSpc>
-                <a:spcPct val="100000"/>
-              </a:lnSpc>
+            <a:pPr defTabSz="914857" fontAlgn="auto">
               <a:spcBef>
                 <a:spcPts val="0"/>
               </a:spcBef>
               <a:spcAft>
                 <a:spcPts val="0"/>
               </a:spcAft>
-              <a:buClrTx/>
-              <a:buSzTx/>
-              <a:buFontTx/>
-              <a:buNone/>
-              <a:tabLst/>
               <a:defRPr/>
             </a:pPr>
             <a:fld id="{14475004-9454-4C07-A18A-CD2DC04A4F75}" type="slidenum">
-              <a:rPr kumimoji="0" lang="en-US" altLang="ko-KR" sz="1200" b="0" i="0" u="none" strike="noStrike" kern="1200" cap="none" spc="0" normalizeH="0" baseline="0" noProof="0" smtClean="0">
-                <a:ln>
-                  <a:noFill/>
-                </a:ln>
+              <a:rPr lang="en-US" altLang="ko-KR">
                 <a:solidFill>
                   <a:prstClr val="black"/>
                 </a:solidFill>
-                <a:effectLst/>
-                <a:uLnTx/>
-                <a:uFillTx/>
-                <a:latin typeface="맑은 고딕"/>
                 <a:ea typeface="맑은 고딕" panose="020B0503020000020004" pitchFamily="50" charset="-127"/>
-                <a:cs typeface="+mn-cs"/>
               </a:rPr>
-              <a:pPr marL="0" marR="0" lvl="0" indent="0" algn="r" defTabSz="914400" rtl="0" eaLnBrk="1" fontAlgn="auto" latinLnBrk="1" hangingPunct="1">
-                <a:lnSpc>
-                  <a:spcPct val="100000"/>
-                </a:lnSpc>
+              <a:pPr defTabSz="914857" fontAlgn="auto">
                 <a:spcBef>
                   <a:spcPts val="0"/>
                 </a:spcBef>
                 <a:spcAft>
                   <a:spcPts val="0"/>
                 </a:spcAft>
-                <a:buClrTx/>
-                <a:buSzTx/>
-                <a:buFontTx/>
-                <a:buNone/>
-                <a:tabLst/>
                 <a:defRPr/>
               </a:pPr>
               <a:t>4</a:t>
             </a:fld>
-            <a:endParaRPr kumimoji="0" lang="en-US" altLang="ko-KR" sz="1200" b="0" i="0" u="none" strike="noStrike" kern="1200" cap="none" spc="0" normalizeH="0" baseline="0" noProof="0">
-              <a:ln>
-                <a:noFill/>
-              </a:ln>
+            <a:endParaRPr lang="en-US" altLang="ko-KR">
               <a:solidFill>
                 <a:prstClr val="black"/>
               </a:solidFill>
-              <a:effectLst/>
-              <a:uLnTx/>
-              <a:uFillTx/>
-              <a:latin typeface="맑은 고딕"/>
               <a:ea typeface="맑은 고딕" panose="020B0503020000020004" pitchFamily="50" charset="-127"/>
-              <a:cs typeface="+mn-cs"/>
             </a:endParaRPr>
           </a:p>
         </p:txBody>
@@ -1873,70 +1681,38 @@
           <a:bodyPr/>
           <a:lstStyle/>
           <a:p>
-            <a:pPr marL="0" marR="0" lvl="0" indent="0" algn="r" defTabSz="914400" rtl="0" eaLnBrk="1" fontAlgn="auto" latinLnBrk="1" hangingPunct="1">
-              <a:lnSpc>
-                <a:spcPct val="100000"/>
-              </a:lnSpc>
+            <a:pPr defTabSz="914857" fontAlgn="auto">
               <a:spcBef>
                 <a:spcPts val="0"/>
               </a:spcBef>
               <a:spcAft>
                 <a:spcPts val="0"/>
               </a:spcAft>
-              <a:buClrTx/>
-              <a:buSzTx/>
-              <a:buFontTx/>
-              <a:buNone/>
-              <a:tabLst/>
               <a:defRPr/>
             </a:pPr>
             <a:fld id="{14475004-9454-4C07-A18A-CD2DC04A4F75}" type="slidenum">
-              <a:rPr kumimoji="0" lang="en-US" altLang="ko-KR" sz="1200" b="0" i="0" u="none" strike="noStrike" kern="1200" cap="none" spc="0" normalizeH="0" baseline="0" noProof="0" smtClean="0">
-                <a:ln>
-                  <a:noFill/>
-                </a:ln>
+              <a:rPr lang="en-US" altLang="ko-KR">
                 <a:solidFill>
                   <a:prstClr val="black"/>
                 </a:solidFill>
-                <a:effectLst/>
-                <a:uLnTx/>
-                <a:uFillTx/>
-                <a:latin typeface="맑은 고딕"/>
                 <a:ea typeface="맑은 고딕" panose="020B0503020000020004" pitchFamily="50" charset="-127"/>
-                <a:cs typeface="+mn-cs"/>
               </a:rPr>
-              <a:pPr marL="0" marR="0" lvl="0" indent="0" algn="r" defTabSz="914400" rtl="0" eaLnBrk="1" fontAlgn="auto" latinLnBrk="1" hangingPunct="1">
-                <a:lnSpc>
-                  <a:spcPct val="100000"/>
-                </a:lnSpc>
+              <a:pPr defTabSz="914857" fontAlgn="auto">
                 <a:spcBef>
                   <a:spcPts val="0"/>
                 </a:spcBef>
                 <a:spcAft>
                   <a:spcPts val="0"/>
                 </a:spcAft>
-                <a:buClrTx/>
-                <a:buSzTx/>
-                <a:buFontTx/>
-                <a:buNone/>
-                <a:tabLst/>
                 <a:defRPr/>
               </a:pPr>
               <a:t>5</a:t>
             </a:fld>
-            <a:endParaRPr kumimoji="0" lang="en-US" altLang="ko-KR" sz="1200" b="0" i="0" u="none" strike="noStrike" kern="1200" cap="none" spc="0" normalizeH="0" baseline="0" noProof="0">
-              <a:ln>
-                <a:noFill/>
-              </a:ln>
+            <a:endParaRPr lang="en-US" altLang="ko-KR">
               <a:solidFill>
                 <a:prstClr val="black"/>
               </a:solidFill>
-              <a:effectLst/>
-              <a:uLnTx/>
-              <a:uFillTx/>
-              <a:latin typeface="맑은 고딕"/>
               <a:ea typeface="맑은 고딕" panose="020B0503020000020004" pitchFamily="50" charset="-127"/>
-              <a:cs typeface="+mn-cs"/>
             </a:endParaRPr>
           </a:p>
         </p:txBody>
@@ -2017,70 +1793,38 @@
           <a:bodyPr/>
           <a:lstStyle/>
           <a:p>
-            <a:pPr marL="0" marR="0" lvl="0" indent="0" algn="r" defTabSz="914400" rtl="0" eaLnBrk="1" fontAlgn="auto" latinLnBrk="1" hangingPunct="1">
-              <a:lnSpc>
-                <a:spcPct val="100000"/>
-              </a:lnSpc>
+            <a:pPr defTabSz="914857" fontAlgn="auto">
               <a:spcBef>
                 <a:spcPts val="0"/>
               </a:spcBef>
               <a:spcAft>
                 <a:spcPts val="0"/>
               </a:spcAft>
-              <a:buClrTx/>
-              <a:buSzTx/>
-              <a:buFontTx/>
-              <a:buNone/>
-              <a:tabLst/>
               <a:defRPr/>
             </a:pPr>
             <a:fld id="{14475004-9454-4C07-A18A-CD2DC04A4F75}" type="slidenum">
-              <a:rPr kumimoji="0" lang="en-US" altLang="ko-KR" sz="1200" b="0" i="0" u="none" strike="noStrike" kern="1200" cap="none" spc="0" normalizeH="0" baseline="0" noProof="0" smtClean="0">
-                <a:ln>
-                  <a:noFill/>
-                </a:ln>
+              <a:rPr lang="en-US" altLang="ko-KR">
                 <a:solidFill>
                   <a:prstClr val="black"/>
                 </a:solidFill>
-                <a:effectLst/>
-                <a:uLnTx/>
-                <a:uFillTx/>
-                <a:latin typeface="맑은 고딕"/>
                 <a:ea typeface="맑은 고딕" panose="020B0503020000020004" pitchFamily="50" charset="-127"/>
-                <a:cs typeface="+mn-cs"/>
               </a:rPr>
-              <a:pPr marL="0" marR="0" lvl="0" indent="0" algn="r" defTabSz="914400" rtl="0" eaLnBrk="1" fontAlgn="auto" latinLnBrk="1" hangingPunct="1">
-                <a:lnSpc>
-                  <a:spcPct val="100000"/>
-                </a:lnSpc>
+              <a:pPr defTabSz="914857" fontAlgn="auto">
                 <a:spcBef>
                   <a:spcPts val="0"/>
                 </a:spcBef>
                 <a:spcAft>
                   <a:spcPts val="0"/>
                 </a:spcAft>
-                <a:buClrTx/>
-                <a:buSzTx/>
-                <a:buFontTx/>
-                <a:buNone/>
-                <a:tabLst/>
                 <a:defRPr/>
               </a:pPr>
               <a:t>6</a:t>
             </a:fld>
-            <a:endParaRPr kumimoji="0" lang="en-US" altLang="ko-KR" sz="1200" b="0" i="0" u="none" strike="noStrike" kern="1200" cap="none" spc="0" normalizeH="0" baseline="0" noProof="0">
-              <a:ln>
-                <a:noFill/>
-              </a:ln>
+            <a:endParaRPr lang="en-US" altLang="ko-KR">
               <a:solidFill>
                 <a:prstClr val="black"/>
               </a:solidFill>
-              <a:effectLst/>
-              <a:uLnTx/>
-              <a:uFillTx/>
-              <a:latin typeface="맑은 고딕"/>
               <a:ea typeface="맑은 고딕" panose="020B0503020000020004" pitchFamily="50" charset="-127"/>
-              <a:cs typeface="+mn-cs"/>
             </a:endParaRPr>
           </a:p>
         </p:txBody>
@@ -2161,70 +1905,38 @@
           <a:bodyPr/>
           <a:lstStyle/>
           <a:p>
-            <a:pPr marL="0" marR="0" lvl="0" indent="0" algn="r" defTabSz="914400" rtl="0" eaLnBrk="1" fontAlgn="auto" latinLnBrk="1" hangingPunct="1">
-              <a:lnSpc>
-                <a:spcPct val="100000"/>
-              </a:lnSpc>
+            <a:pPr defTabSz="914857" fontAlgn="auto">
               <a:spcBef>
                 <a:spcPts val="0"/>
               </a:spcBef>
               <a:spcAft>
                 <a:spcPts val="0"/>
               </a:spcAft>
-              <a:buClrTx/>
-              <a:buSzTx/>
-              <a:buFontTx/>
-              <a:buNone/>
-              <a:tabLst/>
               <a:defRPr/>
             </a:pPr>
             <a:fld id="{14475004-9454-4C07-A18A-CD2DC04A4F75}" type="slidenum">
-              <a:rPr kumimoji="0" lang="en-US" altLang="ko-KR" sz="1200" b="0" i="0" u="none" strike="noStrike" kern="1200" cap="none" spc="0" normalizeH="0" baseline="0" noProof="0" smtClean="0">
-                <a:ln>
-                  <a:noFill/>
-                </a:ln>
+              <a:rPr lang="en-US" altLang="ko-KR">
                 <a:solidFill>
                   <a:prstClr val="black"/>
                 </a:solidFill>
-                <a:effectLst/>
-                <a:uLnTx/>
-                <a:uFillTx/>
-                <a:latin typeface="맑은 고딕"/>
                 <a:ea typeface="맑은 고딕" panose="020B0503020000020004" pitchFamily="50" charset="-127"/>
-                <a:cs typeface="+mn-cs"/>
               </a:rPr>
-              <a:pPr marL="0" marR="0" lvl="0" indent="0" algn="r" defTabSz="914400" rtl="0" eaLnBrk="1" fontAlgn="auto" latinLnBrk="1" hangingPunct="1">
-                <a:lnSpc>
-                  <a:spcPct val="100000"/>
-                </a:lnSpc>
+              <a:pPr defTabSz="914857" fontAlgn="auto">
                 <a:spcBef>
                   <a:spcPts val="0"/>
                 </a:spcBef>
                 <a:spcAft>
                   <a:spcPts val="0"/>
                 </a:spcAft>
-                <a:buClrTx/>
-                <a:buSzTx/>
-                <a:buFontTx/>
-                <a:buNone/>
-                <a:tabLst/>
                 <a:defRPr/>
               </a:pPr>
               <a:t>7</a:t>
             </a:fld>
-            <a:endParaRPr kumimoji="0" lang="en-US" altLang="ko-KR" sz="1200" b="0" i="0" u="none" strike="noStrike" kern="1200" cap="none" spc="0" normalizeH="0" baseline="0" noProof="0">
-              <a:ln>
-                <a:noFill/>
-              </a:ln>
+            <a:endParaRPr lang="en-US" altLang="ko-KR">
               <a:solidFill>
                 <a:prstClr val="black"/>
               </a:solidFill>
-              <a:effectLst/>
-              <a:uLnTx/>
-              <a:uFillTx/>
-              <a:latin typeface="맑은 고딕"/>
               <a:ea typeface="맑은 고딕" panose="020B0503020000020004" pitchFamily="50" charset="-127"/>
-              <a:cs typeface="+mn-cs"/>
             </a:endParaRPr>
           </a:p>
         </p:txBody>
@@ -2305,70 +2017,38 @@
           <a:bodyPr/>
           <a:lstStyle/>
           <a:p>
-            <a:pPr marL="0" marR="0" lvl="0" indent="0" algn="r" defTabSz="914400" rtl="0" eaLnBrk="1" fontAlgn="auto" latinLnBrk="1" hangingPunct="1">
-              <a:lnSpc>
-                <a:spcPct val="100000"/>
-              </a:lnSpc>
+            <a:pPr defTabSz="914857" fontAlgn="auto">
               <a:spcBef>
                 <a:spcPts val="0"/>
               </a:spcBef>
               <a:spcAft>
                 <a:spcPts val="0"/>
               </a:spcAft>
-              <a:buClrTx/>
-              <a:buSzTx/>
-              <a:buFontTx/>
-              <a:buNone/>
-              <a:tabLst/>
               <a:defRPr/>
             </a:pPr>
             <a:fld id="{14475004-9454-4C07-A18A-CD2DC04A4F75}" type="slidenum">
-              <a:rPr kumimoji="0" lang="en-US" altLang="ko-KR" sz="1200" b="0" i="0" u="none" strike="noStrike" kern="1200" cap="none" spc="0" normalizeH="0" baseline="0" noProof="0" smtClean="0">
-                <a:ln>
-                  <a:noFill/>
-                </a:ln>
+              <a:rPr lang="en-US" altLang="ko-KR">
                 <a:solidFill>
                   <a:prstClr val="black"/>
                 </a:solidFill>
-                <a:effectLst/>
-                <a:uLnTx/>
-                <a:uFillTx/>
-                <a:latin typeface="맑은 고딕"/>
                 <a:ea typeface="맑은 고딕" panose="020B0503020000020004" pitchFamily="50" charset="-127"/>
-                <a:cs typeface="+mn-cs"/>
               </a:rPr>
-              <a:pPr marL="0" marR="0" lvl="0" indent="0" algn="r" defTabSz="914400" rtl="0" eaLnBrk="1" fontAlgn="auto" latinLnBrk="1" hangingPunct="1">
-                <a:lnSpc>
-                  <a:spcPct val="100000"/>
-                </a:lnSpc>
+              <a:pPr defTabSz="914857" fontAlgn="auto">
                 <a:spcBef>
                   <a:spcPts val="0"/>
                 </a:spcBef>
                 <a:spcAft>
                   <a:spcPts val="0"/>
                 </a:spcAft>
-                <a:buClrTx/>
-                <a:buSzTx/>
-                <a:buFontTx/>
-                <a:buNone/>
-                <a:tabLst/>
                 <a:defRPr/>
               </a:pPr>
               <a:t>8</a:t>
             </a:fld>
-            <a:endParaRPr kumimoji="0" lang="en-US" altLang="ko-KR" sz="1200" b="0" i="0" u="none" strike="noStrike" kern="1200" cap="none" spc="0" normalizeH="0" baseline="0" noProof="0">
-              <a:ln>
-                <a:noFill/>
-              </a:ln>
+            <a:endParaRPr lang="en-US" altLang="ko-KR">
               <a:solidFill>
                 <a:prstClr val="black"/>
               </a:solidFill>
-              <a:effectLst/>
-              <a:uLnTx/>
-              <a:uFillTx/>
-              <a:latin typeface="맑은 고딕"/>
               <a:ea typeface="맑은 고딕" panose="020B0503020000020004" pitchFamily="50" charset="-127"/>
-              <a:cs typeface="+mn-cs"/>
             </a:endParaRPr>
           </a:p>
         </p:txBody>
@@ -5280,14 +4960,14 @@
           <p:nvPr>
             <p:extLst>
               <p:ext uri="{D42A27DB-BD31-4B8C-83A1-F6EECF244321}">
-                <p14:modId xmlns:p14="http://schemas.microsoft.com/office/powerpoint/2010/main" val="3377574664"/>
+                <p14:modId xmlns:p14="http://schemas.microsoft.com/office/powerpoint/2010/main" val="100087338"/>
               </p:ext>
             </p:extLst>
           </p:nvPr>
         </p:nvGraphicFramePr>
         <p:xfrm>
           <a:off x="215899" y="692696"/>
-          <a:ext cx="8748588" cy="4559000"/>
+          <a:ext cx="8748588" cy="5473400"/>
         </p:xfrm>
         <a:graphic>
           <a:graphicData uri="http://schemas.openxmlformats.org/drawingml/2006/table">
@@ -5308,14 +4988,14 @@
                     </a:ext>
                   </a:extLst>
                 </a:gridCol>
-                <a:gridCol w="2879246">
+                <a:gridCol w="3096344">
                   <a:extLst>
                     <a:ext uri="{9D8B030D-6E8A-4147-A177-3AD203B41FA5}">
                       <a16:colId xmlns:a16="http://schemas.microsoft.com/office/drawing/2014/main" val="644301783"/>
                     </a:ext>
                   </a:extLst>
                 </a:gridCol>
-                <a:gridCol w="1320595">
+                <a:gridCol w="1103497">
                   <a:extLst>
                     <a:ext uri="{9D8B030D-6E8A-4147-A177-3AD203B41FA5}">
                       <a16:colId xmlns:a16="http://schemas.microsoft.com/office/drawing/2014/main" val="2350242535"/>
@@ -6280,7 +5960,22 @@
                           <a:ea typeface="+mn-ea"/>
                           <a:cs typeface="+mn-cs"/>
                         </a:rPr>
-                        <a:t>    (22</a:t>
+                        <a:t>    (</a:t>
+                      </a:r>
+                      <a:r>
+                        <a:rPr kumimoji="1" lang="en-US" altLang="ko-KR" sz="1000" b="0" i="0" u="none" strike="noStrike" kern="1200" cap="none" normalizeH="0" baseline="0" smtClean="0">
+                          <a:ln>
+                            <a:noFill/>
+                          </a:ln>
+                          <a:solidFill>
+                            <a:schemeClr val="tx1"/>
+                          </a:solidFill>
+                          <a:effectLst/>
+                          <a:latin typeface="+mn-lt"/>
+                          <a:ea typeface="+mn-ea"/>
+                          <a:cs typeface="+mn-cs"/>
+                        </a:rPr>
+                        <a:t>20</a:t>
                       </a:r>
                       <a:r>
                         <a:rPr kumimoji="1" lang="ko-KR" altLang="en-US" sz="1000" b="0" i="0" u="none" strike="noStrike" kern="1200" cap="none" normalizeH="0" baseline="0" smtClean="0">
@@ -6516,39 +6211,6 @@
                         </a:rPr>
                         <a:t>최대 난방 평가 진행 </a:t>
                       </a:r>
-                      <a:endParaRPr kumimoji="1" lang="en-US" altLang="ko-KR" sz="1000" b="0" i="0" u="none" strike="noStrike" kern="1200" cap="none" normalizeH="0" baseline="0" smtClean="0">
-                        <a:ln>
-                          <a:noFill/>
-                        </a:ln>
-                        <a:solidFill>
-                          <a:schemeClr val="tx1"/>
-                        </a:solidFill>
-                        <a:effectLst/>
-                        <a:latin typeface="+mn-lt"/>
-                        <a:ea typeface="+mn-ea"/>
-                        <a:cs typeface="+mn-cs"/>
-                      </a:endParaRPr>
-                    </a:p>
-                    <a:p>
-                      <a:pPr marL="0" marR="0" lvl="0" indent="0" algn="l" defTabSz="914400" rtl="0" eaLnBrk="1" fontAlgn="base" latinLnBrk="1" hangingPunct="1">
-                        <a:lnSpc>
-                          <a:spcPct val="100000"/>
-                        </a:lnSpc>
-                        <a:spcBef>
-                          <a:spcPct val="20000"/>
-                        </a:spcBef>
-                        <a:spcAft>
-                          <a:spcPct val="0"/>
-                        </a:spcAft>
-                        <a:buClr>
-                          <a:srgbClr val="FF0000"/>
-                        </a:buClr>
-                        <a:buSzTx/>
-                        <a:buFont typeface="Wingdings" pitchFamily="2" charset="2"/>
-                        <a:buNone/>
-                        <a:tabLst/>
-                        <a:defRPr/>
-                      </a:pPr>
                       <a:r>
                         <a:rPr kumimoji="1" lang="en-US" altLang="ko-KR" sz="1000" b="0" i="0" u="none" strike="noStrike" kern="1200" cap="none" normalizeH="0" baseline="0" smtClean="0">
                           <a:ln>
@@ -6562,37 +6224,7 @@
                           <a:ea typeface="+mn-ea"/>
                           <a:cs typeface="+mn-cs"/>
                         </a:rPr>
-                        <a:t>    (</a:t>
-                      </a:r>
-                      <a:r>
-                        <a:rPr kumimoji="1" lang="ko-KR" altLang="en-US" sz="1000" b="0" i="0" u="none" strike="noStrike" kern="1200" cap="none" normalizeH="0" baseline="0" smtClean="0">
-                          <a:ln>
-                            <a:noFill/>
-                          </a:ln>
-                          <a:solidFill>
-                            <a:schemeClr val="tx1"/>
-                          </a:solidFill>
-                          <a:effectLst/>
-                          <a:latin typeface="+mn-lt"/>
-                          <a:ea typeface="+mn-ea"/>
-                          <a:cs typeface="+mn-cs"/>
-                        </a:rPr>
-                        <a:t>현대 환경시험동</a:t>
-                      </a:r>
-                      <a:r>
-                        <a:rPr kumimoji="1" lang="en-US" altLang="ko-KR" sz="1000" b="0" i="0" u="none" strike="noStrike" kern="1200" cap="none" normalizeH="0" baseline="0" smtClean="0">
-                          <a:ln>
-                            <a:noFill/>
-                          </a:ln>
-                          <a:solidFill>
-                            <a:schemeClr val="tx1"/>
-                          </a:solidFill>
-                          <a:effectLst/>
-                          <a:latin typeface="+mn-lt"/>
-                          <a:ea typeface="+mn-ea"/>
-                          <a:cs typeface="+mn-cs"/>
-                        </a:rPr>
-                        <a:t>, 8</a:t>
+                        <a:t>(8</a:t>
                       </a:r>
                       <a:r>
                         <a:rPr kumimoji="1" lang="ko-KR" altLang="en-US" sz="1000" b="0" i="0" u="none" strike="noStrike" kern="1200" cap="none" normalizeH="0" baseline="0" smtClean="0">
@@ -6654,6 +6286,84 @@
                         </a:rPr>
                         <a:t>)</a:t>
                       </a:r>
+                    </a:p>
+                    <a:p>
+                      <a:pPr marL="0" marR="0" lvl="0" indent="0" algn="l" defTabSz="914400" rtl="0" eaLnBrk="1" fontAlgn="base" latinLnBrk="1" hangingPunct="1">
+                        <a:lnSpc>
+                          <a:spcPct val="100000"/>
+                        </a:lnSpc>
+                        <a:spcBef>
+                          <a:spcPct val="20000"/>
+                        </a:spcBef>
+                        <a:spcAft>
+                          <a:spcPct val="0"/>
+                        </a:spcAft>
+                        <a:buClr>
+                          <a:srgbClr val="FF0000"/>
+                        </a:buClr>
+                        <a:buSzTx/>
+                        <a:buFont typeface="Wingdings" pitchFamily="2" charset="2"/>
+                        <a:buNone/>
+                        <a:tabLst/>
+                        <a:defRPr/>
+                      </a:pPr>
+                      <a:r>
+                        <a:rPr kumimoji="1" lang="en-US" altLang="ko-KR" sz="1000" b="0" i="0" u="none" strike="noStrike" kern="1200" cap="none" normalizeH="0" baseline="0" smtClean="0">
+                          <a:ln>
+                            <a:noFill/>
+                          </a:ln>
+                          <a:solidFill>
+                            <a:schemeClr val="tx1"/>
+                          </a:solidFill>
+                          <a:effectLst/>
+                          <a:latin typeface="+mn-lt"/>
+                          <a:ea typeface="+mn-ea"/>
+                          <a:cs typeface="+mn-cs"/>
+                        </a:rPr>
+                        <a:t>     : </a:t>
+                      </a:r>
+                      <a:r>
+                        <a:rPr kumimoji="1" lang="ko-KR" altLang="en-US" sz="1000" b="0" i="0" u="none" strike="noStrike" kern="1200" cap="none" normalizeH="0" baseline="0" smtClean="0">
+                          <a:ln>
+                            <a:noFill/>
+                          </a:ln>
+                          <a:solidFill>
+                            <a:schemeClr val="tx1"/>
+                          </a:solidFill>
+                          <a:effectLst/>
+                          <a:latin typeface="+mn-lt"/>
+                          <a:ea typeface="+mn-ea"/>
+                          <a:cs typeface="+mn-cs"/>
+                        </a:rPr>
+                        <a:t>좌우 및 최대 난방 평가 </a:t>
+                      </a:r>
+                      <a:r>
+                        <a:rPr kumimoji="1" lang="en-US" altLang="ko-KR" sz="1000" b="0" i="0" u="none" strike="noStrike" kern="1200" cap="none" normalizeH="0" baseline="0" smtClean="0">
+                          <a:ln>
+                            <a:noFill/>
+                          </a:ln>
+                          <a:solidFill>
+                            <a:schemeClr val="tx1"/>
+                          </a:solidFill>
+                          <a:effectLst/>
+                          <a:latin typeface="+mn-lt"/>
+                          <a:ea typeface="+mn-ea"/>
+                          <a:cs typeface="+mn-cs"/>
+                        </a:rPr>
+                        <a:t>OK</a:t>
+                      </a:r>
+                      <a:endParaRPr kumimoji="1" lang="en-US" altLang="ko-KR" sz="1000" b="0" i="0" u="none" strike="noStrike" kern="1200" cap="none" normalizeH="0" baseline="0" smtClean="0">
+                        <a:ln>
+                          <a:noFill/>
+                        </a:ln>
+                        <a:solidFill>
+                          <a:schemeClr val="tx1"/>
+                        </a:solidFill>
+                        <a:effectLst/>
+                        <a:latin typeface="+mn-lt"/>
+                        <a:ea typeface="+mn-ea"/>
+                        <a:cs typeface="+mn-cs"/>
+                      </a:endParaRPr>
                     </a:p>
                     <a:p>
                       <a:pPr marL="0" marR="0" lvl="0" indent="0" algn="l" defTabSz="914400" rtl="0" eaLnBrk="1" fontAlgn="base" latinLnBrk="1" hangingPunct="1">
@@ -6895,7 +6605,22 @@
                           <a:ea typeface="+mn-ea"/>
                           <a:cs typeface="+mn-cs"/>
                         </a:rPr>
-                        <a:t>최대 난방 평가 및 좌우 편차 시험 진행 </a:t>
+                        <a:t>최대 난방 평가 및 좌우 편차 시험 </a:t>
+                      </a:r>
+                      <a:r>
+                        <a:rPr kumimoji="1" lang="ko-KR" altLang="en-US" sz="1000" b="0" i="0" u="none" strike="noStrike" kern="1200" cap="none" normalizeH="0" baseline="0" smtClean="0">
+                          <a:ln>
+                            <a:noFill/>
+                          </a:ln>
+                          <a:solidFill>
+                            <a:schemeClr val="tx1"/>
+                          </a:solidFill>
+                          <a:effectLst/>
+                          <a:latin typeface="+mn-lt"/>
+                          <a:ea typeface="+mn-ea"/>
+                          <a:cs typeface="+mn-cs"/>
+                        </a:rPr>
+                        <a:t>진행</a:t>
                       </a:r>
                       <a:endParaRPr kumimoji="1" lang="en-US" altLang="ko-KR" sz="1000" b="0" i="0" u="none" strike="noStrike" kern="1200" cap="none" normalizeH="0" baseline="0" smtClean="0">
                         <a:ln>
@@ -8059,39 +7784,6 @@
                         </a:rPr>
                         <a:t>테스트 진행 </a:t>
                       </a:r>
-                      <a:endParaRPr kumimoji="1" lang="en-US" altLang="ko-KR" sz="1000" b="0" i="0" u="none" strike="noStrike" kern="1200" cap="none" normalizeH="0" baseline="0" smtClean="0">
-                        <a:ln>
-                          <a:noFill/>
-                        </a:ln>
-                        <a:solidFill>
-                          <a:schemeClr val="tx1"/>
-                        </a:solidFill>
-                        <a:effectLst/>
-                        <a:latin typeface="+mn-lt"/>
-                        <a:ea typeface="+mn-ea"/>
-                        <a:cs typeface="+mn-cs"/>
-                      </a:endParaRPr>
-                    </a:p>
-                    <a:p>
-                      <a:pPr marL="0" marR="0" lvl="0" indent="0" algn="l" defTabSz="914400" rtl="0" eaLnBrk="1" fontAlgn="base" latinLnBrk="1" hangingPunct="1">
-                        <a:lnSpc>
-                          <a:spcPct val="100000"/>
-                        </a:lnSpc>
-                        <a:spcBef>
-                          <a:spcPct val="20000"/>
-                        </a:spcBef>
-                        <a:spcAft>
-                          <a:spcPct val="0"/>
-                        </a:spcAft>
-                        <a:buClr>
-                          <a:srgbClr val="FF0000"/>
-                        </a:buClr>
-                        <a:buSzTx/>
-                        <a:buFont typeface="Wingdings" pitchFamily="2" charset="2"/>
-                        <a:buNone/>
-                        <a:tabLst/>
-                        <a:defRPr/>
-                      </a:pPr>
                       <a:r>
                         <a:rPr kumimoji="1" lang="en-US" altLang="ko-KR" sz="1000" b="0" i="0" u="none" strike="noStrike" kern="1200" cap="none" normalizeH="0" baseline="0" smtClean="0">
                           <a:ln>
@@ -8105,37 +7797,7 @@
                           <a:ea typeface="+mn-ea"/>
                           <a:cs typeface="+mn-cs"/>
                         </a:rPr>
-                        <a:t>   (</a:t>
-                      </a:r>
-                      <a:r>
-                        <a:rPr kumimoji="1" lang="ko-KR" altLang="en-US" sz="1000" b="0" i="0" u="none" strike="noStrike" kern="1200" cap="none" normalizeH="0" baseline="0" smtClean="0">
-                          <a:ln>
-                            <a:noFill/>
-                          </a:ln>
-                          <a:solidFill>
-                            <a:schemeClr val="tx1"/>
-                          </a:solidFill>
-                          <a:effectLst/>
-                          <a:latin typeface="+mn-lt"/>
-                          <a:ea typeface="+mn-ea"/>
-                          <a:cs typeface="+mn-cs"/>
-                        </a:rPr>
-                        <a:t>현대 환경시험동</a:t>
-                      </a:r>
-                      <a:r>
-                        <a:rPr kumimoji="1" lang="en-US" altLang="ko-KR" sz="1000" b="0" i="0" u="none" strike="noStrike" kern="1200" cap="none" normalizeH="0" baseline="0" smtClean="0">
-                          <a:ln>
-                            <a:noFill/>
-                          </a:ln>
-                          <a:solidFill>
-                            <a:schemeClr val="tx1"/>
-                          </a:solidFill>
-                          <a:effectLst/>
-                          <a:latin typeface="+mn-lt"/>
-                          <a:ea typeface="+mn-ea"/>
-                          <a:cs typeface="+mn-cs"/>
-                        </a:rPr>
-                        <a:t>, 8</a:t>
+                        <a:t>(8</a:t>
                       </a:r>
                       <a:r>
                         <a:rPr kumimoji="1" lang="ko-KR" altLang="en-US" sz="1000" b="0" i="0" u="none" strike="noStrike" kern="1200" cap="none" normalizeH="0" baseline="0" smtClean="0">
@@ -8197,6 +7859,559 @@
                         </a:rPr>
                         <a:t>)</a:t>
                       </a:r>
+                    </a:p>
+                    <a:p>
+                      <a:pPr marL="0" marR="0" lvl="0" indent="0" algn="l" defTabSz="914400" rtl="0" eaLnBrk="1" fontAlgn="base" latinLnBrk="1" hangingPunct="1">
+                        <a:lnSpc>
+                          <a:spcPct val="100000"/>
+                        </a:lnSpc>
+                        <a:spcBef>
+                          <a:spcPct val="20000"/>
+                        </a:spcBef>
+                        <a:spcAft>
+                          <a:spcPct val="0"/>
+                        </a:spcAft>
+                        <a:buClr>
+                          <a:srgbClr val="FF0000"/>
+                        </a:buClr>
+                        <a:buSzTx/>
+                        <a:buFont typeface="Wingdings" pitchFamily="2" charset="2"/>
+                        <a:buNone/>
+                        <a:tabLst/>
+                        <a:defRPr/>
+                      </a:pPr>
+                      <a:r>
+                        <a:rPr kumimoji="1" lang="en-US" altLang="ko-KR" sz="1000" b="0" i="0" u="none" strike="noStrike" kern="1200" cap="none" normalizeH="0" baseline="0" smtClean="0">
+                          <a:ln>
+                            <a:noFill/>
+                          </a:ln>
+                          <a:solidFill>
+                            <a:schemeClr val="tx1"/>
+                          </a:solidFill>
+                          <a:effectLst/>
+                          <a:latin typeface="+mn-lt"/>
+                          <a:ea typeface="+mn-ea"/>
+                          <a:cs typeface="+mn-cs"/>
+                        </a:rPr>
+                        <a:t>   : Limit </a:t>
+                      </a:r>
+                      <a:r>
+                        <a:rPr kumimoji="1" lang="ko-KR" altLang="en-US" sz="1000" b="0" i="0" u="none" strike="noStrike" kern="1200" cap="none" normalizeH="0" baseline="0" smtClean="0">
+                          <a:ln>
+                            <a:noFill/>
+                          </a:ln>
+                          <a:solidFill>
+                            <a:schemeClr val="tx1"/>
+                          </a:solidFill>
+                          <a:effectLst/>
+                          <a:latin typeface="+mn-lt"/>
+                          <a:ea typeface="+mn-ea"/>
+                          <a:cs typeface="+mn-cs"/>
+                        </a:rPr>
+                        <a:t>해제 후 테스트 진행 결과 </a:t>
+                      </a:r>
+                      <a:r>
+                        <a:rPr kumimoji="1" lang="en-US" altLang="ko-KR" sz="1000" b="0" i="0" u="none" strike="noStrike" kern="1200" cap="none" normalizeH="0" baseline="0" smtClean="0">
+                          <a:ln>
+                            <a:noFill/>
+                          </a:ln>
+                          <a:solidFill>
+                            <a:schemeClr val="tx1"/>
+                          </a:solidFill>
+                          <a:effectLst/>
+                          <a:latin typeface="+mn-lt"/>
+                          <a:ea typeface="+mn-ea"/>
+                          <a:cs typeface="+mn-cs"/>
+                        </a:rPr>
+                        <a:t>NG</a:t>
+                      </a:r>
+                    </a:p>
+                    <a:p>
+                      <a:pPr marL="0" marR="0" lvl="0" indent="0" algn="l" defTabSz="914400" rtl="0" eaLnBrk="1" fontAlgn="base" latinLnBrk="1" hangingPunct="1">
+                        <a:lnSpc>
+                          <a:spcPct val="100000"/>
+                        </a:lnSpc>
+                        <a:spcBef>
+                          <a:spcPct val="20000"/>
+                        </a:spcBef>
+                        <a:spcAft>
+                          <a:spcPct val="0"/>
+                        </a:spcAft>
+                        <a:buClr>
+                          <a:srgbClr val="FF0000"/>
+                        </a:buClr>
+                        <a:buSzTx/>
+                        <a:buFont typeface="Wingdings" pitchFamily="2" charset="2"/>
+                        <a:buNone/>
+                        <a:tabLst/>
+                        <a:defRPr/>
+                      </a:pPr>
+                      <a:r>
+                        <a:rPr kumimoji="1" lang="en-US" altLang="ko-KR" sz="1000" b="0" i="0" u="none" strike="noStrike" kern="1200" cap="none" normalizeH="0" baseline="0" smtClean="0">
+                          <a:ln>
+                            <a:noFill/>
+                          </a:ln>
+                          <a:solidFill>
+                            <a:schemeClr val="tx1"/>
+                          </a:solidFill>
+                          <a:effectLst/>
+                          <a:latin typeface="+mn-lt"/>
+                          <a:ea typeface="+mn-ea"/>
+                          <a:cs typeface="+mn-cs"/>
+                        </a:rPr>
+                        <a:t> - </a:t>
+                      </a:r>
+                      <a:r>
+                        <a:rPr kumimoji="1" lang="ko-KR" altLang="en-US" sz="1000" b="0" i="0" u="none" strike="noStrike" kern="1200" cap="none" normalizeH="0" baseline="0" smtClean="0">
+                          <a:ln>
+                            <a:noFill/>
+                          </a:ln>
+                          <a:solidFill>
+                            <a:schemeClr val="tx1"/>
+                          </a:solidFill>
+                          <a:effectLst/>
+                          <a:latin typeface="+mn-lt"/>
+                          <a:ea typeface="+mn-ea"/>
+                          <a:cs typeface="+mn-cs"/>
+                        </a:rPr>
+                        <a:t>추후 진행 계획 </a:t>
+                      </a:r>
+                      <a:r>
+                        <a:rPr kumimoji="1" lang="en-US" altLang="ko-KR" sz="1000" b="0" i="0" u="none" strike="noStrike" kern="1200" cap="none" normalizeH="0" baseline="0" smtClean="0">
+                          <a:ln>
+                            <a:noFill/>
+                          </a:ln>
+                          <a:solidFill>
+                            <a:schemeClr val="tx1"/>
+                          </a:solidFill>
+                          <a:effectLst/>
+                          <a:latin typeface="+mn-lt"/>
+                          <a:ea typeface="+mn-ea"/>
+                          <a:cs typeface="+mn-cs"/>
+                        </a:rPr>
+                        <a:t>:</a:t>
+                      </a:r>
+                    </a:p>
+                    <a:p>
+                      <a:pPr marL="0" marR="0" lvl="0" indent="0" algn="l" defTabSz="914400" rtl="0" eaLnBrk="1" fontAlgn="base" latinLnBrk="1" hangingPunct="1">
+                        <a:lnSpc>
+                          <a:spcPct val="100000"/>
+                        </a:lnSpc>
+                        <a:spcBef>
+                          <a:spcPct val="20000"/>
+                        </a:spcBef>
+                        <a:spcAft>
+                          <a:spcPct val="0"/>
+                        </a:spcAft>
+                        <a:buClr>
+                          <a:srgbClr val="FF0000"/>
+                        </a:buClr>
+                        <a:buSzTx/>
+                        <a:buFont typeface="Wingdings" pitchFamily="2" charset="2"/>
+                        <a:buNone/>
+                        <a:tabLst/>
+                        <a:defRPr/>
+                      </a:pPr>
+                      <a:r>
+                        <a:rPr kumimoji="1" lang="en-US" altLang="ko-KR" sz="1000" b="0" i="0" u="none" strike="noStrike" kern="1200" cap="none" normalizeH="0" baseline="0" smtClean="0">
+                          <a:ln>
+                            <a:noFill/>
+                          </a:ln>
+                          <a:solidFill>
+                            <a:schemeClr val="tx1"/>
+                          </a:solidFill>
+                          <a:effectLst/>
+                          <a:latin typeface="+mn-lt"/>
+                          <a:ea typeface="+mn-ea"/>
+                          <a:cs typeface="+mn-cs"/>
+                        </a:rPr>
+                        <a:t>   1) </a:t>
+                      </a:r>
+                      <a:r>
+                        <a:rPr kumimoji="1" lang="ko-KR" altLang="en-US" sz="1000" b="0" i="0" u="none" strike="noStrike" kern="1200" cap="none" normalizeH="0" baseline="0" smtClean="0">
+                          <a:ln>
+                            <a:noFill/>
+                          </a:ln>
+                          <a:solidFill>
+                            <a:schemeClr val="tx1"/>
+                          </a:solidFill>
+                          <a:effectLst/>
+                          <a:latin typeface="+mn-lt"/>
+                          <a:ea typeface="+mn-ea"/>
+                          <a:cs typeface="+mn-cs"/>
+                        </a:rPr>
+                        <a:t>성능 </a:t>
+                      </a:r>
+                      <a:r>
+                        <a:rPr kumimoji="1" lang="en-US" altLang="ko-KR" sz="1000" b="0" i="0" u="none" strike="noStrike" kern="1200" cap="none" normalizeH="0" baseline="0" smtClean="0">
+                          <a:ln>
+                            <a:noFill/>
+                          </a:ln>
+                          <a:solidFill>
+                            <a:schemeClr val="tx1"/>
+                          </a:solidFill>
+                          <a:effectLst/>
+                          <a:latin typeface="+mn-lt"/>
+                          <a:ea typeface="+mn-ea"/>
+                          <a:cs typeface="+mn-cs"/>
+                        </a:rPr>
+                        <a:t>6,200 </a:t>
+                      </a:r>
+                      <a:r>
+                        <a:rPr kumimoji="1" lang="en-US" altLang="ko-KR" sz="1000" b="0" i="0" u="none" strike="noStrike" kern="1200" cap="none" normalizeH="0" baseline="0" smtClean="0">
+                          <a:ln>
+                            <a:noFill/>
+                          </a:ln>
+                          <a:solidFill>
+                            <a:schemeClr val="tx1"/>
+                          </a:solidFill>
+                          <a:effectLst/>
+                          <a:latin typeface="+mn-lt"/>
+                          <a:ea typeface="+mn-ea"/>
+                          <a:cs typeface="+mn-cs"/>
+                          <a:sym typeface="Wingdings" panose="05000000000000000000" pitchFamily="2" charset="2"/>
+                        </a:rPr>
+                        <a:t> </a:t>
+                      </a:r>
+                      <a:r>
+                        <a:rPr kumimoji="1" lang="en-US" altLang="ko-KR" sz="1000" b="0" i="0" u="none" strike="noStrike" kern="1200" cap="none" normalizeH="0" baseline="0" smtClean="0">
+                          <a:ln>
+                            <a:noFill/>
+                          </a:ln>
+                          <a:solidFill>
+                            <a:schemeClr val="tx1"/>
+                          </a:solidFill>
+                          <a:effectLst/>
+                          <a:latin typeface="+mn-lt"/>
+                          <a:ea typeface="+mn-ea"/>
+                          <a:cs typeface="+mn-cs"/>
+                        </a:rPr>
+                        <a:t>6,800W </a:t>
+                      </a:r>
+                      <a:r>
+                        <a:rPr kumimoji="1" lang="ko-KR" altLang="en-US" sz="1000" b="0" i="0" u="none" strike="noStrike" kern="1200" cap="none" normalizeH="0" baseline="0" smtClean="0">
+                          <a:ln>
+                            <a:noFill/>
+                          </a:ln>
+                          <a:solidFill>
+                            <a:schemeClr val="tx1"/>
+                          </a:solidFill>
+                          <a:effectLst/>
+                          <a:latin typeface="+mn-lt"/>
+                          <a:ea typeface="+mn-ea"/>
+                          <a:cs typeface="+mn-cs"/>
+                        </a:rPr>
+                        <a:t>향상을 위한 방안 회</a:t>
+                      </a:r>
+                      <a:endParaRPr kumimoji="1" lang="en-US" altLang="ko-KR" sz="1000" b="0" i="0" u="none" strike="noStrike" kern="1200" cap="none" normalizeH="0" baseline="0" smtClean="0">
+                        <a:ln>
+                          <a:noFill/>
+                        </a:ln>
+                        <a:solidFill>
+                          <a:schemeClr val="tx1"/>
+                        </a:solidFill>
+                        <a:effectLst/>
+                        <a:latin typeface="+mn-lt"/>
+                        <a:ea typeface="+mn-ea"/>
+                        <a:cs typeface="+mn-cs"/>
+                      </a:endParaRPr>
+                    </a:p>
+                    <a:p>
+                      <a:pPr marL="0" marR="0" lvl="0" indent="0" algn="l" defTabSz="914400" rtl="0" eaLnBrk="1" fontAlgn="base" latinLnBrk="1" hangingPunct="1">
+                        <a:lnSpc>
+                          <a:spcPct val="100000"/>
+                        </a:lnSpc>
+                        <a:spcBef>
+                          <a:spcPct val="20000"/>
+                        </a:spcBef>
+                        <a:spcAft>
+                          <a:spcPct val="0"/>
+                        </a:spcAft>
+                        <a:buClr>
+                          <a:srgbClr val="FF0000"/>
+                        </a:buClr>
+                        <a:buSzTx/>
+                        <a:buFont typeface="Wingdings" pitchFamily="2" charset="2"/>
+                        <a:buNone/>
+                        <a:tabLst/>
+                        <a:defRPr/>
+                      </a:pPr>
+                      <a:r>
+                        <a:rPr kumimoji="1" lang="en-US" altLang="ko-KR" sz="1000" b="0" i="0" u="none" strike="noStrike" kern="1200" cap="none" normalizeH="0" baseline="0" smtClean="0">
+                          <a:ln>
+                            <a:noFill/>
+                          </a:ln>
+                          <a:solidFill>
+                            <a:schemeClr val="tx1"/>
+                          </a:solidFill>
+                          <a:effectLst/>
+                          <a:latin typeface="+mn-lt"/>
+                          <a:ea typeface="+mn-ea"/>
+                          <a:cs typeface="+mn-cs"/>
+                        </a:rPr>
+                        <a:t>     </a:t>
+                      </a:r>
+                      <a:r>
+                        <a:rPr kumimoji="1" lang="ko-KR" altLang="en-US" sz="1000" b="0" i="0" u="none" strike="noStrike" kern="1200" cap="none" normalizeH="0" baseline="0" smtClean="0">
+                          <a:ln>
+                            <a:noFill/>
+                          </a:ln>
+                          <a:solidFill>
+                            <a:schemeClr val="tx1"/>
+                          </a:solidFill>
+                          <a:effectLst/>
+                          <a:latin typeface="+mn-lt"/>
+                          <a:ea typeface="+mn-ea"/>
+                          <a:cs typeface="+mn-cs"/>
+                        </a:rPr>
+                        <a:t>신 및 </a:t>
+                      </a:r>
+                      <a:r>
+                        <a:rPr kumimoji="1" lang="en-US" altLang="ko-KR" sz="1000" b="0" i="0" u="none" strike="noStrike" kern="1200" cap="none" normalizeH="0" baseline="0" smtClean="0">
+                          <a:ln>
+                            <a:noFill/>
+                          </a:ln>
+                          <a:solidFill>
+                            <a:schemeClr val="tx1"/>
+                          </a:solidFill>
+                          <a:effectLst/>
+                          <a:latin typeface="+mn-lt"/>
+                          <a:ea typeface="+mn-ea"/>
+                          <a:cs typeface="+mn-cs"/>
+                        </a:rPr>
+                        <a:t>1~2</a:t>
+                      </a:r>
+                      <a:r>
+                        <a:rPr kumimoji="1" lang="ko-KR" altLang="en-US" sz="1000" b="0" i="0" u="none" strike="noStrike" kern="1200" cap="none" normalizeH="0" baseline="0" smtClean="0">
+                          <a:ln>
+                            <a:noFill/>
+                          </a:ln>
+                          <a:solidFill>
+                            <a:schemeClr val="tx1"/>
+                          </a:solidFill>
+                          <a:effectLst/>
+                          <a:latin typeface="+mn-lt"/>
+                          <a:ea typeface="+mn-ea"/>
+                          <a:cs typeface="+mn-cs"/>
+                        </a:rPr>
+                        <a:t>달이내 개선 완료 목표</a:t>
+                      </a:r>
+                      <a:endParaRPr kumimoji="1" lang="en-US" altLang="ko-KR" sz="1000" b="0" i="0" u="none" strike="noStrike" kern="1200" cap="none" normalizeH="0" baseline="0" smtClean="0">
+                        <a:ln>
+                          <a:noFill/>
+                        </a:ln>
+                        <a:solidFill>
+                          <a:schemeClr val="tx1"/>
+                        </a:solidFill>
+                        <a:effectLst/>
+                        <a:latin typeface="+mn-lt"/>
+                        <a:ea typeface="+mn-ea"/>
+                        <a:cs typeface="+mn-cs"/>
+                      </a:endParaRPr>
+                    </a:p>
+                    <a:p>
+                      <a:pPr marL="0" marR="0" lvl="0" indent="0" algn="l" defTabSz="914400" rtl="0" eaLnBrk="1" fontAlgn="base" latinLnBrk="1" hangingPunct="1">
+                        <a:lnSpc>
+                          <a:spcPct val="100000"/>
+                        </a:lnSpc>
+                        <a:spcBef>
+                          <a:spcPct val="20000"/>
+                        </a:spcBef>
+                        <a:spcAft>
+                          <a:spcPct val="0"/>
+                        </a:spcAft>
+                        <a:buClr>
+                          <a:srgbClr val="FF0000"/>
+                        </a:buClr>
+                        <a:buSzTx/>
+                        <a:buFont typeface="Wingdings" pitchFamily="2" charset="2"/>
+                        <a:buNone/>
+                        <a:tabLst/>
+                        <a:defRPr/>
+                      </a:pPr>
+                      <a:r>
+                        <a:rPr kumimoji="1" lang="en-US" altLang="ko-KR" sz="1000" b="0" i="0" u="none" strike="noStrike" kern="1200" cap="none" normalizeH="0" baseline="0" smtClean="0">
+                          <a:ln>
+                            <a:noFill/>
+                          </a:ln>
+                          <a:solidFill>
+                            <a:schemeClr val="tx1"/>
+                          </a:solidFill>
+                          <a:effectLst/>
+                          <a:latin typeface="+mn-lt"/>
+                          <a:ea typeface="+mn-ea"/>
+                          <a:cs typeface="+mn-cs"/>
+                        </a:rPr>
+                        <a:t>     (</a:t>
+                      </a:r>
+                      <a:r>
+                        <a:rPr kumimoji="1" lang="ko-KR" altLang="en-US" sz="1000" b="0" i="0" u="none" strike="noStrike" kern="1200" cap="none" normalizeH="0" baseline="0" smtClean="0">
+                          <a:ln>
+                            <a:noFill/>
+                          </a:ln>
+                          <a:solidFill>
+                            <a:schemeClr val="tx1"/>
+                          </a:solidFill>
+                          <a:effectLst/>
+                          <a:latin typeface="+mn-lt"/>
+                          <a:ea typeface="+mn-ea"/>
+                          <a:cs typeface="+mn-cs"/>
+                        </a:rPr>
+                        <a:t>최대 </a:t>
+                      </a:r>
+                      <a:r>
+                        <a:rPr kumimoji="1" lang="en-US" altLang="ko-KR" sz="1000" b="0" i="0" u="none" strike="noStrike" kern="1200" cap="none" normalizeH="0" baseline="0" smtClean="0">
+                          <a:ln>
+                            <a:noFill/>
+                          </a:ln>
+                          <a:solidFill>
+                            <a:schemeClr val="tx1"/>
+                          </a:solidFill>
+                          <a:effectLst/>
+                          <a:latin typeface="+mn-lt"/>
+                          <a:ea typeface="+mn-ea"/>
+                          <a:cs typeface="+mn-cs"/>
+                        </a:rPr>
+                        <a:t>2~3</a:t>
+                      </a:r>
+                      <a:r>
+                        <a:rPr kumimoji="1" lang="ko-KR" altLang="en-US" sz="1000" b="0" i="0" u="none" strike="noStrike" kern="1200" cap="none" normalizeH="0" baseline="0" smtClean="0">
+                          <a:ln>
+                            <a:noFill/>
+                          </a:ln>
+                          <a:solidFill>
+                            <a:schemeClr val="tx1"/>
+                          </a:solidFill>
+                          <a:effectLst/>
+                          <a:latin typeface="+mn-lt"/>
+                          <a:ea typeface="+mn-ea"/>
+                          <a:cs typeface="+mn-cs"/>
+                        </a:rPr>
+                        <a:t>달이내 개선점 안보이면 </a:t>
+                      </a:r>
+                      <a:r>
+                        <a:rPr kumimoji="1" lang="en-US" altLang="ko-KR" sz="1000" b="0" i="0" u="none" strike="noStrike" kern="1200" cap="none" normalizeH="0" baseline="0" smtClean="0">
+                          <a:ln>
+                            <a:noFill/>
+                          </a:ln>
+                          <a:solidFill>
+                            <a:schemeClr val="tx1"/>
+                          </a:solidFill>
+                          <a:effectLst/>
+                          <a:latin typeface="+mn-lt"/>
+                          <a:ea typeface="+mn-ea"/>
+                          <a:cs typeface="+mn-cs"/>
+                        </a:rPr>
+                        <a:t>SV (</a:t>
+                      </a:r>
+                      <a:r>
+                        <a:rPr kumimoji="1" lang="ko-KR" altLang="en-US" sz="1000" b="0" i="0" u="none" strike="noStrike" kern="1200" cap="none" normalizeH="0" baseline="0" smtClean="0">
+                          <a:ln>
+                            <a:noFill/>
+                          </a:ln>
+                          <a:solidFill>
+                            <a:schemeClr val="tx1"/>
+                          </a:solidFill>
+                          <a:effectLst/>
+                          <a:latin typeface="+mn-lt"/>
+                          <a:ea typeface="+mn-ea"/>
+                          <a:cs typeface="+mn-cs"/>
+                        </a:rPr>
+                        <a:t>두원</a:t>
+                      </a:r>
+                      <a:r>
+                        <a:rPr kumimoji="1" lang="en-US" altLang="ko-KR" sz="1000" b="0" i="0" u="none" strike="noStrike" kern="1200" cap="none" normalizeH="0" baseline="0" smtClean="0">
+                          <a:ln>
+                            <a:noFill/>
+                          </a:ln>
+                          <a:solidFill>
+                            <a:schemeClr val="tx1"/>
+                          </a:solidFill>
+                          <a:effectLst/>
+                          <a:latin typeface="+mn-lt"/>
+                          <a:ea typeface="+mn-ea"/>
+                          <a:cs typeface="+mn-cs"/>
+                        </a:rPr>
+                        <a:t>)</a:t>
+                      </a:r>
+                    </a:p>
+                    <a:p>
+                      <a:pPr marL="0" marR="0" lvl="0" indent="0" algn="l" defTabSz="914400" rtl="0" eaLnBrk="1" fontAlgn="base" latinLnBrk="1" hangingPunct="1">
+                        <a:lnSpc>
+                          <a:spcPct val="100000"/>
+                        </a:lnSpc>
+                        <a:spcBef>
+                          <a:spcPct val="20000"/>
+                        </a:spcBef>
+                        <a:spcAft>
+                          <a:spcPct val="0"/>
+                        </a:spcAft>
+                        <a:buClr>
+                          <a:srgbClr val="FF0000"/>
+                        </a:buClr>
+                        <a:buSzTx/>
+                        <a:buFont typeface="Wingdings" pitchFamily="2" charset="2"/>
+                        <a:buNone/>
+                        <a:tabLst/>
+                        <a:defRPr/>
+                      </a:pPr>
+                      <a:r>
+                        <a:rPr kumimoji="1" lang="en-US" altLang="ko-KR" sz="1000" b="0" i="0" u="none" strike="noStrike" kern="1200" cap="none" normalizeH="0" baseline="0" smtClean="0">
+                          <a:ln>
+                            <a:noFill/>
+                          </a:ln>
+                          <a:solidFill>
+                            <a:schemeClr val="tx1"/>
+                          </a:solidFill>
+                          <a:effectLst/>
+                          <a:latin typeface="+mn-lt"/>
+                          <a:ea typeface="+mn-ea"/>
+                          <a:cs typeface="+mn-cs"/>
+                        </a:rPr>
+                        <a:t>     </a:t>
+                      </a:r>
+                      <a:r>
+                        <a:rPr kumimoji="1" lang="ko-KR" altLang="en-US" sz="1000" b="0" i="0" u="none" strike="noStrike" kern="1200" cap="none" normalizeH="0" baseline="0" smtClean="0">
+                          <a:ln>
+                            <a:noFill/>
+                          </a:ln>
+                          <a:solidFill>
+                            <a:schemeClr val="tx1"/>
+                          </a:solidFill>
+                          <a:effectLst/>
+                          <a:latin typeface="+mn-lt"/>
+                          <a:ea typeface="+mn-ea"/>
+                          <a:cs typeface="+mn-cs"/>
+                        </a:rPr>
+                        <a:t>로 대체</a:t>
+                      </a:r>
+                      <a:r>
+                        <a:rPr kumimoji="1" lang="en-US" altLang="ko-KR" sz="1000" b="0" i="0" u="none" strike="noStrike" kern="1200" cap="none" normalizeH="0" baseline="0" smtClean="0">
+                          <a:ln>
+                            <a:noFill/>
+                          </a:ln>
+                          <a:solidFill>
+                            <a:schemeClr val="tx1"/>
+                          </a:solidFill>
+                          <a:effectLst/>
+                          <a:latin typeface="+mn-lt"/>
+                          <a:ea typeface="+mn-ea"/>
+                          <a:cs typeface="+mn-cs"/>
+                        </a:rPr>
+                        <a:t>)</a:t>
+                      </a:r>
+                      <a:endParaRPr kumimoji="1" lang="en-US" altLang="ko-KR" sz="1000" b="0" i="0" u="none" strike="noStrike" kern="1200" cap="none" normalizeH="0" baseline="0" smtClean="0">
+                        <a:ln>
+                          <a:noFill/>
+                        </a:ln>
+                        <a:solidFill>
+                          <a:schemeClr val="tx1"/>
+                        </a:solidFill>
+                        <a:effectLst/>
+                        <a:latin typeface="+mn-lt"/>
+                        <a:ea typeface="+mn-ea"/>
+                        <a:cs typeface="+mn-cs"/>
+                      </a:endParaRPr>
                     </a:p>
                   </a:txBody>
                   <a:tcPr marL="86400" marR="86400" marT="43277" marB="43277" anchor="ctr" horzOverflow="overflow">
@@ -8803,7 +9018,136 @@
                           <a:cs typeface="+mn-cs"/>
                           <a:sym typeface="Wingdings" pitchFamily="2" charset="2"/>
                         </a:rPr>
-                        <a:t>부품 교체 및 리워크 일정 고객사 협의 중</a:t>
+                        <a:t>부품 </a:t>
+                      </a:r>
+                      <a:r>
+                        <a:rPr kumimoji="1" lang="ko-KR" altLang="en-US" sz="1000" b="0" i="0" u="none" strike="noStrike" kern="1200" cap="none" normalizeH="0" baseline="0" smtClean="0">
+                          <a:ln>
+                            <a:noFill/>
+                          </a:ln>
+                          <a:solidFill>
+                            <a:schemeClr val="tx1"/>
+                          </a:solidFill>
+                          <a:effectLst/>
+                          <a:latin typeface="+mn-lt"/>
+                          <a:ea typeface="+mn-ea"/>
+                          <a:cs typeface="+mn-cs"/>
+                          <a:sym typeface="Wingdings" pitchFamily="2" charset="2"/>
+                        </a:rPr>
+                        <a:t>교체 및 리워크 일정 고객사 협의 </a:t>
+                      </a:r>
+                      <a:r>
+                        <a:rPr kumimoji="1" lang="ko-KR" altLang="en-US" sz="1000" b="0" i="0" u="none" strike="noStrike" kern="1200" cap="none" normalizeH="0" baseline="0" smtClean="0">
+                          <a:ln>
+                            <a:noFill/>
+                          </a:ln>
+                          <a:solidFill>
+                            <a:schemeClr val="tx1"/>
+                          </a:solidFill>
+                          <a:effectLst/>
+                          <a:latin typeface="+mn-lt"/>
+                          <a:ea typeface="+mn-ea"/>
+                          <a:cs typeface="+mn-cs"/>
+                          <a:sym typeface="Wingdings" pitchFamily="2" charset="2"/>
+                        </a:rPr>
+                        <a:t>중</a:t>
+                      </a:r>
+                      <a:endParaRPr kumimoji="1" lang="en-US" altLang="ko-KR" sz="1000" b="0" i="0" u="none" strike="noStrike" kern="1200" cap="none" normalizeH="0" baseline="0" smtClean="0">
+                        <a:ln>
+                          <a:noFill/>
+                        </a:ln>
+                        <a:solidFill>
+                          <a:schemeClr val="tx1"/>
+                        </a:solidFill>
+                        <a:effectLst/>
+                        <a:latin typeface="+mn-lt"/>
+                        <a:ea typeface="+mn-ea"/>
+                        <a:cs typeface="+mn-cs"/>
+                        <a:sym typeface="Wingdings" pitchFamily="2" charset="2"/>
+                      </a:endParaRPr>
+                    </a:p>
+                    <a:p>
+                      <a:pPr marL="0" marR="0" lvl="0" indent="0" algn="l" defTabSz="914400" rtl="0" eaLnBrk="1" fontAlgn="base" latinLnBrk="1" hangingPunct="1">
+                        <a:lnSpc>
+                          <a:spcPct val="100000"/>
+                        </a:lnSpc>
+                        <a:spcBef>
+                          <a:spcPct val="20000"/>
+                        </a:spcBef>
+                        <a:spcAft>
+                          <a:spcPct val="0"/>
+                        </a:spcAft>
+                        <a:buClr>
+                          <a:srgbClr val="FF0000"/>
+                        </a:buClr>
+                        <a:buSzTx/>
+                        <a:buFont typeface="Wingdings" pitchFamily="2" charset="2"/>
+                        <a:buNone/>
+                        <a:tabLst/>
+                      </a:pPr>
+                      <a:r>
+                        <a:rPr kumimoji="1" lang="en-US" altLang="ko-KR" sz="1000" b="0" i="0" u="none" strike="noStrike" kern="1200" cap="none" normalizeH="0" baseline="0" smtClean="0">
+                          <a:ln>
+                            <a:noFill/>
+                          </a:ln>
+                          <a:solidFill>
+                            <a:schemeClr val="tx1"/>
+                          </a:solidFill>
+                          <a:effectLst/>
+                          <a:latin typeface="+mn-lt"/>
+                          <a:ea typeface="+mn-ea"/>
+                          <a:cs typeface="+mn-cs"/>
+                          <a:sym typeface="Wingdings" pitchFamily="2" charset="2"/>
+                        </a:rPr>
+                        <a:t> - 8</a:t>
+                      </a:r>
+                      <a:r>
+                        <a:rPr kumimoji="1" lang="ko-KR" altLang="en-US" sz="1000" b="0" i="0" u="none" strike="noStrike" kern="1200" cap="none" normalizeH="0" baseline="0" smtClean="0">
+                          <a:ln>
+                            <a:noFill/>
+                          </a:ln>
+                          <a:solidFill>
+                            <a:schemeClr val="tx1"/>
+                          </a:solidFill>
+                          <a:effectLst/>
+                          <a:latin typeface="+mn-lt"/>
+                          <a:ea typeface="+mn-ea"/>
+                          <a:cs typeface="+mn-cs"/>
+                          <a:sym typeface="Wingdings" pitchFamily="2" charset="2"/>
+                        </a:rPr>
+                        <a:t>월 </a:t>
+                      </a:r>
+                      <a:r>
+                        <a:rPr kumimoji="1" lang="en-US" altLang="ko-KR" sz="1000" b="0" i="0" u="none" strike="noStrike" kern="1200" cap="none" normalizeH="0" baseline="0" smtClean="0">
+                          <a:ln>
+                            <a:noFill/>
+                          </a:ln>
+                          <a:solidFill>
+                            <a:schemeClr val="tx1"/>
+                          </a:solidFill>
+                          <a:effectLst/>
+                          <a:latin typeface="+mn-lt"/>
+                          <a:ea typeface="+mn-ea"/>
+                          <a:cs typeface="+mn-cs"/>
+                          <a:sym typeface="Wingdings" pitchFamily="2" charset="2"/>
+                        </a:rPr>
+                        <a:t>3</a:t>
+                      </a:r>
+                      <a:r>
+                        <a:rPr kumimoji="1" lang="ko-KR" altLang="en-US" sz="1000" b="0" i="0" u="none" strike="noStrike" kern="1200" cap="none" normalizeH="0" baseline="0" smtClean="0">
+                          <a:ln>
+                            <a:noFill/>
+                          </a:ln>
+                          <a:solidFill>
+                            <a:schemeClr val="tx1"/>
+                          </a:solidFill>
+                          <a:effectLst/>
+                          <a:latin typeface="+mn-lt"/>
+                          <a:ea typeface="+mn-ea"/>
+                          <a:cs typeface="+mn-cs"/>
+                          <a:sym typeface="Wingdings" pitchFamily="2" charset="2"/>
+                        </a:rPr>
+                        <a:t>주차 교체 및 평가 예정</a:t>
                       </a:r>
                       <a:endParaRPr kumimoji="1" lang="en-US" altLang="ko-KR" sz="1000" b="0" i="0" u="none" strike="noStrike" kern="1200" cap="none" normalizeH="0" baseline="0" smtClean="0">
                         <a:ln>
@@ -9398,7 +9742,7 @@
           <p:nvPr>
             <p:extLst>
               <p:ext uri="{D42A27DB-BD31-4B8C-83A1-F6EECF244321}">
-                <p14:modId xmlns:p14="http://schemas.microsoft.com/office/powerpoint/2010/main" val="865716605"/>
+                <p14:modId xmlns:p14="http://schemas.microsoft.com/office/powerpoint/2010/main" val="4193288731"/>
               </p:ext>
             </p:extLst>
           </p:nvPr>
@@ -10248,6 +10592,99 @@
                           <a:cs typeface="+mn-cs"/>
                         </a:rPr>
                         <a:t>일</a:t>
+                      </a:r>
+                      <a:endParaRPr kumimoji="1" lang="en-US" altLang="ko-KR" sz="1000" b="0" i="0" u="none" strike="noStrike" kern="1200" cap="none" normalizeH="0" baseline="0" smtClean="0">
+                        <a:ln>
+                          <a:noFill/>
+                        </a:ln>
+                        <a:solidFill>
+                          <a:schemeClr val="tx1"/>
+                        </a:solidFill>
+                        <a:effectLst/>
+                        <a:latin typeface="+mn-lt"/>
+                        <a:ea typeface="+mn-ea"/>
+                        <a:cs typeface="+mn-cs"/>
+                      </a:endParaRPr>
+                    </a:p>
+                    <a:p>
+                      <a:pPr marL="0" marR="0" lvl="0" indent="0" algn="l" defTabSz="914400" rtl="0" eaLnBrk="1" fontAlgn="base" latinLnBrk="1" hangingPunct="1">
+                        <a:lnSpc>
+                          <a:spcPct val="100000"/>
+                        </a:lnSpc>
+                        <a:spcBef>
+                          <a:spcPct val="20000"/>
+                        </a:spcBef>
+                        <a:spcAft>
+                          <a:spcPct val="0"/>
+                        </a:spcAft>
+                        <a:buClr>
+                          <a:srgbClr val="FF0000"/>
+                        </a:buClr>
+                        <a:buSzTx/>
+                        <a:buFont typeface="Wingdings" pitchFamily="2" charset="2"/>
+                        <a:buNone/>
+                        <a:tabLst/>
+                        <a:defRPr/>
+                      </a:pPr>
+                      <a:r>
+                        <a:rPr kumimoji="1" lang="en-US" altLang="ko-KR" sz="1000" b="0" i="0" u="none" strike="noStrike" kern="1200" cap="none" normalizeH="0" baseline="0" smtClean="0">
+                          <a:ln>
+                            <a:noFill/>
+                          </a:ln>
+                          <a:solidFill>
+                            <a:schemeClr val="tx1"/>
+                          </a:solidFill>
+                          <a:effectLst/>
+                          <a:latin typeface="+mn-lt"/>
+                          <a:ea typeface="+mn-ea"/>
+                          <a:cs typeface="+mn-cs"/>
+                        </a:rPr>
+                        <a:t>    - </a:t>
+                      </a:r>
+                      <a:r>
+                        <a:rPr kumimoji="1" lang="ko-KR" altLang="en-US" sz="1000" b="0" i="0" u="none" strike="noStrike" kern="1200" cap="none" normalizeH="0" baseline="0" smtClean="0">
+                          <a:ln>
+                            <a:noFill/>
+                          </a:ln>
+                          <a:solidFill>
+                            <a:schemeClr val="tx1"/>
+                          </a:solidFill>
+                          <a:effectLst/>
+                          <a:latin typeface="+mn-lt"/>
+                          <a:ea typeface="+mn-ea"/>
+                          <a:cs typeface="+mn-cs"/>
+                        </a:rPr>
+                        <a:t>주요안건 </a:t>
+                      </a:r>
+                      <a:r>
+                        <a:rPr kumimoji="1" lang="en-US" altLang="ko-KR" sz="1000" b="0" i="0" u="none" strike="noStrike" kern="1200" cap="none" normalizeH="0" baseline="0" smtClean="0">
+                          <a:ln>
+                            <a:noFill/>
+                          </a:ln>
+                          <a:solidFill>
+                            <a:schemeClr val="tx1"/>
+                          </a:solidFill>
+                          <a:effectLst/>
+                          <a:latin typeface="+mn-lt"/>
+                          <a:ea typeface="+mn-ea"/>
+                          <a:cs typeface="+mn-cs"/>
+                        </a:rPr>
+                        <a:t>: UNR155/156, ISO26262 </a:t>
+                      </a:r>
+                      <a:r>
+                        <a:rPr kumimoji="1" lang="ko-KR" altLang="en-US" sz="1000" b="0" i="0" u="none" strike="noStrike" kern="1200" cap="none" normalizeH="0" baseline="0" smtClean="0">
+                          <a:ln>
+                            <a:noFill/>
+                          </a:ln>
+                          <a:solidFill>
+                            <a:schemeClr val="tx1"/>
+                          </a:solidFill>
+                          <a:effectLst/>
+                          <a:latin typeface="+mn-lt"/>
+                          <a:ea typeface="+mn-ea"/>
+                          <a:cs typeface="+mn-cs"/>
+                        </a:rPr>
+                        <a:t>적용 여부</a:t>
                       </a:r>
                       <a:endParaRPr kumimoji="1" lang="en-US" altLang="ko-KR" sz="1000" b="0" i="0" u="none" strike="noStrike" kern="1200" cap="none" normalizeH="0" baseline="0" dirty="0">
                         <a:ln>
@@ -12744,7 +13181,7 @@
           <p:nvPr>
             <p:extLst>
               <p:ext uri="{D42A27DB-BD31-4B8C-83A1-F6EECF244321}">
-                <p14:modId xmlns:p14="http://schemas.microsoft.com/office/powerpoint/2010/main" val="122690762"/>
+                <p14:modId xmlns:p14="http://schemas.microsoft.com/office/powerpoint/2010/main" val="2369744156"/>
               </p:ext>
             </p:extLst>
           </p:nvPr>
@@ -13654,6 +14091,99 @@
                           <a:cs typeface="+mn-cs"/>
                         </a:rPr>
                         <a:t>시</a:t>
+                      </a:r>
+                      <a:endParaRPr kumimoji="1" lang="en-US" altLang="ko-KR" sz="1000" b="0" i="0" u="none" strike="noStrike" kern="1200" cap="none" normalizeH="0" baseline="0" smtClean="0">
+                        <a:ln>
+                          <a:noFill/>
+                        </a:ln>
+                        <a:solidFill>
+                          <a:schemeClr val="tx1"/>
+                        </a:solidFill>
+                        <a:effectLst/>
+                        <a:latin typeface="+mn-lt"/>
+                        <a:ea typeface="+mn-ea"/>
+                        <a:cs typeface="+mn-cs"/>
+                      </a:endParaRPr>
+                    </a:p>
+                    <a:p>
+                      <a:pPr marL="0" marR="0" lvl="0" indent="0" algn="l" defTabSz="914400" rtl="0" eaLnBrk="1" fontAlgn="base" latinLnBrk="1" hangingPunct="1">
+                        <a:lnSpc>
+                          <a:spcPct val="100000"/>
+                        </a:lnSpc>
+                        <a:spcBef>
+                          <a:spcPct val="20000"/>
+                        </a:spcBef>
+                        <a:spcAft>
+                          <a:spcPct val="0"/>
+                        </a:spcAft>
+                        <a:buClr>
+                          <a:srgbClr val="FF0000"/>
+                        </a:buClr>
+                        <a:buSzTx/>
+                        <a:buFont typeface="Wingdings" pitchFamily="2" charset="2"/>
+                        <a:buNone/>
+                        <a:tabLst/>
+                        <a:defRPr/>
+                      </a:pPr>
+                      <a:r>
+                        <a:rPr kumimoji="1" lang="en-US" altLang="ko-KR" sz="1000" b="0" i="0" u="none" strike="noStrike" kern="1200" cap="none" normalizeH="0" baseline="0" smtClean="0">
+                          <a:ln>
+                            <a:noFill/>
+                          </a:ln>
+                          <a:solidFill>
+                            <a:schemeClr val="tx1"/>
+                          </a:solidFill>
+                          <a:effectLst/>
+                          <a:latin typeface="+mn-lt"/>
+                          <a:ea typeface="+mn-ea"/>
+                          <a:cs typeface="+mn-cs"/>
+                        </a:rPr>
+                        <a:t>   - </a:t>
+                      </a:r>
+                      <a:r>
+                        <a:rPr kumimoji="1" lang="ko-KR" altLang="en-US" sz="1000" b="0" i="0" u="none" strike="noStrike" kern="1200" cap="none" normalizeH="0" baseline="0" smtClean="0">
+                          <a:ln>
+                            <a:noFill/>
+                          </a:ln>
+                          <a:solidFill>
+                            <a:schemeClr val="tx1"/>
+                          </a:solidFill>
+                          <a:effectLst/>
+                          <a:latin typeface="+mn-lt"/>
+                          <a:ea typeface="+mn-ea"/>
+                          <a:cs typeface="+mn-cs"/>
+                        </a:rPr>
+                        <a:t>결과 </a:t>
+                      </a:r>
+                      <a:r>
+                        <a:rPr kumimoji="1" lang="en-US" altLang="ko-KR" sz="1000" b="0" i="0" u="none" strike="noStrike" kern="1200" cap="none" normalizeH="0" baseline="0" smtClean="0">
+                          <a:ln>
+                            <a:noFill/>
+                          </a:ln>
+                          <a:solidFill>
+                            <a:schemeClr val="tx1"/>
+                          </a:solidFill>
+                          <a:effectLst/>
+                          <a:latin typeface="+mn-lt"/>
+                          <a:ea typeface="+mn-ea"/>
+                          <a:cs typeface="+mn-cs"/>
+                        </a:rPr>
+                        <a:t>: </a:t>
+                      </a:r>
+                      <a:r>
+                        <a:rPr kumimoji="1" lang="ko-KR" altLang="en-US" sz="1000" b="0" i="0" u="none" strike="noStrike" kern="1200" cap="none" normalizeH="0" baseline="0" smtClean="0">
+                          <a:ln>
+                            <a:noFill/>
+                          </a:ln>
+                          <a:solidFill>
+                            <a:schemeClr val="tx1"/>
+                          </a:solidFill>
+                          <a:effectLst/>
+                          <a:latin typeface="+mn-lt"/>
+                          <a:ea typeface="+mn-ea"/>
+                          <a:cs typeface="+mn-cs"/>
+                        </a:rPr>
+                        <a:t>특이사항 없음</a:t>
                       </a:r>
                       <a:endParaRPr kumimoji="1" lang="en-US" altLang="ko-KR" sz="1000" b="0" i="0" u="none" strike="noStrike" kern="1200" cap="none" normalizeH="0" baseline="0" smtClean="0">
                         <a:ln>
@@ -16182,14 +16712,14 @@
           <p:nvPr>
             <p:extLst>
               <p:ext uri="{D42A27DB-BD31-4B8C-83A1-F6EECF244321}">
-                <p14:modId xmlns:p14="http://schemas.microsoft.com/office/powerpoint/2010/main" val="2212520965"/>
+                <p14:modId xmlns:p14="http://schemas.microsoft.com/office/powerpoint/2010/main" val="1969263658"/>
               </p:ext>
             </p:extLst>
           </p:nvPr>
         </p:nvGraphicFramePr>
         <p:xfrm>
           <a:off x="11059" y="536957"/>
-          <a:ext cx="9097445" cy="5713176"/>
+          <a:ext cx="9097445" cy="5826727"/>
         </p:xfrm>
         <a:graphic>
           <a:graphicData uri="http://schemas.openxmlformats.org/drawingml/2006/table">
@@ -16714,7 +17244,7 @@
                   </a:ext>
                 </a:extLst>
               </a:tr>
-              <a:tr h="4126367">
+              <a:tr h="3128233">
                 <a:tc>
                   <a:txBody>
                     <a:bodyPr/>
@@ -16893,7 +17423,7 @@
                           <a:ea typeface="+mn-ea"/>
                           <a:cs typeface="+mn-cs"/>
                         </a:rPr>
-                        <a:t>1. QV </a:t>
+                        <a:t>1. </a:t>
                       </a:r>
                       <a:r>
                         <a:rPr kumimoji="1" lang="ko-KR" altLang="en-US" sz="1000" b="0" i="0" u="none" strike="noStrike" kern="1200" cap="none" normalizeH="0" baseline="0" smtClean="0">
@@ -16908,538 +17438,7 @@
                           <a:ea typeface="+mn-ea"/>
                           <a:cs typeface="+mn-cs"/>
                         </a:rPr>
-                        <a:t>최대 난방 평가 대응</a:t>
-                      </a:r>
-                      <a:endParaRPr kumimoji="1" lang="en-US" altLang="ko-KR" sz="1000" b="0" i="0" u="none" strike="noStrike" kern="1200" cap="none" normalizeH="0" baseline="0" smtClean="0">
-                        <a:ln>
-                          <a:noFill/>
-                        </a:ln>
-                        <a:solidFill>
-                          <a:schemeClr val="tx1"/>
-                        </a:solidFill>
-                        <a:effectLst/>
-                        <a:latin typeface="+mn-lt"/>
-                        <a:ea typeface="+mn-ea"/>
-                        <a:cs typeface="+mn-cs"/>
-                      </a:endParaRPr>
-                    </a:p>
-                    <a:p>
-                      <a:pPr marL="0" marR="0" lvl="0" indent="0" algn="l" defTabSz="914400" rtl="0" eaLnBrk="1" fontAlgn="base" latinLnBrk="1" hangingPunct="1">
-                        <a:lnSpc>
-                          <a:spcPct val="100000"/>
-                        </a:lnSpc>
-                        <a:spcBef>
-                          <a:spcPct val="20000"/>
-                        </a:spcBef>
-                        <a:spcAft>
-                          <a:spcPct val="0"/>
-                        </a:spcAft>
-                        <a:buClr>
-                          <a:srgbClr val="FF0000"/>
-                        </a:buClr>
-                        <a:buSzTx/>
-                        <a:buFont typeface="Wingdings" pitchFamily="2" charset="2"/>
-                        <a:buNone/>
-                        <a:tabLst/>
-                        <a:defRPr/>
-                      </a:pPr>
-                      <a:r>
-                        <a:rPr kumimoji="1" lang="ko-KR" altLang="en-US" sz="1000" b="0" i="0" u="none" strike="noStrike" kern="1200" cap="none" normalizeH="0" baseline="0" smtClean="0">
-                          <a:ln>
-                            <a:noFill/>
-                          </a:ln>
-                          <a:solidFill>
-                            <a:schemeClr val="tx1"/>
-                          </a:solidFill>
-                          <a:effectLst/>
-                          <a:latin typeface="+mn-lt"/>
-                          <a:ea typeface="+mn-ea"/>
-                          <a:cs typeface="+mn-cs"/>
-                        </a:rPr>
-                        <a:t>   장소 </a:t>
-                      </a:r>
-                      <a:r>
-                        <a:rPr kumimoji="1" lang="en-US" altLang="ko-KR" sz="1000" b="0" i="0" u="none" strike="noStrike" kern="1200" cap="none" normalizeH="0" baseline="0" smtClean="0">
-                          <a:ln>
-                            <a:noFill/>
-                          </a:ln>
-                          <a:solidFill>
-                            <a:schemeClr val="tx1"/>
-                          </a:solidFill>
-                          <a:effectLst/>
-                          <a:latin typeface="+mn-lt"/>
-                          <a:ea typeface="+mn-ea"/>
-                          <a:cs typeface="+mn-cs"/>
-                        </a:rPr>
-                        <a:t>: </a:t>
-                      </a:r>
-                      <a:r>
-                        <a:rPr kumimoji="1" lang="ko-KR" altLang="en-US" sz="1000" b="0" i="0" u="none" strike="noStrike" kern="1200" cap="none" normalizeH="0" baseline="0" smtClean="0">
-                          <a:ln>
-                            <a:noFill/>
-                          </a:ln>
-                          <a:solidFill>
-                            <a:schemeClr val="tx1"/>
-                          </a:solidFill>
-                          <a:effectLst/>
-                          <a:latin typeface="+mn-lt"/>
-                          <a:ea typeface="+mn-ea"/>
-                          <a:cs typeface="+mn-cs"/>
-                        </a:rPr>
-                        <a:t>현대 남양 연구소 에너지 시험팀 실차 챔버</a:t>
-                      </a:r>
-                      <a:endParaRPr kumimoji="1" lang="en-US" altLang="ko-KR" sz="1000" b="0" i="0" u="none" strike="noStrike" kern="1200" cap="none" normalizeH="0" baseline="0" smtClean="0">
-                        <a:ln>
-                          <a:noFill/>
-                        </a:ln>
-                        <a:solidFill>
-                          <a:schemeClr val="tx1"/>
-                        </a:solidFill>
-                        <a:effectLst/>
-                        <a:latin typeface="+mn-lt"/>
-                        <a:ea typeface="+mn-ea"/>
-                        <a:cs typeface="+mn-cs"/>
-                      </a:endParaRPr>
-                    </a:p>
-                    <a:p>
-                      <a:pPr marL="0" marR="0" lvl="0" indent="0" algn="l" defTabSz="914400" rtl="0" eaLnBrk="1" fontAlgn="base" latinLnBrk="1" hangingPunct="1">
-                        <a:lnSpc>
-                          <a:spcPct val="100000"/>
-                        </a:lnSpc>
-                        <a:spcBef>
-                          <a:spcPct val="20000"/>
-                        </a:spcBef>
-                        <a:spcAft>
-                          <a:spcPct val="0"/>
-                        </a:spcAft>
-                        <a:buClr>
-                          <a:srgbClr val="FF0000"/>
-                        </a:buClr>
-                        <a:buSzTx/>
-                        <a:buFont typeface="Wingdings" pitchFamily="2" charset="2"/>
-                        <a:buNone/>
-                        <a:tabLst/>
-                        <a:defRPr/>
-                      </a:pPr>
-                      <a:r>
-                        <a:rPr kumimoji="1" lang="en-US" altLang="ko-KR" sz="1000" b="0" i="0" u="none" strike="noStrike" kern="1200" cap="none" normalizeH="0" baseline="0" smtClean="0">
-                          <a:ln>
-                            <a:noFill/>
-                          </a:ln>
-                          <a:solidFill>
-                            <a:schemeClr val="tx1"/>
-                          </a:solidFill>
-                          <a:effectLst/>
-                          <a:latin typeface="+mn-lt"/>
-                          <a:ea typeface="+mn-ea"/>
-                          <a:cs typeface="+mn-cs"/>
-                        </a:rPr>
-                        <a:t>   </a:t>
-                      </a:r>
-                      <a:r>
-                        <a:rPr kumimoji="1" lang="ko-KR" altLang="en-US" sz="1000" b="0" i="0" u="none" strike="noStrike" kern="1200" cap="none" normalizeH="0" baseline="0" smtClean="0">
-                          <a:ln>
-                            <a:noFill/>
-                          </a:ln>
-                          <a:solidFill>
-                            <a:schemeClr val="tx1"/>
-                          </a:solidFill>
-                          <a:effectLst/>
-                          <a:latin typeface="+mn-lt"/>
-                          <a:ea typeface="+mn-ea"/>
-                          <a:cs typeface="+mn-cs"/>
-                        </a:rPr>
-                        <a:t>목적 </a:t>
-                      </a:r>
-                      <a:r>
-                        <a:rPr kumimoji="1" lang="en-US" altLang="ko-KR" sz="1000" b="0" i="0" u="none" strike="noStrike" kern="1200" cap="none" normalizeH="0" baseline="0" smtClean="0">
-                          <a:ln>
-                            <a:noFill/>
-                          </a:ln>
-                          <a:solidFill>
-                            <a:schemeClr val="tx1"/>
-                          </a:solidFill>
-                          <a:effectLst/>
-                          <a:latin typeface="+mn-lt"/>
-                          <a:ea typeface="+mn-ea"/>
-                          <a:cs typeface="+mn-cs"/>
-                        </a:rPr>
-                        <a:t>: </a:t>
-                      </a:r>
-                      <a:r>
-                        <a:rPr kumimoji="1" lang="ko-KR" altLang="en-US" sz="1000" b="0" i="0" u="none" strike="noStrike" kern="1200" cap="none" normalizeH="0" baseline="0" smtClean="0">
-                          <a:ln>
-                            <a:noFill/>
-                          </a:ln>
-                          <a:solidFill>
-                            <a:schemeClr val="tx1"/>
-                          </a:solidFill>
-                          <a:effectLst/>
-                          <a:latin typeface="+mn-lt"/>
-                          <a:ea typeface="+mn-ea"/>
-                          <a:cs typeface="+mn-cs"/>
-                        </a:rPr>
-                        <a:t>좌우 편차 개선 시료 최대 난방 평가 </a:t>
-                      </a:r>
-                      <a:r>
-                        <a:rPr kumimoji="1" lang="en-US" altLang="ko-KR" sz="1000" b="0" i="0" u="none" strike="noStrike" kern="1200" cap="none" normalizeH="0" baseline="0" smtClean="0">
-                          <a:ln>
-                            <a:noFill/>
-                          </a:ln>
-                          <a:solidFill>
-                            <a:schemeClr val="tx1"/>
-                          </a:solidFill>
-                          <a:effectLst/>
-                          <a:latin typeface="+mn-lt"/>
-                          <a:ea typeface="+mn-ea"/>
-                          <a:cs typeface="+mn-cs"/>
-                        </a:rPr>
-                        <a:t>NG (22</a:t>
-                      </a:r>
-                      <a:r>
-                        <a:rPr kumimoji="1" lang="ko-KR" altLang="en-US" sz="1000" b="0" i="0" u="none" strike="noStrike" kern="1200" cap="none" normalizeH="0" baseline="0" smtClean="0">
-                          <a:ln>
-                            <a:noFill/>
-                          </a:ln>
-                          <a:solidFill>
-                            <a:schemeClr val="tx1"/>
-                          </a:solidFill>
-                          <a:effectLst/>
-                          <a:latin typeface="+mn-lt"/>
-                          <a:ea typeface="+mn-ea"/>
-                          <a:cs typeface="+mn-cs"/>
-                        </a:rPr>
-                        <a:t>호차</a:t>
-                      </a:r>
-                      <a:r>
-                        <a:rPr kumimoji="1" lang="en-US" altLang="ko-KR" sz="1000" b="0" i="0" u="none" strike="noStrike" kern="1200" cap="none" normalizeH="0" baseline="0" smtClean="0">
-                          <a:ln>
-                            <a:noFill/>
-                          </a:ln>
-                          <a:solidFill>
-                            <a:schemeClr val="tx1"/>
-                          </a:solidFill>
-                          <a:effectLst/>
-                          <a:latin typeface="+mn-lt"/>
-                          <a:ea typeface="+mn-ea"/>
-                          <a:cs typeface="+mn-cs"/>
-                        </a:rPr>
-                        <a:t>)</a:t>
-                      </a:r>
-                    </a:p>
-                    <a:p>
-                      <a:pPr marL="0" marR="0" lvl="0" indent="0" algn="l" defTabSz="914400" rtl="0" eaLnBrk="1" fontAlgn="base" latinLnBrk="1" hangingPunct="1">
-                        <a:lnSpc>
-                          <a:spcPct val="100000"/>
-                        </a:lnSpc>
-                        <a:spcBef>
-                          <a:spcPct val="20000"/>
-                        </a:spcBef>
-                        <a:spcAft>
-                          <a:spcPct val="0"/>
-                        </a:spcAft>
-                        <a:buClr>
-                          <a:srgbClr val="FF0000"/>
-                        </a:buClr>
-                        <a:buSzTx/>
-                        <a:buFont typeface="Wingdings" pitchFamily="2" charset="2"/>
-                        <a:buNone/>
-                        <a:tabLst/>
-                        <a:defRPr/>
-                      </a:pPr>
-                      <a:r>
-                        <a:rPr kumimoji="1" lang="en-US" altLang="ko-KR" sz="1000" b="0" i="0" u="none" strike="noStrike" kern="1200" cap="none" normalizeH="0" baseline="0" smtClean="0">
-                          <a:ln>
-                            <a:noFill/>
-                          </a:ln>
-                          <a:solidFill>
-                            <a:schemeClr val="tx1"/>
-                          </a:solidFill>
-                          <a:effectLst/>
-                          <a:latin typeface="+mn-lt"/>
-                          <a:ea typeface="+mn-ea"/>
-                          <a:cs typeface="+mn-cs"/>
-                        </a:rPr>
-                        <a:t>           </a:t>
-                      </a:r>
-                      <a:r>
-                        <a:rPr kumimoji="1" lang="ko-KR" altLang="en-US" sz="1000" b="0" i="0" u="none" strike="noStrike" kern="1200" cap="none" normalizeH="0" baseline="0" smtClean="0">
-                          <a:ln>
-                            <a:noFill/>
-                          </a:ln>
-                          <a:solidFill>
-                            <a:schemeClr val="tx1"/>
-                          </a:solidFill>
-                          <a:effectLst/>
-                          <a:latin typeface="+mn-lt"/>
-                          <a:ea typeface="+mn-ea"/>
-                          <a:cs typeface="+mn-cs"/>
-                        </a:rPr>
-                        <a:t> </a:t>
-                      </a:r>
-                      <a:r>
-                        <a:rPr kumimoji="1" lang="en-US" altLang="ko-KR" sz="1000" b="0" i="0" u="none" strike="noStrike" kern="1200" cap="none" normalizeH="0" baseline="0" smtClean="0">
-                          <a:ln>
-                            <a:noFill/>
-                          </a:ln>
-                          <a:solidFill>
-                            <a:schemeClr val="tx1"/>
-                          </a:solidFill>
-                          <a:effectLst/>
-                          <a:latin typeface="+mn-lt"/>
-                          <a:ea typeface="+mn-ea"/>
-                          <a:cs typeface="+mn-cs"/>
-                        </a:rPr>
-                        <a:t>Proto </a:t>
-                      </a:r>
-                      <a:r>
-                        <a:rPr kumimoji="1" lang="ko-KR" altLang="en-US" sz="1000" b="0" i="0" u="none" strike="noStrike" kern="1200" cap="none" normalizeH="0" baseline="0" smtClean="0">
-                          <a:ln>
-                            <a:noFill/>
-                          </a:ln>
-                          <a:solidFill>
-                            <a:schemeClr val="tx1"/>
-                          </a:solidFill>
-                          <a:effectLst/>
-                          <a:latin typeface="+mn-lt"/>
-                          <a:ea typeface="+mn-ea"/>
-                          <a:cs typeface="+mn-cs"/>
-                        </a:rPr>
-                        <a:t>시료에 좌우 편차 개선 </a:t>
-                      </a:r>
-                      <a:r>
-                        <a:rPr kumimoji="1" lang="en-US" altLang="ko-KR" sz="1000" b="0" i="0" u="none" strike="noStrike" kern="1200" cap="none" normalizeH="0" baseline="0" smtClean="0">
-                          <a:ln>
-                            <a:noFill/>
-                          </a:ln>
-                          <a:solidFill>
-                            <a:schemeClr val="tx1"/>
-                          </a:solidFill>
-                          <a:effectLst/>
-                          <a:latin typeface="+mn-lt"/>
-                          <a:ea typeface="+mn-ea"/>
-                          <a:cs typeface="+mn-cs"/>
-                        </a:rPr>
-                        <a:t>S/W(</a:t>
-                      </a:r>
-                      <a:r>
-                        <a:rPr kumimoji="1" lang="ko-KR" altLang="en-US" sz="1000" b="0" i="0" u="none" strike="noStrike" kern="1200" cap="none" normalizeH="0" baseline="0" smtClean="0">
-                          <a:ln>
-                            <a:noFill/>
-                          </a:ln>
-                          <a:solidFill>
-                            <a:schemeClr val="tx1"/>
-                          </a:solidFill>
-                          <a:effectLst/>
-                          <a:latin typeface="+mn-lt"/>
-                          <a:ea typeface="+mn-ea"/>
-                          <a:cs typeface="+mn-cs"/>
-                        </a:rPr>
-                        <a:t>전력제어</a:t>
-                      </a:r>
-                      <a:r>
-                        <a:rPr kumimoji="1" lang="en-US" altLang="ko-KR" sz="1000" b="0" i="0" u="none" strike="noStrike" kern="1200" cap="none" normalizeH="0" baseline="0" smtClean="0">
-                          <a:ln>
-                            <a:noFill/>
-                          </a:ln>
-                          <a:solidFill>
-                            <a:schemeClr val="tx1"/>
-                          </a:solidFill>
-                          <a:effectLst/>
-                          <a:latin typeface="+mn-lt"/>
-                          <a:ea typeface="+mn-ea"/>
-                          <a:cs typeface="+mn-cs"/>
-                        </a:rPr>
-                        <a:t>)</a:t>
-                      </a:r>
-                      <a:r>
-                        <a:rPr kumimoji="1" lang="ko-KR" altLang="en-US" sz="1000" b="0" i="0" u="none" strike="noStrike" kern="1200" cap="none" normalizeH="0" baseline="0" smtClean="0">
-                          <a:ln>
-                            <a:noFill/>
-                          </a:ln>
-                          <a:solidFill>
-                            <a:schemeClr val="tx1"/>
-                          </a:solidFill>
-                          <a:effectLst/>
-                          <a:latin typeface="+mn-lt"/>
-                          <a:ea typeface="+mn-ea"/>
-                          <a:cs typeface="+mn-cs"/>
-                        </a:rPr>
-                        <a:t> 적용하여</a:t>
-                      </a:r>
-                      <a:r>
-                        <a:rPr kumimoji="1" lang="en-US" altLang="ko-KR" sz="1000" b="0" i="0" u="none" strike="noStrike" kern="1200" cap="none" normalizeH="0" baseline="0" smtClean="0">
-                          <a:ln>
-                            <a:noFill/>
-                          </a:ln>
-                          <a:solidFill>
-                            <a:schemeClr val="tx1"/>
-                          </a:solidFill>
-                          <a:effectLst/>
-                          <a:latin typeface="+mn-lt"/>
-                          <a:ea typeface="+mn-ea"/>
-                          <a:cs typeface="+mn-cs"/>
-                        </a:rPr>
-                        <a:t>, </a:t>
-                      </a:r>
-                    </a:p>
-                    <a:p>
-                      <a:pPr marL="0" marR="0" lvl="0" indent="0" algn="l" defTabSz="914400" rtl="0" eaLnBrk="1" fontAlgn="base" latinLnBrk="1" hangingPunct="1">
-                        <a:lnSpc>
-                          <a:spcPct val="100000"/>
-                        </a:lnSpc>
-                        <a:spcBef>
-                          <a:spcPct val="20000"/>
-                        </a:spcBef>
-                        <a:spcAft>
-                          <a:spcPct val="0"/>
-                        </a:spcAft>
-                        <a:buClr>
-                          <a:srgbClr val="FF0000"/>
-                        </a:buClr>
-                        <a:buSzTx/>
-                        <a:buFont typeface="Wingdings" pitchFamily="2" charset="2"/>
-                        <a:buNone/>
-                        <a:tabLst/>
-                        <a:defRPr/>
-                      </a:pPr>
-                      <a:r>
-                        <a:rPr kumimoji="1" lang="en-US" altLang="ko-KR" sz="1000" b="0" i="0" u="none" strike="noStrike" kern="1200" cap="none" normalizeH="0" baseline="0" smtClean="0">
-                          <a:ln>
-                            <a:noFill/>
-                          </a:ln>
-                          <a:solidFill>
-                            <a:schemeClr val="tx1"/>
-                          </a:solidFill>
-                          <a:effectLst/>
-                          <a:latin typeface="+mn-lt"/>
-                          <a:ea typeface="+mn-ea"/>
-                          <a:cs typeface="+mn-cs"/>
-                        </a:rPr>
-                        <a:t>            </a:t>
-                      </a:r>
-                      <a:r>
-                        <a:rPr kumimoji="1" lang="ko-KR" altLang="en-US" sz="1000" b="0" i="0" u="none" strike="noStrike" kern="1200" cap="none" normalizeH="0" baseline="0" smtClean="0">
-                          <a:ln>
-                            <a:noFill/>
-                          </a:ln>
-                          <a:solidFill>
-                            <a:schemeClr val="tx1"/>
-                          </a:solidFill>
-                          <a:effectLst/>
-                          <a:latin typeface="+mn-lt"/>
-                          <a:ea typeface="+mn-ea"/>
-                          <a:cs typeface="+mn-cs"/>
-                        </a:rPr>
-                        <a:t>최대 난방 평가 진행</a:t>
-                      </a:r>
-                      <a:endParaRPr kumimoji="1" lang="en-US" altLang="ko-KR" sz="1000" b="0" i="0" u="none" strike="noStrike" kern="1200" cap="none" normalizeH="0" baseline="0" smtClean="0">
-                        <a:ln>
-                          <a:noFill/>
-                        </a:ln>
-                        <a:solidFill>
-                          <a:schemeClr val="tx1"/>
-                        </a:solidFill>
-                        <a:effectLst/>
-                        <a:latin typeface="+mn-lt"/>
-                        <a:ea typeface="+mn-ea"/>
-                        <a:cs typeface="+mn-cs"/>
-                      </a:endParaRPr>
-                    </a:p>
-                    <a:p>
-                      <a:pPr marL="0" marR="0" lvl="0" indent="0" algn="l" defTabSz="914400" rtl="0" eaLnBrk="1" fontAlgn="base" latinLnBrk="1" hangingPunct="1">
-                        <a:lnSpc>
-                          <a:spcPct val="100000"/>
-                        </a:lnSpc>
-                        <a:spcBef>
-                          <a:spcPct val="20000"/>
-                        </a:spcBef>
-                        <a:spcAft>
-                          <a:spcPct val="0"/>
-                        </a:spcAft>
-                        <a:buClr>
-                          <a:srgbClr val="FF0000"/>
-                        </a:buClr>
-                        <a:buSzTx/>
-                        <a:buFont typeface="Wingdings" pitchFamily="2" charset="2"/>
-                        <a:buNone/>
-                        <a:tabLst/>
-                        <a:defRPr/>
-                      </a:pPr>
-                      <a:r>
-                        <a:rPr kumimoji="1" lang="ko-KR" altLang="en-US" sz="1000" b="0" i="0" u="none" strike="noStrike" kern="1200" cap="none" normalizeH="0" baseline="0" smtClean="0">
-                          <a:ln>
-                            <a:noFill/>
-                          </a:ln>
-                          <a:solidFill>
-                            <a:schemeClr val="tx1"/>
-                          </a:solidFill>
-                          <a:effectLst/>
-                          <a:latin typeface="+mn-lt"/>
-                          <a:ea typeface="+mn-ea"/>
-                          <a:cs typeface="+mn-cs"/>
-                        </a:rPr>
-                        <a:t>   일정 </a:t>
-                      </a:r>
-                      <a:r>
-                        <a:rPr kumimoji="1" lang="en-US" altLang="ko-KR" sz="1000" b="0" i="0" u="none" strike="noStrike" kern="1200" cap="none" normalizeH="0" baseline="0" smtClean="0">
-                          <a:ln>
-                            <a:noFill/>
-                          </a:ln>
-                          <a:solidFill>
-                            <a:schemeClr val="tx1"/>
-                          </a:solidFill>
-                          <a:effectLst/>
-                          <a:latin typeface="+mn-lt"/>
-                          <a:ea typeface="+mn-ea"/>
-                          <a:cs typeface="+mn-cs"/>
-                        </a:rPr>
-                        <a:t>: 8</a:t>
-                      </a:r>
-                      <a:r>
-                        <a:rPr kumimoji="1" lang="ko-KR" altLang="en-US" sz="1000" b="0" i="0" u="none" strike="noStrike" kern="1200" cap="none" normalizeH="0" baseline="0" smtClean="0">
-                          <a:ln>
-                            <a:noFill/>
-                          </a:ln>
-                          <a:solidFill>
-                            <a:schemeClr val="tx1"/>
-                          </a:solidFill>
-                          <a:effectLst/>
-                          <a:latin typeface="+mn-lt"/>
-                          <a:ea typeface="+mn-ea"/>
-                          <a:cs typeface="+mn-cs"/>
-                        </a:rPr>
-                        <a:t>월 </a:t>
-                      </a:r>
-                      <a:r>
-                        <a:rPr kumimoji="1" lang="en-US" altLang="ko-KR" sz="1000" b="0" i="0" u="none" strike="noStrike" kern="1200" cap="none" normalizeH="0" baseline="0" smtClean="0">
-                          <a:ln>
-                            <a:noFill/>
-                          </a:ln>
-                          <a:solidFill>
-                            <a:schemeClr val="tx1"/>
-                          </a:solidFill>
-                          <a:effectLst/>
-                          <a:latin typeface="+mn-lt"/>
-                          <a:ea typeface="+mn-ea"/>
-                          <a:cs typeface="+mn-cs"/>
-                        </a:rPr>
-                        <a:t>6</a:t>
-                      </a:r>
-                      <a:r>
-                        <a:rPr kumimoji="1" lang="ko-KR" altLang="en-US" sz="1000" b="0" i="0" u="none" strike="noStrike" kern="1200" cap="none" normalizeH="0" baseline="0" smtClean="0">
-                          <a:ln>
-                            <a:noFill/>
-                          </a:ln>
-                          <a:solidFill>
-                            <a:schemeClr val="tx1"/>
-                          </a:solidFill>
-                          <a:effectLst/>
-                          <a:latin typeface="+mn-lt"/>
-                          <a:ea typeface="+mn-ea"/>
-                          <a:cs typeface="+mn-cs"/>
-                        </a:rPr>
-                        <a:t>일</a:t>
+                        <a:t>좌우 온도 편차 업무 대응</a:t>
                       </a:r>
                       <a:endParaRPr kumimoji="1" lang="en-US" altLang="ko-KR" sz="1000" b="0" i="0" u="none" strike="noStrike" kern="1200" cap="none" normalizeH="0" baseline="0" smtClean="0">
                         <a:ln>
@@ -17478,228 +17477,6 @@
                         <a:ln>
                           <a:noFill/>
                         </a:ln>
-                        <a:solidFill>
-                          <a:schemeClr val="tx1"/>
-                        </a:solidFill>
-                        <a:effectLst/>
-                        <a:latin typeface="+mn-lt"/>
-                        <a:ea typeface="+mn-ea"/>
-                        <a:cs typeface="+mn-cs"/>
-                      </a:endParaRPr>
-                    </a:p>
-                    <a:p>
-                      <a:pPr marL="0" marR="0" lvl="0" indent="0" algn="l" defTabSz="914400" rtl="0" eaLnBrk="1" fontAlgn="base" latinLnBrk="1" hangingPunct="1">
-                        <a:lnSpc>
-                          <a:spcPct val="100000"/>
-                        </a:lnSpc>
-                        <a:spcBef>
-                          <a:spcPct val="20000"/>
-                        </a:spcBef>
-                        <a:spcAft>
-                          <a:spcPct val="0"/>
-                        </a:spcAft>
-                        <a:buClr>
-                          <a:srgbClr val="FF0000"/>
-                        </a:buClr>
-                        <a:buSzTx/>
-                        <a:buFont typeface="Wingdings" pitchFamily="2" charset="2"/>
-                        <a:buNone/>
-                        <a:tabLst/>
-                        <a:defRPr/>
-                      </a:pPr>
-                      <a:r>
-                        <a:rPr kumimoji="1" lang="en-US" altLang="ko-KR" sz="1000" b="0" i="0" u="none" strike="noStrike" kern="1200" cap="none" normalizeH="0" baseline="0" smtClean="0">
-                          <a:ln>
-                            <a:noFill/>
-                          </a:ln>
-                          <a:solidFill>
-                            <a:schemeClr val="tx1"/>
-                          </a:solidFill>
-                          <a:effectLst/>
-                          <a:latin typeface="+mn-lt"/>
-                          <a:ea typeface="+mn-ea"/>
-                          <a:cs typeface="+mn-cs"/>
-                        </a:rPr>
-                        <a:t>   </a:t>
-                      </a:r>
-                      <a:r>
-                        <a:rPr kumimoji="1" lang="ko-KR" altLang="en-US" sz="1000" b="0" i="0" u="none" strike="noStrike" kern="1200" cap="none" normalizeH="0" baseline="0" smtClean="0">
-                          <a:ln>
-                            <a:noFill/>
-                          </a:ln>
-                          <a:solidFill>
-                            <a:schemeClr val="tx1"/>
-                          </a:solidFill>
-                          <a:effectLst/>
-                          <a:latin typeface="+mn-lt"/>
-                          <a:ea typeface="+mn-ea"/>
-                          <a:cs typeface="+mn-cs"/>
-                        </a:rPr>
-                        <a:t>추후 진행 계획 </a:t>
-                      </a:r>
-                      <a:r>
-                        <a:rPr kumimoji="1" lang="en-US" altLang="ko-KR" sz="1000" b="0" i="0" u="none" strike="noStrike" kern="1200" cap="none" normalizeH="0" baseline="0" smtClean="0">
-                          <a:ln>
-                            <a:noFill/>
-                          </a:ln>
-                          <a:solidFill>
-                            <a:schemeClr val="tx1"/>
-                          </a:solidFill>
-                          <a:effectLst/>
-                          <a:latin typeface="+mn-lt"/>
-                          <a:ea typeface="+mn-ea"/>
-                          <a:cs typeface="+mn-cs"/>
-                        </a:rPr>
-                        <a:t>:</a:t>
-                      </a:r>
-                    </a:p>
-                    <a:p>
-                      <a:pPr marL="0" marR="0" lvl="0" indent="0" algn="l" defTabSz="914400" rtl="0" eaLnBrk="1" fontAlgn="base" latinLnBrk="1" hangingPunct="1">
-                        <a:lnSpc>
-                          <a:spcPct val="100000"/>
-                        </a:lnSpc>
-                        <a:spcBef>
-                          <a:spcPct val="20000"/>
-                        </a:spcBef>
-                        <a:spcAft>
-                          <a:spcPct val="0"/>
-                        </a:spcAft>
-                        <a:buClr>
-                          <a:srgbClr val="FF0000"/>
-                        </a:buClr>
-                        <a:buSzTx/>
-                        <a:buFont typeface="Wingdings" pitchFamily="2" charset="2"/>
-                        <a:buNone/>
-                        <a:tabLst/>
-                        <a:defRPr/>
-                      </a:pPr>
-                      <a:r>
-                        <a:rPr kumimoji="1" lang="en-US" altLang="ko-KR" sz="1000" b="0" i="0" u="none" strike="noStrike" kern="1200" cap="none" normalizeH="0" baseline="0" smtClean="0">
-                          <a:ln>
-                            <a:noFill/>
-                          </a:ln>
-                          <a:solidFill>
-                            <a:schemeClr val="tx1"/>
-                          </a:solidFill>
-                          <a:effectLst/>
-                          <a:latin typeface="+mn-lt"/>
-                          <a:ea typeface="+mn-ea"/>
-                          <a:cs typeface="+mn-cs"/>
-                        </a:rPr>
-                        <a:t>     1) </a:t>
-                      </a:r>
-                      <a:r>
-                        <a:rPr kumimoji="1" lang="ko-KR" altLang="en-US" sz="1000" b="0" i="0" u="none" strike="noStrike" kern="1200" cap="none" normalizeH="0" baseline="0" smtClean="0">
-                          <a:ln>
-                            <a:noFill/>
-                          </a:ln>
-                          <a:solidFill>
-                            <a:schemeClr val="tx1"/>
-                          </a:solidFill>
-                          <a:effectLst/>
-                          <a:latin typeface="+mn-lt"/>
-                          <a:ea typeface="+mn-ea"/>
-                          <a:cs typeface="+mn-cs"/>
-                        </a:rPr>
-                        <a:t>정상 성능 출력되는 좌우 편차 개선 시료 실차 교체</a:t>
-                      </a:r>
-                      <a:endParaRPr kumimoji="1" lang="en-US" altLang="ko-KR" sz="1000" b="0" i="0" u="none" strike="noStrike" kern="1200" cap="none" normalizeH="0" baseline="0" smtClean="0">
-                        <a:ln>
-                          <a:noFill/>
-                        </a:ln>
-                        <a:solidFill>
-                          <a:schemeClr val="tx1"/>
-                        </a:solidFill>
-                        <a:effectLst/>
-                        <a:latin typeface="+mn-lt"/>
-                        <a:ea typeface="+mn-ea"/>
-                        <a:cs typeface="+mn-cs"/>
-                      </a:endParaRPr>
-                    </a:p>
-                    <a:p>
-                      <a:pPr marL="0" marR="0" lvl="0" indent="0" algn="l" defTabSz="914400" rtl="0" eaLnBrk="1" fontAlgn="base" latinLnBrk="1" hangingPunct="1">
-                        <a:lnSpc>
-                          <a:spcPct val="100000"/>
-                        </a:lnSpc>
-                        <a:spcBef>
-                          <a:spcPct val="20000"/>
-                        </a:spcBef>
-                        <a:spcAft>
-                          <a:spcPct val="0"/>
-                        </a:spcAft>
-                        <a:buClr>
-                          <a:srgbClr val="FF0000"/>
-                        </a:buClr>
-                        <a:buSzTx/>
-                        <a:buFont typeface="Wingdings" pitchFamily="2" charset="2"/>
-                        <a:buNone/>
-                        <a:tabLst/>
-                        <a:defRPr/>
-                      </a:pPr>
-                      <a:r>
-                        <a:rPr kumimoji="1" lang="en-US" altLang="ko-KR" sz="1000" b="0" i="0" u="none" strike="noStrike" kern="1200" cap="none" normalizeH="0" baseline="0" smtClean="0">
-                          <a:ln>
-                            <a:noFill/>
-                          </a:ln>
-                          <a:solidFill>
-                            <a:schemeClr val="tx1"/>
-                          </a:solidFill>
-                          <a:effectLst/>
-                          <a:latin typeface="+mn-lt"/>
-                          <a:ea typeface="+mn-ea"/>
-                          <a:cs typeface="+mn-cs"/>
-                        </a:rPr>
-                        <a:t>     2) </a:t>
-                      </a:r>
-                      <a:r>
-                        <a:rPr kumimoji="1" lang="ko-KR" altLang="en-US" sz="1000" b="0" i="0" u="none" strike="noStrike" kern="1200" cap="none" normalizeH="0" baseline="0" smtClean="0">
-                          <a:ln>
-                            <a:noFill/>
-                          </a:ln>
-                          <a:solidFill>
-                            <a:schemeClr val="tx1"/>
-                          </a:solidFill>
-                          <a:effectLst/>
-                          <a:latin typeface="+mn-lt"/>
-                          <a:ea typeface="+mn-ea"/>
-                          <a:cs typeface="+mn-cs"/>
-                        </a:rPr>
-                        <a:t>최대 난방 평가 및 좌우 편차 시험 진행 </a:t>
-                      </a:r>
-                      <a:endParaRPr kumimoji="1" lang="en-US" altLang="ko-KR" sz="1000" b="0" i="0" u="none" strike="noStrike" kern="1200" cap="none" normalizeH="0" baseline="0" smtClean="0">
-                        <a:ln>
-                          <a:noFill/>
-                        </a:ln>
-                        <a:solidFill>
-                          <a:schemeClr val="tx1"/>
-                        </a:solidFill>
-                        <a:effectLst/>
-                        <a:latin typeface="+mn-lt"/>
-                        <a:ea typeface="+mn-ea"/>
-                        <a:cs typeface="+mn-cs"/>
-                      </a:endParaRPr>
-                    </a:p>
-                    <a:p>
-                      <a:pPr marL="0" marR="0" lvl="0" indent="0" algn="l" defTabSz="914400" rtl="0" eaLnBrk="1" fontAlgn="base" latinLnBrk="1" hangingPunct="1">
-                        <a:lnSpc>
-                          <a:spcPct val="100000"/>
-                        </a:lnSpc>
-                        <a:spcBef>
-                          <a:spcPct val="20000"/>
-                        </a:spcBef>
-                        <a:spcAft>
-                          <a:spcPct val="0"/>
-                        </a:spcAft>
-                        <a:buClr>
-                          <a:srgbClr val="FF0000"/>
-                        </a:buClr>
-                        <a:buSzTx/>
-                        <a:buFont typeface="Wingdings" pitchFamily="2" charset="2"/>
-                        <a:buNone/>
-                        <a:tabLst/>
-                        <a:defRPr/>
-                      </a:pPr>
-                      <a:endParaRPr lang="en-US" altLang="ko-KR" sz="1000" b="0" i="0" kern="1200" smtClean="0">
                         <a:solidFill>
                           <a:schemeClr val="tx1"/>
                         </a:solidFill>
@@ -17846,22 +17623,7 @@
                           <a:ea typeface="+mn-ea"/>
                           <a:cs typeface="+mn-cs"/>
                         </a:rPr>
-                        <a:t>: </a:t>
-                      </a:r>
-                      <a:r>
-                        <a:rPr kumimoji="1" lang="en-US" altLang="ko-KR" sz="1000" b="0" i="0" u="none" strike="noStrike" kern="1200" cap="none" normalizeH="0" baseline="0" smtClean="0">
-                          <a:ln>
-                            <a:noFill/>
-                          </a:ln>
-                          <a:solidFill>
-                            <a:schemeClr val="tx1"/>
-                          </a:solidFill>
-                          <a:effectLst/>
-                          <a:latin typeface="+mn-lt"/>
-                          <a:ea typeface="+mn-ea"/>
-                          <a:cs typeface="+mn-cs"/>
-                        </a:rPr>
-                        <a:t>7/23</a:t>
+                        <a:t>: 7/23</a:t>
                       </a:r>
                     </a:p>
                     <a:p>
@@ -17940,7 +17702,7 @@
                           <a:ea typeface="+mn-ea"/>
                           <a:cs typeface="+mn-cs"/>
                         </a:rPr>
-                        <a:t>수정후 </a:t>
+                        <a:t>안건수정 후 </a:t>
                       </a:r>
                       <a:r>
                         <a:rPr kumimoji="1" lang="en-US" altLang="ko-KR" sz="1000" b="0" i="0" u="none" strike="noStrike" kern="1200" cap="none" normalizeH="0" baseline="0" smtClean="0">
@@ -17985,7 +17747,99 @@
                           <a:ea typeface="+mn-ea"/>
                           <a:cs typeface="+mn-cs"/>
                         </a:rPr>
-                        <a:t>: 8/5</a:t>
+                        <a:t>: </a:t>
+                      </a:r>
+                      <a:r>
+                        <a:rPr kumimoji="1" lang="en-US" altLang="ko-KR" sz="1000" b="0" i="0" u="none" strike="noStrike" kern="1200" cap="none" normalizeH="0" baseline="0" smtClean="0">
+                          <a:ln>
+                            <a:noFill/>
+                          </a:ln>
+                          <a:solidFill>
+                            <a:schemeClr val="tx1"/>
+                          </a:solidFill>
+                          <a:effectLst/>
+                          <a:latin typeface="+mn-lt"/>
+                          <a:ea typeface="+mn-ea"/>
+                          <a:cs typeface="+mn-cs"/>
+                        </a:rPr>
+                        <a:t>8/5</a:t>
+                      </a:r>
+                    </a:p>
+                    <a:p>
+                      <a:r>
+                        <a:rPr kumimoji="1" lang="en-US" altLang="ko-KR" sz="1000" b="0" i="0" u="none" strike="noStrike" kern="1200" cap="none" normalizeH="0" baseline="0" smtClean="0">
+                          <a:ln>
+                            <a:noFill/>
+                          </a:ln>
+                          <a:solidFill>
+                            <a:schemeClr val="tx1"/>
+                          </a:solidFill>
+                          <a:effectLst/>
+                          <a:latin typeface="+mn-lt"/>
+                          <a:ea typeface="+mn-ea"/>
+                          <a:cs typeface="+mn-cs"/>
+                        </a:rPr>
+                        <a:t>   - SPQA </a:t>
+                      </a:r>
+                      <a:r>
+                        <a:rPr kumimoji="1" lang="ko-KR" altLang="en-US" sz="1000" b="0" i="0" u="none" strike="noStrike" kern="1200" cap="none" normalizeH="0" baseline="0" smtClean="0">
+                          <a:ln>
+                            <a:noFill/>
+                          </a:ln>
+                          <a:solidFill>
+                            <a:schemeClr val="tx1"/>
+                          </a:solidFill>
+                          <a:effectLst/>
+                          <a:latin typeface="+mn-lt"/>
+                          <a:ea typeface="+mn-ea"/>
+                          <a:cs typeface="+mn-cs"/>
+                        </a:rPr>
+                        <a:t>육성 프로젝트 </a:t>
+                      </a:r>
+                      <a:r>
+                        <a:rPr kumimoji="1" lang="en-US" altLang="ko-KR" sz="1000" b="0" i="0" u="none" strike="noStrike" kern="1200" cap="none" normalizeH="0" baseline="0" smtClean="0">
+                          <a:ln>
+                            <a:noFill/>
+                          </a:ln>
+                          <a:solidFill>
+                            <a:schemeClr val="tx1"/>
+                          </a:solidFill>
+                          <a:effectLst/>
+                          <a:latin typeface="+mn-lt"/>
+                          <a:ea typeface="+mn-ea"/>
+                          <a:cs typeface="+mn-cs"/>
+                        </a:rPr>
+                        <a:t>2</a:t>
+                      </a:r>
+                      <a:r>
+                        <a:rPr kumimoji="1" lang="ko-KR" altLang="en-US" sz="1000" b="0" i="0" u="none" strike="noStrike" kern="1200" cap="none" normalizeH="0" baseline="0" smtClean="0">
+                          <a:ln>
+                            <a:noFill/>
+                          </a:ln>
+                          <a:solidFill>
+                            <a:schemeClr val="tx1"/>
+                          </a:solidFill>
+                          <a:effectLst/>
+                          <a:latin typeface="+mn-lt"/>
+                          <a:ea typeface="+mn-ea"/>
+                          <a:cs typeface="+mn-cs"/>
+                        </a:rPr>
+                        <a:t>차 심사 </a:t>
+                      </a:r>
+                      <a:r>
+                        <a:rPr kumimoji="1" lang="en-US" altLang="ko-KR" sz="1000" b="0" i="0" u="none" strike="noStrike" kern="1200" cap="none" normalizeH="0" baseline="0" smtClean="0">
+                          <a:ln>
+                            <a:noFill/>
+                          </a:ln>
+                          <a:solidFill>
+                            <a:schemeClr val="tx1"/>
+                          </a:solidFill>
+                          <a:effectLst/>
+                          <a:latin typeface="+mn-lt"/>
+                          <a:ea typeface="+mn-ea"/>
+                          <a:cs typeface="+mn-cs"/>
+                        </a:rPr>
+                        <a:t>: 8/7</a:t>
                       </a:r>
                       <a:endParaRPr lang="ko-KR" altLang="en-US" sz="1000" b="0">
                         <a:solidFill>
@@ -18405,18 +18259,757 @@
                         <a:tabLst/>
                         <a:defRPr/>
                       </a:pPr>
-                      <a:endParaRPr kumimoji="0" lang="en-US" altLang="ko-KR" sz="1050" b="0" i="0" u="none" strike="noStrike" kern="1200" cap="none" spc="0" normalizeH="0" baseline="0" noProof="0" smtClean="0">
+                      <a:r>
+                        <a:rPr kumimoji="1" lang="en-US" altLang="ko-KR" sz="1050" b="0" i="0" u="none" strike="noStrike" kern="1200" cap="none" normalizeH="0" baseline="0" smtClean="0">
+                          <a:ln>
+                            <a:noFill/>
+                          </a:ln>
+                          <a:solidFill>
+                            <a:schemeClr val="tx1"/>
+                          </a:solidFill>
+                          <a:effectLst/>
+                          <a:latin typeface="+mn-lt"/>
+                          <a:ea typeface="+mn-ea"/>
+                          <a:cs typeface="+mn-cs"/>
+                        </a:rPr>
+                        <a:t>1. QV </a:t>
+                      </a:r>
+                      <a:r>
+                        <a:rPr kumimoji="1" lang="ko-KR" altLang="en-US" sz="1050" b="0" i="0" u="none" strike="noStrike" kern="1200" cap="none" normalizeH="0" baseline="0" smtClean="0">
+                          <a:ln>
+                            <a:noFill/>
+                          </a:ln>
+                          <a:solidFill>
+                            <a:schemeClr val="tx1"/>
+                          </a:solidFill>
+                          <a:effectLst/>
+                          <a:latin typeface="+mn-lt"/>
+                          <a:ea typeface="+mn-ea"/>
+                          <a:cs typeface="+mn-cs"/>
+                        </a:rPr>
+                        <a:t>최대 난방 평가 대응</a:t>
+                      </a:r>
+                      <a:endParaRPr kumimoji="1" lang="en-US" altLang="ko-KR" sz="1050" b="0" i="0" u="none" strike="noStrike" kern="1200" cap="none" normalizeH="0" baseline="0" smtClean="0">
                         <a:ln>
                           <a:noFill/>
                         </a:ln>
                         <a:solidFill>
-                          <a:srgbClr val="0000FF"/>
+                          <a:schemeClr val="tx1"/>
                         </a:solidFill>
                         <a:effectLst/>
-                        <a:uLnTx/>
-                        <a:uFillTx/>
-                        <a:latin typeface="현대하모니 L" panose="02020603020101020101" pitchFamily="18" charset="-127"/>
-                        <a:ea typeface="현대하모니 L" panose="02020603020101020101" pitchFamily="18" charset="-127"/>
+                        <a:latin typeface="+mn-lt"/>
+                        <a:ea typeface="+mn-ea"/>
+                        <a:cs typeface="+mn-cs"/>
+                      </a:endParaRPr>
+                    </a:p>
+                    <a:p>
+                      <a:pPr marL="0" marR="0" lvl="0" indent="0" algn="l" defTabSz="914400" rtl="0" eaLnBrk="1" fontAlgn="base" latinLnBrk="1" hangingPunct="1">
+                        <a:lnSpc>
+                          <a:spcPct val="100000"/>
+                        </a:lnSpc>
+                        <a:spcBef>
+                          <a:spcPct val="20000"/>
+                        </a:spcBef>
+                        <a:spcAft>
+                          <a:spcPct val="0"/>
+                        </a:spcAft>
+                        <a:buClr>
+                          <a:srgbClr val="FF0000"/>
+                        </a:buClr>
+                        <a:buSzTx/>
+                        <a:buFont typeface="Wingdings" pitchFamily="2" charset="2"/>
+                        <a:buNone/>
+                        <a:tabLst/>
+                        <a:defRPr/>
+                      </a:pPr>
+                      <a:r>
+                        <a:rPr kumimoji="1" lang="ko-KR" altLang="en-US" sz="1050" b="0" i="0" u="none" strike="noStrike" kern="1200" cap="none" normalizeH="0" baseline="0" smtClean="0">
+                          <a:ln>
+                            <a:noFill/>
+                          </a:ln>
+                          <a:solidFill>
+                            <a:schemeClr val="tx1"/>
+                          </a:solidFill>
+                          <a:effectLst/>
+                          <a:latin typeface="+mn-lt"/>
+                          <a:ea typeface="+mn-ea"/>
+                          <a:cs typeface="+mn-cs"/>
+                        </a:rPr>
+                        <a:t>   장소 </a:t>
+                      </a:r>
+                      <a:r>
+                        <a:rPr kumimoji="1" lang="en-US" altLang="ko-KR" sz="1050" b="0" i="0" u="none" strike="noStrike" kern="1200" cap="none" normalizeH="0" baseline="0" smtClean="0">
+                          <a:ln>
+                            <a:noFill/>
+                          </a:ln>
+                          <a:solidFill>
+                            <a:schemeClr val="tx1"/>
+                          </a:solidFill>
+                          <a:effectLst/>
+                          <a:latin typeface="+mn-lt"/>
+                          <a:ea typeface="+mn-ea"/>
+                          <a:cs typeface="+mn-cs"/>
+                        </a:rPr>
+                        <a:t>: </a:t>
+                      </a:r>
+                      <a:r>
+                        <a:rPr kumimoji="1" lang="ko-KR" altLang="en-US" sz="1050" b="0" i="0" u="none" strike="noStrike" kern="1200" cap="none" normalizeH="0" baseline="0" smtClean="0">
+                          <a:ln>
+                            <a:noFill/>
+                          </a:ln>
+                          <a:solidFill>
+                            <a:schemeClr val="tx1"/>
+                          </a:solidFill>
+                          <a:effectLst/>
+                          <a:latin typeface="+mn-lt"/>
+                          <a:ea typeface="+mn-ea"/>
+                          <a:cs typeface="+mn-cs"/>
+                        </a:rPr>
+                        <a:t>현대 남양 연구소 에너지 시험팀 실차 챔버</a:t>
+                      </a:r>
+                      <a:endParaRPr kumimoji="1" lang="en-US" altLang="ko-KR" sz="1050" b="0" i="0" u="none" strike="noStrike" kern="1200" cap="none" normalizeH="0" baseline="0" smtClean="0">
+                        <a:ln>
+                          <a:noFill/>
+                        </a:ln>
+                        <a:solidFill>
+                          <a:schemeClr val="tx1"/>
+                        </a:solidFill>
+                        <a:effectLst/>
+                        <a:latin typeface="+mn-lt"/>
+                        <a:ea typeface="+mn-ea"/>
+                        <a:cs typeface="+mn-cs"/>
+                      </a:endParaRPr>
+                    </a:p>
+                    <a:p>
+                      <a:pPr marL="0" marR="0" lvl="0" indent="0" algn="l" defTabSz="914400" rtl="0" eaLnBrk="1" fontAlgn="base" latinLnBrk="1" hangingPunct="1">
+                        <a:lnSpc>
+                          <a:spcPct val="100000"/>
+                        </a:lnSpc>
+                        <a:spcBef>
+                          <a:spcPct val="20000"/>
+                        </a:spcBef>
+                        <a:spcAft>
+                          <a:spcPct val="0"/>
+                        </a:spcAft>
+                        <a:buClr>
+                          <a:srgbClr val="FF0000"/>
+                        </a:buClr>
+                        <a:buSzTx/>
+                        <a:buFont typeface="Wingdings" pitchFamily="2" charset="2"/>
+                        <a:buNone/>
+                        <a:tabLst/>
+                        <a:defRPr/>
+                      </a:pPr>
+                      <a:r>
+                        <a:rPr kumimoji="1" lang="en-US" altLang="ko-KR" sz="1050" b="0" i="0" u="none" strike="noStrike" kern="1200" cap="none" normalizeH="0" baseline="0" smtClean="0">
+                          <a:ln>
+                            <a:noFill/>
+                          </a:ln>
+                          <a:solidFill>
+                            <a:schemeClr val="tx1"/>
+                          </a:solidFill>
+                          <a:effectLst/>
+                          <a:latin typeface="+mn-lt"/>
+                          <a:ea typeface="+mn-ea"/>
+                          <a:cs typeface="+mn-cs"/>
+                        </a:rPr>
+                        <a:t>   </a:t>
+                      </a:r>
+                      <a:r>
+                        <a:rPr kumimoji="1" lang="ko-KR" altLang="en-US" sz="1050" b="0" i="0" u="none" strike="noStrike" kern="1200" cap="none" normalizeH="0" baseline="0" smtClean="0">
+                          <a:ln>
+                            <a:noFill/>
+                          </a:ln>
+                          <a:solidFill>
+                            <a:schemeClr val="tx1"/>
+                          </a:solidFill>
+                          <a:effectLst/>
+                          <a:latin typeface="+mn-lt"/>
+                          <a:ea typeface="+mn-ea"/>
+                          <a:cs typeface="+mn-cs"/>
+                        </a:rPr>
+                        <a:t>목적 </a:t>
+                      </a:r>
+                      <a:r>
+                        <a:rPr kumimoji="1" lang="en-US" altLang="ko-KR" sz="1050" b="0" i="0" u="none" strike="noStrike" kern="1200" cap="none" normalizeH="0" baseline="0" smtClean="0">
+                          <a:ln>
+                            <a:noFill/>
+                          </a:ln>
+                          <a:solidFill>
+                            <a:schemeClr val="tx1"/>
+                          </a:solidFill>
+                          <a:effectLst/>
+                          <a:latin typeface="+mn-lt"/>
+                          <a:ea typeface="+mn-ea"/>
+                          <a:cs typeface="+mn-cs"/>
+                        </a:rPr>
+                        <a:t>: </a:t>
+                      </a:r>
+                      <a:r>
+                        <a:rPr kumimoji="1" lang="ko-KR" altLang="en-US" sz="1050" b="0" i="0" u="none" strike="noStrike" kern="1200" cap="none" normalizeH="0" baseline="0" smtClean="0">
+                          <a:ln>
+                            <a:noFill/>
+                          </a:ln>
+                          <a:solidFill>
+                            <a:schemeClr val="tx1"/>
+                          </a:solidFill>
+                          <a:effectLst/>
+                          <a:latin typeface="+mn-lt"/>
+                          <a:ea typeface="+mn-ea"/>
+                          <a:cs typeface="+mn-cs"/>
+                        </a:rPr>
+                        <a:t>좌우 편차 개선 시료 최대 난방 평가 </a:t>
+                      </a:r>
+                      <a:r>
+                        <a:rPr kumimoji="1" lang="en-US" altLang="ko-KR" sz="1050" b="0" i="0" u="none" strike="noStrike" kern="1200" cap="none" normalizeH="0" baseline="0" smtClean="0">
+                          <a:ln>
+                            <a:noFill/>
+                          </a:ln>
+                          <a:solidFill>
+                            <a:schemeClr val="tx1"/>
+                          </a:solidFill>
+                          <a:effectLst/>
+                          <a:latin typeface="+mn-lt"/>
+                          <a:ea typeface="+mn-ea"/>
+                          <a:cs typeface="+mn-cs"/>
+                        </a:rPr>
+                        <a:t>NG (20</a:t>
+                      </a:r>
+                      <a:r>
+                        <a:rPr kumimoji="1" lang="ko-KR" altLang="en-US" sz="1050" b="0" i="0" u="none" strike="noStrike" kern="1200" cap="none" normalizeH="0" baseline="0" smtClean="0">
+                          <a:ln>
+                            <a:noFill/>
+                          </a:ln>
+                          <a:solidFill>
+                            <a:schemeClr val="tx1"/>
+                          </a:solidFill>
+                          <a:effectLst/>
+                          <a:latin typeface="+mn-lt"/>
+                          <a:ea typeface="+mn-ea"/>
+                          <a:cs typeface="+mn-cs"/>
+                        </a:rPr>
+                        <a:t>호차</a:t>
+                      </a:r>
+                      <a:r>
+                        <a:rPr kumimoji="1" lang="en-US" altLang="ko-KR" sz="1050" b="0" i="0" u="none" strike="noStrike" kern="1200" cap="none" normalizeH="0" baseline="0" smtClean="0">
+                          <a:ln>
+                            <a:noFill/>
+                          </a:ln>
+                          <a:solidFill>
+                            <a:schemeClr val="tx1"/>
+                          </a:solidFill>
+                          <a:effectLst/>
+                          <a:latin typeface="+mn-lt"/>
+                          <a:ea typeface="+mn-ea"/>
+                          <a:cs typeface="+mn-cs"/>
+                        </a:rPr>
+                        <a:t>)</a:t>
+                      </a:r>
+                    </a:p>
+                    <a:p>
+                      <a:pPr marL="0" marR="0" lvl="0" indent="0" algn="l" defTabSz="914400" rtl="0" eaLnBrk="1" fontAlgn="base" latinLnBrk="1" hangingPunct="1">
+                        <a:lnSpc>
+                          <a:spcPct val="100000"/>
+                        </a:lnSpc>
+                        <a:spcBef>
+                          <a:spcPct val="20000"/>
+                        </a:spcBef>
+                        <a:spcAft>
+                          <a:spcPct val="0"/>
+                        </a:spcAft>
+                        <a:buClr>
+                          <a:srgbClr val="FF0000"/>
+                        </a:buClr>
+                        <a:buSzTx/>
+                        <a:buFont typeface="Wingdings" pitchFamily="2" charset="2"/>
+                        <a:buNone/>
+                        <a:tabLst/>
+                        <a:defRPr/>
+                      </a:pPr>
+                      <a:r>
+                        <a:rPr kumimoji="1" lang="en-US" altLang="ko-KR" sz="1050" b="0" i="0" u="none" strike="noStrike" kern="1200" cap="none" normalizeH="0" baseline="0" smtClean="0">
+                          <a:ln>
+                            <a:noFill/>
+                          </a:ln>
+                          <a:solidFill>
+                            <a:schemeClr val="tx1"/>
+                          </a:solidFill>
+                          <a:effectLst/>
+                          <a:latin typeface="+mn-lt"/>
+                          <a:ea typeface="+mn-ea"/>
+                          <a:cs typeface="+mn-cs"/>
+                        </a:rPr>
+                        <a:t>           </a:t>
+                      </a:r>
+                      <a:r>
+                        <a:rPr kumimoji="1" lang="ko-KR" altLang="en-US" sz="1050" b="0" i="0" u="none" strike="noStrike" kern="1200" cap="none" normalizeH="0" baseline="0" smtClean="0">
+                          <a:ln>
+                            <a:noFill/>
+                          </a:ln>
+                          <a:solidFill>
+                            <a:schemeClr val="tx1"/>
+                          </a:solidFill>
+                          <a:effectLst/>
+                          <a:latin typeface="+mn-lt"/>
+                          <a:ea typeface="+mn-ea"/>
+                          <a:cs typeface="+mn-cs"/>
+                        </a:rPr>
+                        <a:t> </a:t>
+                      </a:r>
+                      <a:r>
+                        <a:rPr kumimoji="1" lang="en-US" altLang="ko-KR" sz="1050" b="0" i="0" u="none" strike="noStrike" kern="1200" cap="none" normalizeH="0" baseline="0" smtClean="0">
+                          <a:ln>
+                            <a:noFill/>
+                          </a:ln>
+                          <a:solidFill>
+                            <a:schemeClr val="tx1"/>
+                          </a:solidFill>
+                          <a:effectLst/>
+                          <a:latin typeface="+mn-lt"/>
+                          <a:ea typeface="+mn-ea"/>
+                          <a:cs typeface="+mn-cs"/>
+                        </a:rPr>
+                        <a:t>Proto </a:t>
+                      </a:r>
+                      <a:r>
+                        <a:rPr kumimoji="1" lang="ko-KR" altLang="en-US" sz="1050" b="0" i="0" u="none" strike="noStrike" kern="1200" cap="none" normalizeH="0" baseline="0" smtClean="0">
+                          <a:ln>
+                            <a:noFill/>
+                          </a:ln>
+                          <a:solidFill>
+                            <a:schemeClr val="tx1"/>
+                          </a:solidFill>
+                          <a:effectLst/>
+                          <a:latin typeface="+mn-lt"/>
+                          <a:ea typeface="+mn-ea"/>
+                          <a:cs typeface="+mn-cs"/>
+                        </a:rPr>
+                        <a:t>시료에 좌우 편차 개선 </a:t>
+                      </a:r>
+                      <a:r>
+                        <a:rPr kumimoji="1" lang="en-US" altLang="ko-KR" sz="1050" b="0" i="0" u="none" strike="noStrike" kern="1200" cap="none" normalizeH="0" baseline="0" smtClean="0">
+                          <a:ln>
+                            <a:noFill/>
+                          </a:ln>
+                          <a:solidFill>
+                            <a:schemeClr val="tx1"/>
+                          </a:solidFill>
+                          <a:effectLst/>
+                          <a:latin typeface="+mn-lt"/>
+                          <a:ea typeface="+mn-ea"/>
+                          <a:cs typeface="+mn-cs"/>
+                        </a:rPr>
+                        <a:t>S/W(</a:t>
+                      </a:r>
+                      <a:r>
+                        <a:rPr kumimoji="1" lang="ko-KR" altLang="en-US" sz="1050" b="0" i="0" u="none" strike="noStrike" kern="1200" cap="none" normalizeH="0" baseline="0" smtClean="0">
+                          <a:ln>
+                            <a:noFill/>
+                          </a:ln>
+                          <a:solidFill>
+                            <a:schemeClr val="tx1"/>
+                          </a:solidFill>
+                          <a:effectLst/>
+                          <a:latin typeface="+mn-lt"/>
+                          <a:ea typeface="+mn-ea"/>
+                          <a:cs typeface="+mn-cs"/>
+                        </a:rPr>
+                        <a:t>전력제어</a:t>
+                      </a:r>
+                      <a:r>
+                        <a:rPr kumimoji="1" lang="en-US" altLang="ko-KR" sz="1050" b="0" i="0" u="none" strike="noStrike" kern="1200" cap="none" normalizeH="0" baseline="0" smtClean="0">
+                          <a:ln>
+                            <a:noFill/>
+                          </a:ln>
+                          <a:solidFill>
+                            <a:schemeClr val="tx1"/>
+                          </a:solidFill>
+                          <a:effectLst/>
+                          <a:latin typeface="+mn-lt"/>
+                          <a:ea typeface="+mn-ea"/>
+                          <a:cs typeface="+mn-cs"/>
+                        </a:rPr>
+                        <a:t>)</a:t>
+                      </a:r>
+                      <a:r>
+                        <a:rPr kumimoji="1" lang="ko-KR" altLang="en-US" sz="1050" b="0" i="0" u="none" strike="noStrike" kern="1200" cap="none" normalizeH="0" baseline="0" smtClean="0">
+                          <a:ln>
+                            <a:noFill/>
+                          </a:ln>
+                          <a:solidFill>
+                            <a:schemeClr val="tx1"/>
+                          </a:solidFill>
+                          <a:effectLst/>
+                          <a:latin typeface="+mn-lt"/>
+                          <a:ea typeface="+mn-ea"/>
+                          <a:cs typeface="+mn-cs"/>
+                        </a:rPr>
+                        <a:t> 적용하여</a:t>
+                      </a:r>
+                      <a:r>
+                        <a:rPr kumimoji="1" lang="en-US" altLang="ko-KR" sz="1050" b="0" i="0" u="none" strike="noStrike" kern="1200" cap="none" normalizeH="0" baseline="0" smtClean="0">
+                          <a:ln>
+                            <a:noFill/>
+                          </a:ln>
+                          <a:solidFill>
+                            <a:schemeClr val="tx1"/>
+                          </a:solidFill>
+                          <a:effectLst/>
+                          <a:latin typeface="+mn-lt"/>
+                          <a:ea typeface="+mn-ea"/>
+                          <a:cs typeface="+mn-cs"/>
+                        </a:rPr>
+                        <a:t>, </a:t>
+                      </a:r>
+                    </a:p>
+                    <a:p>
+                      <a:pPr marL="0" marR="0" lvl="0" indent="0" algn="l" defTabSz="914400" rtl="0" eaLnBrk="1" fontAlgn="base" latinLnBrk="1" hangingPunct="1">
+                        <a:lnSpc>
+                          <a:spcPct val="100000"/>
+                        </a:lnSpc>
+                        <a:spcBef>
+                          <a:spcPct val="20000"/>
+                        </a:spcBef>
+                        <a:spcAft>
+                          <a:spcPct val="0"/>
+                        </a:spcAft>
+                        <a:buClr>
+                          <a:srgbClr val="FF0000"/>
+                        </a:buClr>
+                        <a:buSzTx/>
+                        <a:buFont typeface="Wingdings" pitchFamily="2" charset="2"/>
+                        <a:buNone/>
+                        <a:tabLst/>
+                        <a:defRPr/>
+                      </a:pPr>
+                      <a:r>
+                        <a:rPr kumimoji="1" lang="en-US" altLang="ko-KR" sz="1050" b="0" i="0" u="none" strike="noStrike" kern="1200" cap="none" normalizeH="0" baseline="0" smtClean="0">
+                          <a:ln>
+                            <a:noFill/>
+                          </a:ln>
+                          <a:solidFill>
+                            <a:schemeClr val="tx1"/>
+                          </a:solidFill>
+                          <a:effectLst/>
+                          <a:latin typeface="+mn-lt"/>
+                          <a:ea typeface="+mn-ea"/>
+                          <a:cs typeface="+mn-cs"/>
+                        </a:rPr>
+                        <a:t>            </a:t>
+                      </a:r>
+                      <a:r>
+                        <a:rPr kumimoji="1" lang="ko-KR" altLang="en-US" sz="1050" b="0" i="0" u="none" strike="noStrike" kern="1200" cap="none" normalizeH="0" baseline="0" smtClean="0">
+                          <a:ln>
+                            <a:noFill/>
+                          </a:ln>
+                          <a:solidFill>
+                            <a:schemeClr val="tx1"/>
+                          </a:solidFill>
+                          <a:effectLst/>
+                          <a:latin typeface="+mn-lt"/>
+                          <a:ea typeface="+mn-ea"/>
+                          <a:cs typeface="+mn-cs"/>
+                        </a:rPr>
+                        <a:t>최대 난방 평가 진행</a:t>
+                      </a:r>
+                      <a:endParaRPr kumimoji="1" lang="en-US" altLang="ko-KR" sz="1050" b="0" i="0" u="none" strike="noStrike" kern="1200" cap="none" normalizeH="0" baseline="0" smtClean="0">
+                        <a:ln>
+                          <a:noFill/>
+                        </a:ln>
+                        <a:solidFill>
+                          <a:schemeClr val="tx1"/>
+                        </a:solidFill>
+                        <a:effectLst/>
+                        <a:latin typeface="+mn-lt"/>
+                        <a:ea typeface="+mn-ea"/>
+                        <a:cs typeface="+mn-cs"/>
+                      </a:endParaRPr>
+                    </a:p>
+                    <a:p>
+                      <a:pPr marL="0" marR="0" lvl="0" indent="0" algn="l" defTabSz="914400" rtl="0" eaLnBrk="1" fontAlgn="base" latinLnBrk="1" hangingPunct="1">
+                        <a:lnSpc>
+                          <a:spcPct val="100000"/>
+                        </a:lnSpc>
+                        <a:spcBef>
+                          <a:spcPct val="20000"/>
+                        </a:spcBef>
+                        <a:spcAft>
+                          <a:spcPct val="0"/>
+                        </a:spcAft>
+                        <a:buClr>
+                          <a:srgbClr val="FF0000"/>
+                        </a:buClr>
+                        <a:buSzTx/>
+                        <a:buFont typeface="Wingdings" pitchFamily="2" charset="2"/>
+                        <a:buNone/>
+                        <a:tabLst/>
+                        <a:defRPr/>
+                      </a:pPr>
+                      <a:r>
+                        <a:rPr kumimoji="1" lang="en-US" altLang="ko-KR" sz="1050" b="0" i="0" u="none" strike="noStrike" kern="1200" cap="none" normalizeH="0" baseline="0" noProof="0" smtClean="0">
+                          <a:ln>
+                            <a:noFill/>
+                          </a:ln>
+                          <a:solidFill>
+                            <a:schemeClr val="tx1"/>
+                          </a:solidFill>
+                          <a:effectLst/>
+                          <a:latin typeface="+mn-lt"/>
+                          <a:ea typeface="+mn-ea"/>
+                          <a:cs typeface="+mn-cs"/>
+                        </a:rPr>
+                        <a:t>   </a:t>
+                      </a:r>
+                      <a:r>
+                        <a:rPr kumimoji="1" lang="ko-KR" altLang="en-US" sz="1050" b="0" i="0" u="none" strike="noStrike" kern="1200" cap="none" normalizeH="0" baseline="0" noProof="0" smtClean="0">
+                          <a:ln>
+                            <a:noFill/>
+                          </a:ln>
+                          <a:solidFill>
+                            <a:schemeClr val="tx1"/>
+                          </a:solidFill>
+                          <a:effectLst/>
+                          <a:latin typeface="+mn-lt"/>
+                          <a:ea typeface="+mn-ea"/>
+                          <a:cs typeface="+mn-cs"/>
+                        </a:rPr>
+                        <a:t>결과 </a:t>
+                      </a:r>
+                      <a:r>
+                        <a:rPr kumimoji="1" lang="en-US" altLang="ko-KR" sz="1050" b="0" i="0" u="none" strike="noStrike" kern="1200" cap="none" normalizeH="0" baseline="0" noProof="0" smtClean="0">
+                          <a:ln>
+                            <a:noFill/>
+                          </a:ln>
+                          <a:solidFill>
+                            <a:schemeClr val="tx1"/>
+                          </a:solidFill>
+                          <a:effectLst/>
+                          <a:latin typeface="+mn-lt"/>
+                          <a:ea typeface="+mn-ea"/>
+                          <a:cs typeface="+mn-cs"/>
+                        </a:rPr>
+                        <a:t>: Proto </a:t>
+                      </a:r>
+                      <a:r>
+                        <a:rPr kumimoji="1" lang="ko-KR" altLang="en-US" sz="1050" b="0" i="0" u="none" strike="noStrike" kern="1200" cap="none" normalizeH="0" baseline="0" noProof="0" smtClean="0">
+                          <a:ln>
+                            <a:noFill/>
+                          </a:ln>
+                          <a:solidFill>
+                            <a:schemeClr val="tx1"/>
+                          </a:solidFill>
+                          <a:effectLst/>
+                          <a:latin typeface="+mn-lt"/>
+                          <a:ea typeface="+mn-ea"/>
+                          <a:cs typeface="+mn-cs"/>
+                        </a:rPr>
+                        <a:t>시료 최대 난방 평가 및 좌우 편차 시험 </a:t>
+                      </a:r>
+                      <a:r>
+                        <a:rPr kumimoji="1" lang="en-US" altLang="ko-KR" sz="1050" b="0" i="0" u="none" strike="noStrike" kern="1200" cap="none" normalizeH="0" baseline="0" noProof="0" smtClean="0">
+                          <a:ln>
+                            <a:noFill/>
+                          </a:ln>
+                          <a:solidFill>
+                            <a:schemeClr val="tx1"/>
+                          </a:solidFill>
+                          <a:effectLst/>
+                          <a:latin typeface="+mn-lt"/>
+                          <a:ea typeface="+mn-ea"/>
+                          <a:cs typeface="+mn-cs"/>
+                        </a:rPr>
+                        <a:t>OK</a:t>
+                      </a:r>
+                    </a:p>
+                    <a:p>
+                      <a:pPr marL="0" marR="0" lvl="0" indent="0" algn="l" defTabSz="914400" rtl="0" eaLnBrk="1" fontAlgn="base" latinLnBrk="1" hangingPunct="1">
+                        <a:lnSpc>
+                          <a:spcPct val="100000"/>
+                        </a:lnSpc>
+                        <a:spcBef>
+                          <a:spcPct val="20000"/>
+                        </a:spcBef>
+                        <a:spcAft>
+                          <a:spcPct val="0"/>
+                        </a:spcAft>
+                        <a:buClr>
+                          <a:srgbClr val="FF0000"/>
+                        </a:buClr>
+                        <a:buSzTx/>
+                        <a:buFont typeface="Wingdings" pitchFamily="2" charset="2"/>
+                        <a:buNone/>
+                        <a:tabLst/>
+                        <a:defRPr/>
+                      </a:pPr>
+                      <a:r>
+                        <a:rPr kumimoji="1" lang="en-US" altLang="ko-KR" sz="1050" b="0" i="0" u="none" strike="noStrike" kern="1200" cap="none" normalizeH="0" baseline="0" smtClean="0">
+                          <a:ln>
+                            <a:noFill/>
+                          </a:ln>
+                          <a:solidFill>
+                            <a:schemeClr val="tx1"/>
+                          </a:solidFill>
+                          <a:effectLst/>
+                          <a:latin typeface="+mn-lt"/>
+                          <a:ea typeface="+mn-ea"/>
+                          <a:cs typeface="+mn-cs"/>
+                        </a:rPr>
+                        <a:t>   </a:t>
+                      </a:r>
+                      <a:r>
+                        <a:rPr kumimoji="1" lang="ko-KR" altLang="en-US" sz="1050" b="0" i="0" u="none" strike="noStrike" kern="1200" cap="none" normalizeH="0" baseline="0" smtClean="0">
+                          <a:ln>
+                            <a:noFill/>
+                          </a:ln>
+                          <a:solidFill>
+                            <a:schemeClr val="tx1"/>
+                          </a:solidFill>
+                          <a:effectLst/>
+                          <a:latin typeface="+mn-lt"/>
+                          <a:ea typeface="+mn-ea"/>
+                          <a:cs typeface="+mn-cs"/>
+                        </a:rPr>
+                        <a:t>추후 진행 계획 </a:t>
+                      </a:r>
+                      <a:r>
+                        <a:rPr kumimoji="1" lang="en-US" altLang="ko-KR" sz="1050" b="0" i="0" u="none" strike="noStrike" kern="1200" cap="none" normalizeH="0" baseline="0" smtClean="0">
+                          <a:ln>
+                            <a:noFill/>
+                          </a:ln>
+                          <a:solidFill>
+                            <a:schemeClr val="tx1"/>
+                          </a:solidFill>
+                          <a:effectLst/>
+                          <a:latin typeface="+mn-lt"/>
+                          <a:ea typeface="+mn-ea"/>
+                          <a:cs typeface="+mn-cs"/>
+                        </a:rPr>
+                        <a:t>:</a:t>
+                      </a:r>
+                    </a:p>
+                    <a:p>
+                      <a:pPr marL="0" marR="0" lvl="0" indent="0" algn="l" defTabSz="914400" rtl="0" eaLnBrk="1" fontAlgn="base" latinLnBrk="1" hangingPunct="1">
+                        <a:lnSpc>
+                          <a:spcPct val="100000"/>
+                        </a:lnSpc>
+                        <a:spcBef>
+                          <a:spcPct val="20000"/>
+                        </a:spcBef>
+                        <a:spcAft>
+                          <a:spcPct val="0"/>
+                        </a:spcAft>
+                        <a:buClr>
+                          <a:srgbClr val="FF0000"/>
+                        </a:buClr>
+                        <a:buSzTx/>
+                        <a:buFont typeface="Wingdings" pitchFamily="2" charset="2"/>
+                        <a:buNone/>
+                        <a:tabLst/>
+                        <a:defRPr/>
+                      </a:pPr>
+                      <a:r>
+                        <a:rPr kumimoji="1" lang="en-US" altLang="ko-KR" sz="1050" b="0" i="0" u="none" strike="noStrike" kern="1200" cap="none" normalizeH="0" baseline="0" smtClean="0">
+                          <a:ln>
+                            <a:noFill/>
+                          </a:ln>
+                          <a:solidFill>
+                            <a:schemeClr val="tx1"/>
+                          </a:solidFill>
+                          <a:effectLst/>
+                          <a:latin typeface="+mn-lt"/>
+                          <a:ea typeface="+mn-ea"/>
+                          <a:cs typeface="+mn-cs"/>
+                        </a:rPr>
+                        <a:t>     1) </a:t>
+                      </a:r>
+                      <a:r>
+                        <a:rPr kumimoji="1" lang="ko-KR" altLang="en-US" sz="1050" b="0" i="0" u="none" strike="noStrike" kern="1200" cap="none" normalizeH="0" baseline="0" smtClean="0">
+                          <a:ln>
+                            <a:noFill/>
+                          </a:ln>
+                          <a:solidFill>
+                            <a:schemeClr val="tx1"/>
+                          </a:solidFill>
+                          <a:effectLst/>
+                          <a:latin typeface="+mn-lt"/>
+                          <a:ea typeface="+mn-ea"/>
+                          <a:cs typeface="+mn-cs"/>
+                        </a:rPr>
+                        <a:t>정상 성능 출력되는 좌우 편차 개선 시료 실차 교체</a:t>
+                      </a:r>
+                      <a:endParaRPr kumimoji="1" lang="en-US" altLang="ko-KR" sz="1050" b="0" i="0" u="none" strike="noStrike" kern="1200" cap="none" normalizeH="0" baseline="0" smtClean="0">
+                        <a:ln>
+                          <a:noFill/>
+                        </a:ln>
+                        <a:solidFill>
+                          <a:schemeClr val="tx1"/>
+                        </a:solidFill>
+                        <a:effectLst/>
+                        <a:latin typeface="+mn-lt"/>
+                        <a:ea typeface="+mn-ea"/>
+                        <a:cs typeface="+mn-cs"/>
+                      </a:endParaRPr>
+                    </a:p>
+                    <a:p>
+                      <a:pPr marL="0" marR="0" lvl="0" indent="0" algn="l" defTabSz="914400" rtl="0" eaLnBrk="1" fontAlgn="base" latinLnBrk="1" hangingPunct="1">
+                        <a:lnSpc>
+                          <a:spcPct val="100000"/>
+                        </a:lnSpc>
+                        <a:spcBef>
+                          <a:spcPct val="20000"/>
+                        </a:spcBef>
+                        <a:spcAft>
+                          <a:spcPct val="0"/>
+                        </a:spcAft>
+                        <a:buClr>
+                          <a:srgbClr val="FF0000"/>
+                        </a:buClr>
+                        <a:buSzTx/>
+                        <a:buFont typeface="Wingdings" pitchFamily="2" charset="2"/>
+                        <a:buNone/>
+                        <a:tabLst/>
+                        <a:defRPr/>
+                      </a:pPr>
+                      <a:r>
+                        <a:rPr kumimoji="1" lang="en-US" altLang="ko-KR" sz="1050" b="0" i="0" u="none" strike="noStrike" kern="1200" cap="none" normalizeH="0" baseline="0" smtClean="0">
+                          <a:ln>
+                            <a:noFill/>
+                          </a:ln>
+                          <a:solidFill>
+                            <a:schemeClr val="tx1"/>
+                          </a:solidFill>
+                          <a:effectLst/>
+                          <a:latin typeface="+mn-lt"/>
+                          <a:ea typeface="+mn-ea"/>
+                          <a:cs typeface="+mn-cs"/>
+                        </a:rPr>
+                        <a:t>     2) </a:t>
+                      </a:r>
+                      <a:r>
+                        <a:rPr kumimoji="1" lang="ko-KR" altLang="en-US" sz="1050" b="0" i="0" u="none" strike="noStrike" kern="1200" cap="none" normalizeH="0" baseline="0" smtClean="0">
+                          <a:ln>
+                            <a:noFill/>
+                          </a:ln>
+                          <a:solidFill>
+                            <a:schemeClr val="tx1"/>
+                          </a:solidFill>
+                          <a:effectLst/>
+                          <a:latin typeface="+mn-lt"/>
+                          <a:ea typeface="+mn-ea"/>
+                          <a:cs typeface="+mn-cs"/>
+                        </a:rPr>
+                        <a:t>최대 난방 평가 및 좌우 편차 시험 진행</a:t>
+                      </a:r>
+                      <a:endParaRPr kumimoji="1" lang="en-US" altLang="ko-KR" sz="1050" b="0" i="0" u="none" strike="noStrike" kern="1200" cap="none" normalizeH="0" baseline="0" noProof="0" smtClean="0">
+                        <a:ln>
+                          <a:noFill/>
+                        </a:ln>
+                        <a:solidFill>
+                          <a:schemeClr val="tx1"/>
+                        </a:solidFill>
+                        <a:effectLst/>
+                        <a:latin typeface="+mn-lt"/>
+                        <a:ea typeface="+mn-ea"/>
                         <a:cs typeface="+mn-cs"/>
                       </a:endParaRPr>
                     </a:p>
@@ -20807,6 +21400,63 @@
           </a:p>
         </p:txBody>
       </p:sp>
+      <p:graphicFrame>
+        <p:nvGraphicFramePr>
+          <p:cNvPr id="3" name="개체 2"/>
+          <p:cNvGraphicFramePr>
+            <a:graphicFrameLocks noChangeAspect="1"/>
+          </p:cNvGraphicFramePr>
+          <p:nvPr>
+            <p:extLst>
+              <p:ext uri="{D42A27DB-BD31-4B8C-83A1-F6EECF244321}">
+                <p14:modId xmlns:p14="http://schemas.microsoft.com/office/powerpoint/2010/main" val="4131633507"/>
+              </p:ext>
+            </p:extLst>
+          </p:nvPr>
+        </p:nvGraphicFramePr>
+        <p:xfrm>
+          <a:off x="3072970" y="2492896"/>
+          <a:ext cx="381000" cy="771525"/>
+        </p:xfrm>
+        <a:graphic>
+          <a:graphicData uri="http://schemas.openxmlformats.org/presentationml/2006/ole">
+            <mc:AlternateContent xmlns:mc="http://schemas.openxmlformats.org/markup-compatibility/2006">
+              <mc:Choice xmlns:v="urn:schemas-microsoft-com:vml" Requires="v">
+                <p:oleObj spid="_x0000_s1038" name="워크시트" showAsIcon="1" r:id="rId4" imgW="380880" imgH="771480" progId="Excel.Sheet.12">
+                  <p:embed/>
+                </p:oleObj>
+              </mc:Choice>
+              <mc:Fallback>
+                <p:oleObj name="워크시트" showAsIcon="1" r:id="rId4" imgW="380880" imgH="771480" progId="Excel.Sheet.12">
+                  <p:embed/>
+                  <p:pic>
+                    <p:nvPicPr>
+                      <p:cNvPr id="0" name=""/>
+                      <p:cNvPicPr/>
+                      <p:nvPr/>
+                    </p:nvPicPr>
+                    <p:blipFill>
+                      <a:blip r:embed="rId5"/>
+                      <a:stretch>
+                        <a:fillRect/>
+                      </a:stretch>
+                    </p:blipFill>
+                    <p:spPr>
+                      <a:xfrm>
+                        <a:off x="3072970" y="2492896"/>
+                        <a:ext cx="381000" cy="771525"/>
+                      </a:xfrm>
+                      <a:prstGeom prst="rect">
+                        <a:avLst/>
+                      </a:prstGeom>
+                    </p:spPr>
+                  </p:pic>
+                </p:oleObj>
+              </mc:Fallback>
+            </mc:AlternateContent>
+          </a:graphicData>
+        </a:graphic>
+      </p:graphicFrame>
     </p:spTree>
     <p:extLst>
       <p:ext uri="{BB962C8B-B14F-4D97-AF65-F5344CB8AC3E}">
@@ -20854,14 +21504,14 @@
           <p:nvPr>
             <p:extLst>
               <p:ext uri="{D42A27DB-BD31-4B8C-83A1-F6EECF244321}">
-                <p14:modId xmlns:p14="http://schemas.microsoft.com/office/powerpoint/2010/main" val="1405537085"/>
+                <p14:modId xmlns:p14="http://schemas.microsoft.com/office/powerpoint/2010/main" val="240937369"/>
               </p:ext>
             </p:extLst>
           </p:nvPr>
         </p:nvGraphicFramePr>
         <p:xfrm>
           <a:off x="11059" y="536956"/>
-          <a:ext cx="9097445" cy="5844372"/>
+          <a:ext cx="9097445" cy="5916381"/>
         </p:xfrm>
         <a:graphic>
           <a:graphicData uri="http://schemas.openxmlformats.org/drawingml/2006/table">
@@ -20890,7 +21540,7 @@
                   </a:extLst>
                 </a:gridCol>
               </a:tblGrid>
-              <a:tr h="796101">
+              <a:tr h="845791">
                 <a:tc gridSpan="3">
                   <a:txBody>
                     <a:bodyPr/>
@@ -21054,7 +21704,7 @@
                   </a:ext>
                 </a:extLst>
               </a:tr>
-              <a:tr h="370619">
+              <a:tr h="393752">
                 <a:tc>
                   <a:txBody>
                     <a:bodyPr/>
@@ -21386,7 +22036,7 @@
                   </a:ext>
                 </a:extLst>
               </a:tr>
-              <a:tr h="3415906">
+              <a:tr h="2674540">
                 <a:tc>
                   <a:txBody>
                     <a:bodyPr/>
@@ -22149,7 +22799,7 @@
                   </a:ext>
                 </a:extLst>
               </a:tr>
-              <a:tr h="1261746">
+              <a:tr h="2002298">
                 <a:tc>
                   <a:txBody>
                     <a:bodyPr/>
@@ -22273,6 +22923,426 @@
                             <a:noFill/>
                           </a:ln>
                           <a:solidFill>
+                            <a:schemeClr val="tx1"/>
+                          </a:solidFill>
+                          <a:effectLst/>
+                          <a:latin typeface="+mn-lt"/>
+                          <a:ea typeface="+mn-ea"/>
+                          <a:cs typeface="+mn-cs"/>
+                        </a:rPr>
+                        <a:t>1. </a:t>
+                      </a:r>
+                      <a:r>
+                        <a:rPr kumimoji="1" lang="ko-KR" altLang="en-US" sz="1000" b="0" i="0" u="none" strike="noStrike" kern="1200" cap="none" normalizeH="0" baseline="0" smtClean="0">
+                          <a:ln>
+                            <a:noFill/>
+                          </a:ln>
+                          <a:solidFill>
+                            <a:schemeClr val="tx1"/>
+                          </a:solidFill>
+                          <a:effectLst/>
+                          <a:latin typeface="+mn-lt"/>
+                          <a:ea typeface="+mn-ea"/>
+                          <a:cs typeface="+mn-cs"/>
+                        </a:rPr>
+                        <a:t>최대 난방 성능 평가 및 좌우 온도 편차 대응</a:t>
+                      </a:r>
+                      <a:endParaRPr kumimoji="1" lang="en-US" altLang="ko-KR" sz="1000" b="0" i="0" u="none" strike="noStrike" kern="1200" cap="none" normalizeH="0" baseline="0" smtClean="0">
+                        <a:ln>
+                          <a:noFill/>
+                        </a:ln>
+                        <a:solidFill>
+                          <a:schemeClr val="tx1"/>
+                        </a:solidFill>
+                        <a:effectLst/>
+                        <a:latin typeface="+mn-lt"/>
+                        <a:ea typeface="+mn-ea"/>
+                        <a:cs typeface="+mn-cs"/>
+                      </a:endParaRPr>
+                    </a:p>
+                    <a:p>
+                      <a:pPr marL="0" marR="0" lvl="0" indent="0" algn="l" defTabSz="914400" rtl="0" eaLnBrk="1" fontAlgn="base" latinLnBrk="1" hangingPunct="1">
+                        <a:lnSpc>
+                          <a:spcPct val="100000"/>
+                        </a:lnSpc>
+                        <a:spcBef>
+                          <a:spcPct val="20000"/>
+                        </a:spcBef>
+                        <a:spcAft>
+                          <a:spcPct val="0"/>
+                        </a:spcAft>
+                        <a:buClr>
+                          <a:srgbClr val="FF0000"/>
+                        </a:buClr>
+                        <a:buSzTx/>
+                        <a:buFont typeface="Wingdings" pitchFamily="2" charset="2"/>
+                        <a:buNone/>
+                        <a:tabLst/>
+                        <a:defRPr/>
+                      </a:pPr>
+                      <a:r>
+                        <a:rPr kumimoji="1" lang="ko-KR" altLang="en-US" sz="1000" b="0" i="0" u="none" strike="noStrike" kern="1200" cap="none" normalizeH="0" baseline="0" smtClean="0">
+                          <a:ln>
+                            <a:noFill/>
+                          </a:ln>
+                          <a:solidFill>
+                            <a:schemeClr val="tx1"/>
+                          </a:solidFill>
+                          <a:effectLst/>
+                          <a:latin typeface="+mn-lt"/>
+                          <a:ea typeface="+mn-ea"/>
+                          <a:cs typeface="+mn-cs"/>
+                        </a:rPr>
+                        <a:t>  장소 </a:t>
+                      </a:r>
+                      <a:r>
+                        <a:rPr kumimoji="1" lang="en-US" altLang="ko-KR" sz="1000" b="0" i="0" u="none" strike="noStrike" kern="1200" cap="none" normalizeH="0" baseline="0" smtClean="0">
+                          <a:ln>
+                            <a:noFill/>
+                          </a:ln>
+                          <a:solidFill>
+                            <a:schemeClr val="tx1"/>
+                          </a:solidFill>
+                          <a:effectLst/>
+                          <a:latin typeface="+mn-lt"/>
+                          <a:ea typeface="+mn-ea"/>
+                          <a:cs typeface="+mn-cs"/>
+                        </a:rPr>
+                        <a:t>: </a:t>
+                      </a:r>
+                      <a:r>
+                        <a:rPr kumimoji="1" lang="ko-KR" altLang="en-US" sz="1000" b="0" i="0" u="none" strike="noStrike" kern="1200" cap="none" normalizeH="0" baseline="0" smtClean="0">
+                          <a:ln>
+                            <a:noFill/>
+                          </a:ln>
+                          <a:solidFill>
+                            <a:schemeClr val="tx1"/>
+                          </a:solidFill>
+                          <a:effectLst/>
+                          <a:latin typeface="+mn-lt"/>
+                          <a:ea typeface="+mn-ea"/>
+                          <a:cs typeface="+mn-cs"/>
+                        </a:rPr>
+                        <a:t>현대 남양 연구소 에너지 시험팀 실차 챔버</a:t>
+                      </a:r>
+                      <a:endParaRPr kumimoji="1" lang="en-US" altLang="ko-KR" sz="1000" b="0" i="0" u="none" strike="noStrike" kern="1200" cap="none" normalizeH="0" baseline="0" smtClean="0">
+                        <a:ln>
+                          <a:noFill/>
+                        </a:ln>
+                        <a:solidFill>
+                          <a:schemeClr val="tx1"/>
+                        </a:solidFill>
+                        <a:effectLst/>
+                        <a:latin typeface="+mn-lt"/>
+                        <a:ea typeface="+mn-ea"/>
+                        <a:cs typeface="+mn-cs"/>
+                      </a:endParaRPr>
+                    </a:p>
+                    <a:p>
+                      <a:pPr marL="0" marR="0" lvl="0" indent="0" algn="l" defTabSz="914400" rtl="0" eaLnBrk="1" fontAlgn="base" latinLnBrk="1" hangingPunct="1">
+                        <a:lnSpc>
+                          <a:spcPct val="100000"/>
+                        </a:lnSpc>
+                        <a:spcBef>
+                          <a:spcPct val="20000"/>
+                        </a:spcBef>
+                        <a:spcAft>
+                          <a:spcPct val="0"/>
+                        </a:spcAft>
+                        <a:buClr>
+                          <a:srgbClr val="FF0000"/>
+                        </a:buClr>
+                        <a:buSzTx/>
+                        <a:buFont typeface="Wingdings" pitchFamily="2" charset="2"/>
+                        <a:buNone/>
+                        <a:tabLst/>
+                        <a:defRPr/>
+                      </a:pPr>
+                      <a:r>
+                        <a:rPr kumimoji="1" lang="en-US" altLang="ko-KR" sz="1000" b="0" i="0" u="none" strike="noStrike" kern="1200" cap="none" normalizeH="0" baseline="0" smtClean="0">
+                          <a:ln>
+                            <a:noFill/>
+                          </a:ln>
+                          <a:solidFill>
+                            <a:schemeClr val="tx1"/>
+                          </a:solidFill>
+                          <a:effectLst/>
+                          <a:latin typeface="+mn-lt"/>
+                          <a:ea typeface="+mn-ea"/>
+                          <a:cs typeface="+mn-cs"/>
+                        </a:rPr>
+                        <a:t>  </a:t>
+                      </a:r>
+                      <a:r>
+                        <a:rPr kumimoji="1" lang="ko-KR" altLang="en-US" sz="1000" b="0" i="0" u="none" strike="noStrike" kern="1200" cap="none" normalizeH="0" baseline="0" smtClean="0">
+                          <a:ln>
+                            <a:noFill/>
+                          </a:ln>
+                          <a:solidFill>
+                            <a:schemeClr val="tx1"/>
+                          </a:solidFill>
+                          <a:effectLst/>
+                          <a:latin typeface="+mn-lt"/>
+                          <a:ea typeface="+mn-ea"/>
+                          <a:cs typeface="+mn-cs"/>
+                        </a:rPr>
+                        <a:t>목적 </a:t>
+                      </a:r>
+                      <a:r>
+                        <a:rPr kumimoji="1" lang="en-US" altLang="ko-KR" sz="1000" b="0" i="0" u="none" strike="noStrike" kern="1200" cap="none" normalizeH="0" baseline="0" smtClean="0">
+                          <a:ln>
+                            <a:noFill/>
+                          </a:ln>
+                          <a:solidFill>
+                            <a:schemeClr val="tx1"/>
+                          </a:solidFill>
+                          <a:effectLst/>
+                          <a:latin typeface="+mn-lt"/>
+                          <a:ea typeface="+mn-ea"/>
+                          <a:cs typeface="+mn-cs"/>
+                        </a:rPr>
+                        <a:t>: PTC Heater</a:t>
+                      </a:r>
+                      <a:r>
+                        <a:rPr kumimoji="1" lang="ko-KR" altLang="en-US" sz="1000" b="0" i="0" u="none" strike="noStrike" kern="1200" cap="none" normalizeH="0" baseline="0" smtClean="0">
+                          <a:ln>
+                            <a:noFill/>
+                          </a:ln>
+                          <a:solidFill>
+                            <a:schemeClr val="tx1"/>
+                          </a:solidFill>
+                          <a:effectLst/>
+                          <a:latin typeface="+mn-lt"/>
+                          <a:ea typeface="+mn-ea"/>
+                          <a:cs typeface="+mn-cs"/>
+                        </a:rPr>
+                        <a:t>의 최대 성능 측정을 위한 </a:t>
+                      </a:r>
+                      <a:r>
+                        <a:rPr kumimoji="1" lang="en-US" altLang="ko-KR" sz="1000" b="0" i="0" u="none" strike="noStrike" kern="1200" cap="none" normalizeH="0" baseline="0" smtClean="0">
+                          <a:ln>
+                            <a:noFill/>
+                          </a:ln>
+                          <a:solidFill>
+                            <a:schemeClr val="tx1"/>
+                          </a:solidFill>
+                          <a:effectLst/>
+                          <a:latin typeface="+mn-lt"/>
+                          <a:ea typeface="+mn-ea"/>
+                          <a:cs typeface="+mn-cs"/>
+                        </a:rPr>
+                        <a:t>S/W Limit </a:t>
+                      </a:r>
+                      <a:r>
+                        <a:rPr kumimoji="1" lang="ko-KR" altLang="en-US" sz="1000" b="0" i="0" u="none" strike="noStrike" kern="1200" cap="none" normalizeH="0" baseline="0" smtClean="0">
+                          <a:ln>
+                            <a:noFill/>
+                          </a:ln>
+                          <a:solidFill>
+                            <a:schemeClr val="tx1"/>
+                          </a:solidFill>
+                          <a:effectLst/>
+                          <a:latin typeface="+mn-lt"/>
+                          <a:ea typeface="+mn-ea"/>
+                          <a:cs typeface="+mn-cs"/>
+                        </a:rPr>
+                        <a:t>을 해제하</a:t>
+                      </a:r>
+                      <a:endParaRPr kumimoji="1" lang="en-US" altLang="ko-KR" sz="1000" b="0" i="0" u="none" strike="noStrike" kern="1200" cap="none" normalizeH="0" baseline="0" smtClean="0">
+                        <a:ln>
+                          <a:noFill/>
+                        </a:ln>
+                        <a:solidFill>
+                          <a:schemeClr val="tx1"/>
+                        </a:solidFill>
+                        <a:effectLst/>
+                        <a:latin typeface="+mn-lt"/>
+                        <a:ea typeface="+mn-ea"/>
+                        <a:cs typeface="+mn-cs"/>
+                      </a:endParaRPr>
+                    </a:p>
+                    <a:p>
+                      <a:pPr marL="0" marR="0" lvl="0" indent="0" algn="l" defTabSz="914400" rtl="0" eaLnBrk="1" fontAlgn="base" latinLnBrk="1" hangingPunct="1">
+                        <a:lnSpc>
+                          <a:spcPct val="100000"/>
+                        </a:lnSpc>
+                        <a:spcBef>
+                          <a:spcPct val="20000"/>
+                        </a:spcBef>
+                        <a:spcAft>
+                          <a:spcPct val="0"/>
+                        </a:spcAft>
+                        <a:buClr>
+                          <a:srgbClr val="FF0000"/>
+                        </a:buClr>
+                        <a:buSzTx/>
+                        <a:buFont typeface="Wingdings" pitchFamily="2" charset="2"/>
+                        <a:buNone/>
+                        <a:tabLst/>
+                        <a:defRPr/>
+                      </a:pPr>
+                      <a:r>
+                        <a:rPr kumimoji="1" lang="en-US" altLang="ko-KR" sz="1000" b="0" i="0" u="none" strike="noStrike" kern="1200" cap="none" normalizeH="0" baseline="0" smtClean="0">
+                          <a:ln>
+                            <a:noFill/>
+                          </a:ln>
+                          <a:solidFill>
+                            <a:schemeClr val="tx1"/>
+                          </a:solidFill>
+                          <a:effectLst/>
+                          <a:latin typeface="+mn-lt"/>
+                          <a:ea typeface="+mn-ea"/>
+                          <a:cs typeface="+mn-cs"/>
+                        </a:rPr>
+                        <a:t>          </a:t>
+                      </a:r>
+                      <a:r>
+                        <a:rPr kumimoji="1" lang="ko-KR" altLang="en-US" sz="1000" b="0" i="0" u="none" strike="noStrike" kern="1200" cap="none" normalizeH="0" baseline="0" smtClean="0">
+                          <a:ln>
+                            <a:noFill/>
+                          </a:ln>
+                          <a:solidFill>
+                            <a:schemeClr val="tx1"/>
+                          </a:solidFill>
+                          <a:effectLst/>
+                          <a:latin typeface="+mn-lt"/>
+                          <a:ea typeface="+mn-ea"/>
+                          <a:cs typeface="+mn-cs"/>
+                        </a:rPr>
+                        <a:t>여</a:t>
+                      </a:r>
+                      <a:r>
+                        <a:rPr kumimoji="1" lang="en-US" altLang="ko-KR" sz="1000" b="0" i="0" u="none" strike="noStrike" kern="1200" cap="none" normalizeH="0" baseline="0" smtClean="0">
+                          <a:ln>
+                            <a:noFill/>
+                          </a:ln>
+                          <a:solidFill>
+                            <a:schemeClr val="tx1"/>
+                          </a:solidFill>
+                          <a:effectLst/>
+                          <a:latin typeface="+mn-lt"/>
+                          <a:ea typeface="+mn-ea"/>
+                          <a:cs typeface="+mn-cs"/>
+                        </a:rPr>
+                        <a:t>, </a:t>
+                      </a:r>
+                      <a:r>
+                        <a:rPr kumimoji="1" lang="ko-KR" altLang="en-US" sz="1000" b="0" i="0" u="none" strike="noStrike" kern="1200" cap="none" normalizeH="0" baseline="0" smtClean="0">
+                          <a:ln>
+                            <a:noFill/>
+                          </a:ln>
+                          <a:solidFill>
+                            <a:schemeClr val="tx1"/>
+                          </a:solidFill>
+                          <a:effectLst/>
+                          <a:latin typeface="+mn-lt"/>
+                          <a:ea typeface="+mn-ea"/>
+                          <a:cs typeface="+mn-cs"/>
+                        </a:rPr>
+                        <a:t>테스트 진행 </a:t>
+                      </a:r>
+                      <a:r>
+                        <a:rPr kumimoji="1" lang="en-US" altLang="ko-KR" sz="1000" b="0" i="0" u="none" strike="noStrike" kern="1200" cap="none" normalizeH="0" baseline="0" smtClean="0">
+                          <a:ln>
+                            <a:noFill/>
+                          </a:ln>
+                          <a:solidFill>
+                            <a:schemeClr val="tx1"/>
+                          </a:solidFill>
+                          <a:effectLst/>
+                          <a:latin typeface="+mn-lt"/>
+                          <a:ea typeface="+mn-ea"/>
+                          <a:cs typeface="+mn-cs"/>
+                        </a:rPr>
+                        <a:t>(8</a:t>
+                      </a:r>
+                      <a:r>
+                        <a:rPr kumimoji="1" lang="ko-KR" altLang="en-US" sz="1000" b="0" i="0" u="none" strike="noStrike" kern="1200" cap="none" normalizeH="0" baseline="0" smtClean="0">
+                          <a:ln>
+                            <a:noFill/>
+                          </a:ln>
+                          <a:solidFill>
+                            <a:schemeClr val="tx1"/>
+                          </a:solidFill>
+                          <a:effectLst/>
+                          <a:latin typeface="+mn-lt"/>
+                          <a:ea typeface="+mn-ea"/>
+                          <a:cs typeface="+mn-cs"/>
+                        </a:rPr>
+                        <a:t>월 </a:t>
+                      </a:r>
+                      <a:r>
+                        <a:rPr kumimoji="1" lang="en-US" altLang="ko-KR" sz="1000" b="0" i="0" u="none" strike="noStrike" kern="1200" cap="none" normalizeH="0" baseline="0" smtClean="0">
+                          <a:ln>
+                            <a:noFill/>
+                          </a:ln>
+                          <a:solidFill>
+                            <a:schemeClr val="tx1"/>
+                          </a:solidFill>
+                          <a:effectLst/>
+                          <a:latin typeface="+mn-lt"/>
+                          <a:ea typeface="+mn-ea"/>
+                          <a:cs typeface="+mn-cs"/>
+                        </a:rPr>
+                        <a:t>6</a:t>
+                      </a:r>
+                      <a:r>
+                        <a:rPr kumimoji="1" lang="ko-KR" altLang="en-US" sz="1000" b="0" i="0" u="none" strike="noStrike" kern="1200" cap="none" normalizeH="0" baseline="0" smtClean="0">
+                          <a:ln>
+                            <a:noFill/>
+                          </a:ln>
+                          <a:solidFill>
+                            <a:schemeClr val="tx1"/>
+                          </a:solidFill>
+                          <a:effectLst/>
+                          <a:latin typeface="+mn-lt"/>
+                          <a:ea typeface="+mn-ea"/>
+                          <a:cs typeface="+mn-cs"/>
+                        </a:rPr>
+                        <a:t>일</a:t>
+                      </a:r>
+                      <a:r>
+                        <a:rPr kumimoji="1" lang="en-US" altLang="ko-KR" sz="1000" b="0" i="0" u="none" strike="noStrike" kern="1200" cap="none" normalizeH="0" baseline="0" smtClean="0">
+                          <a:ln>
+                            <a:noFill/>
+                          </a:ln>
+                          <a:solidFill>
+                            <a:schemeClr val="tx1"/>
+                          </a:solidFill>
+                          <a:effectLst/>
+                          <a:latin typeface="+mn-lt"/>
+                          <a:ea typeface="+mn-ea"/>
+                          <a:cs typeface="+mn-cs"/>
+                        </a:rPr>
+                        <a:t>)</a:t>
+                      </a:r>
+                    </a:p>
+                    <a:p>
+                      <a:pPr marL="0" marR="0" lvl="0" indent="0" algn="l" defTabSz="914400" rtl="0" eaLnBrk="1" fontAlgn="base" latinLnBrk="1" hangingPunct="1">
+                        <a:lnSpc>
+                          <a:spcPct val="100000"/>
+                        </a:lnSpc>
+                        <a:spcBef>
+                          <a:spcPct val="20000"/>
+                        </a:spcBef>
+                        <a:spcAft>
+                          <a:spcPct val="0"/>
+                        </a:spcAft>
+                        <a:buClr>
+                          <a:srgbClr val="FF0000"/>
+                        </a:buClr>
+                        <a:buSzTx/>
+                        <a:buFont typeface="Wingdings" pitchFamily="2" charset="2"/>
+                        <a:buNone/>
+                        <a:tabLst/>
+                        <a:defRPr/>
+                      </a:pPr>
+                      <a:r>
+                        <a:rPr kumimoji="1" lang="en-US" altLang="ko-KR" sz="1000" b="0" i="0" u="none" strike="noStrike" kern="1200" cap="none" normalizeH="0" baseline="0" smtClean="0">
+                          <a:ln>
+                            <a:noFill/>
+                          </a:ln>
+                          <a:solidFill>
                             <a:srgbClr val="0000FF"/>
                           </a:solidFill>
                           <a:effectLst/>
@@ -22280,8 +23350,540 @@
                           <a:ea typeface="+mn-ea"/>
                           <a:cs typeface="+mn-cs"/>
                         </a:rPr>
-                        <a:t>   </a:t>
+                        <a:t>  </a:t>
                       </a:r>
+                      <a:r>
+                        <a:rPr kumimoji="1" lang="ko-KR" altLang="en-US" sz="1000" b="0" i="0" u="none" strike="noStrike" kern="1200" cap="none" normalizeH="0" baseline="0" smtClean="0">
+                          <a:ln>
+                            <a:noFill/>
+                          </a:ln>
+                          <a:solidFill>
+                            <a:schemeClr val="tx1"/>
+                          </a:solidFill>
+                          <a:effectLst/>
+                          <a:latin typeface="+mn-lt"/>
+                          <a:ea typeface="+mn-ea"/>
+                          <a:cs typeface="+mn-cs"/>
+                        </a:rPr>
+                        <a:t>결과</a:t>
+                      </a:r>
+                      <a:r>
+                        <a:rPr kumimoji="1" lang="en-US" altLang="ko-KR" sz="1000" b="0" i="0" u="none" strike="noStrike" kern="1200" cap="none" normalizeH="0" baseline="0" smtClean="0">
+                          <a:ln>
+                            <a:noFill/>
+                          </a:ln>
+                          <a:solidFill>
+                            <a:schemeClr val="tx1"/>
+                          </a:solidFill>
+                          <a:effectLst/>
+                          <a:latin typeface="+mn-lt"/>
+                          <a:ea typeface="+mn-ea"/>
+                          <a:cs typeface="+mn-cs"/>
+                        </a:rPr>
+                        <a:t> : Limit </a:t>
+                      </a:r>
+                      <a:r>
+                        <a:rPr kumimoji="1" lang="ko-KR" altLang="en-US" sz="1000" b="0" i="0" u="none" strike="noStrike" kern="1200" cap="none" normalizeH="0" baseline="0" smtClean="0">
+                          <a:ln>
+                            <a:noFill/>
+                          </a:ln>
+                          <a:solidFill>
+                            <a:schemeClr val="tx1"/>
+                          </a:solidFill>
+                          <a:effectLst/>
+                          <a:latin typeface="+mn-lt"/>
+                          <a:ea typeface="+mn-ea"/>
+                          <a:cs typeface="+mn-cs"/>
+                        </a:rPr>
+                        <a:t>해제 후 테스트 진행 결과 </a:t>
+                      </a:r>
+                      <a:r>
+                        <a:rPr kumimoji="1" lang="en-US" altLang="ko-KR" sz="1000" b="0" i="0" u="none" strike="noStrike" kern="1200" cap="none" normalizeH="0" baseline="0" smtClean="0">
+                          <a:ln>
+                            <a:noFill/>
+                          </a:ln>
+                          <a:solidFill>
+                            <a:schemeClr val="tx1"/>
+                          </a:solidFill>
+                          <a:effectLst/>
+                          <a:latin typeface="+mn-lt"/>
+                          <a:ea typeface="+mn-ea"/>
+                          <a:cs typeface="+mn-cs"/>
+                        </a:rPr>
+                        <a:t>NG</a:t>
+                      </a:r>
+                    </a:p>
+                    <a:p>
+                      <a:pPr marL="0" marR="0" lvl="0" indent="0" algn="l" defTabSz="914400" rtl="0" eaLnBrk="1" fontAlgn="base" latinLnBrk="1" hangingPunct="1">
+                        <a:lnSpc>
+                          <a:spcPct val="100000"/>
+                        </a:lnSpc>
+                        <a:spcBef>
+                          <a:spcPct val="20000"/>
+                        </a:spcBef>
+                        <a:spcAft>
+                          <a:spcPct val="0"/>
+                        </a:spcAft>
+                        <a:buClr>
+                          <a:srgbClr val="FF0000"/>
+                        </a:buClr>
+                        <a:buSzTx/>
+                        <a:buFont typeface="Wingdings" pitchFamily="2" charset="2"/>
+                        <a:buNone/>
+                        <a:tabLst/>
+                        <a:defRPr/>
+                      </a:pPr>
+                      <a:r>
+                        <a:rPr kumimoji="1" lang="en-US" altLang="ko-KR" sz="1000" b="0" i="0" u="none" strike="noStrike" kern="1200" cap="none" normalizeH="0" baseline="0" smtClean="0">
+                          <a:ln>
+                            <a:noFill/>
+                          </a:ln>
+                          <a:solidFill>
+                            <a:schemeClr val="tx1"/>
+                          </a:solidFill>
+                          <a:effectLst/>
+                          <a:latin typeface="+mn-lt"/>
+                          <a:ea typeface="+mn-ea"/>
+                          <a:cs typeface="+mn-cs"/>
+                        </a:rPr>
+                        <a:t>  </a:t>
+                      </a:r>
+                      <a:r>
+                        <a:rPr kumimoji="1" lang="ko-KR" altLang="en-US" sz="1000" b="0" i="0" u="none" strike="noStrike" kern="1200" cap="none" normalizeH="0" baseline="0" smtClean="0">
+                          <a:ln>
+                            <a:noFill/>
+                          </a:ln>
+                          <a:solidFill>
+                            <a:schemeClr val="tx1"/>
+                          </a:solidFill>
+                          <a:effectLst/>
+                          <a:latin typeface="+mn-lt"/>
+                          <a:ea typeface="+mn-ea"/>
+                          <a:cs typeface="+mn-cs"/>
+                        </a:rPr>
+                        <a:t>추후 진행 계획 </a:t>
+                      </a:r>
+                      <a:r>
+                        <a:rPr kumimoji="1" lang="en-US" altLang="ko-KR" sz="1000" b="0" i="0" u="none" strike="noStrike" kern="1200" cap="none" normalizeH="0" baseline="0" smtClean="0">
+                          <a:ln>
+                            <a:noFill/>
+                          </a:ln>
+                          <a:solidFill>
+                            <a:schemeClr val="tx1"/>
+                          </a:solidFill>
+                          <a:effectLst/>
+                          <a:latin typeface="+mn-lt"/>
+                          <a:ea typeface="+mn-ea"/>
+                          <a:cs typeface="+mn-cs"/>
+                        </a:rPr>
+                        <a:t>:</a:t>
+                      </a:r>
+                    </a:p>
+                    <a:p>
+                      <a:pPr marL="0" marR="0" lvl="0" indent="0" algn="l" defTabSz="914400" rtl="0" eaLnBrk="1" fontAlgn="base" latinLnBrk="1" hangingPunct="1">
+                        <a:lnSpc>
+                          <a:spcPct val="100000"/>
+                        </a:lnSpc>
+                        <a:spcBef>
+                          <a:spcPct val="20000"/>
+                        </a:spcBef>
+                        <a:spcAft>
+                          <a:spcPct val="0"/>
+                        </a:spcAft>
+                        <a:buClr>
+                          <a:srgbClr val="FF0000"/>
+                        </a:buClr>
+                        <a:buSzTx/>
+                        <a:buFont typeface="Wingdings" pitchFamily="2" charset="2"/>
+                        <a:buNone/>
+                        <a:tabLst/>
+                        <a:defRPr/>
+                      </a:pPr>
+                      <a:r>
+                        <a:rPr kumimoji="1" lang="en-US" altLang="ko-KR" sz="1000" b="0" i="0" u="none" strike="noStrike" kern="1200" cap="none" normalizeH="0" baseline="0" smtClean="0">
+                          <a:ln>
+                            <a:noFill/>
+                          </a:ln>
+                          <a:solidFill>
+                            <a:schemeClr val="tx1"/>
+                          </a:solidFill>
+                          <a:effectLst/>
+                          <a:latin typeface="+mn-lt"/>
+                          <a:ea typeface="+mn-ea"/>
+                          <a:cs typeface="+mn-cs"/>
+                        </a:rPr>
+                        <a:t>   1) </a:t>
+                      </a:r>
+                      <a:r>
+                        <a:rPr kumimoji="1" lang="ko-KR" altLang="en-US" sz="1000" b="0" i="0" u="none" strike="noStrike" kern="1200" cap="none" normalizeH="0" baseline="0" smtClean="0">
+                          <a:ln>
+                            <a:noFill/>
+                          </a:ln>
+                          <a:solidFill>
+                            <a:schemeClr val="tx1"/>
+                          </a:solidFill>
+                          <a:effectLst/>
+                          <a:latin typeface="+mn-lt"/>
+                          <a:ea typeface="+mn-ea"/>
+                          <a:cs typeface="+mn-cs"/>
+                        </a:rPr>
+                        <a:t>성능 </a:t>
+                      </a:r>
+                      <a:r>
+                        <a:rPr kumimoji="1" lang="en-US" altLang="ko-KR" sz="1000" b="0" i="0" u="none" strike="noStrike" kern="1200" cap="none" normalizeH="0" baseline="0" smtClean="0">
+                          <a:ln>
+                            <a:noFill/>
+                          </a:ln>
+                          <a:solidFill>
+                            <a:schemeClr val="tx1"/>
+                          </a:solidFill>
+                          <a:effectLst/>
+                          <a:latin typeface="+mn-lt"/>
+                          <a:ea typeface="+mn-ea"/>
+                          <a:cs typeface="+mn-cs"/>
+                        </a:rPr>
+                        <a:t>6,200 </a:t>
+                      </a:r>
+                      <a:r>
+                        <a:rPr kumimoji="1" lang="en-US" altLang="ko-KR" sz="1000" b="0" i="0" u="none" strike="noStrike" kern="1200" cap="none" normalizeH="0" baseline="0" smtClean="0">
+                          <a:ln>
+                            <a:noFill/>
+                          </a:ln>
+                          <a:solidFill>
+                            <a:schemeClr val="tx1"/>
+                          </a:solidFill>
+                          <a:effectLst/>
+                          <a:latin typeface="+mn-lt"/>
+                          <a:ea typeface="+mn-ea"/>
+                          <a:cs typeface="+mn-cs"/>
+                          <a:sym typeface="Wingdings" panose="05000000000000000000" pitchFamily="2" charset="2"/>
+                        </a:rPr>
+                        <a:t> </a:t>
+                      </a:r>
+                      <a:r>
+                        <a:rPr kumimoji="1" lang="en-US" altLang="ko-KR" sz="1000" b="0" i="0" u="none" strike="noStrike" kern="1200" cap="none" normalizeH="0" baseline="0" smtClean="0">
+                          <a:ln>
+                            <a:noFill/>
+                          </a:ln>
+                          <a:solidFill>
+                            <a:schemeClr val="tx1"/>
+                          </a:solidFill>
+                          <a:effectLst/>
+                          <a:latin typeface="+mn-lt"/>
+                          <a:ea typeface="+mn-ea"/>
+                          <a:cs typeface="+mn-cs"/>
+                        </a:rPr>
+                        <a:t>6,800W </a:t>
+                      </a:r>
+                      <a:r>
+                        <a:rPr kumimoji="1" lang="ko-KR" altLang="en-US" sz="1000" b="0" i="0" u="none" strike="noStrike" kern="1200" cap="none" normalizeH="0" baseline="0" smtClean="0">
+                          <a:ln>
+                            <a:noFill/>
+                          </a:ln>
+                          <a:solidFill>
+                            <a:schemeClr val="tx1"/>
+                          </a:solidFill>
+                          <a:effectLst/>
+                          <a:latin typeface="+mn-lt"/>
+                          <a:ea typeface="+mn-ea"/>
+                          <a:cs typeface="+mn-cs"/>
+                        </a:rPr>
+                        <a:t>향상을 위한 방안 회신 및 </a:t>
+                      </a:r>
+                      <a:r>
+                        <a:rPr kumimoji="1" lang="en-US" altLang="ko-KR" sz="1000" b="0" i="0" u="none" strike="noStrike" kern="1200" cap="none" normalizeH="0" baseline="0" smtClean="0">
+                          <a:ln>
+                            <a:noFill/>
+                          </a:ln>
+                          <a:solidFill>
+                            <a:schemeClr val="tx1"/>
+                          </a:solidFill>
+                          <a:effectLst/>
+                          <a:latin typeface="+mn-lt"/>
+                          <a:ea typeface="+mn-ea"/>
+                          <a:cs typeface="+mn-cs"/>
+                        </a:rPr>
+                        <a:t>1~2</a:t>
+                      </a:r>
+                      <a:r>
+                        <a:rPr kumimoji="1" lang="ko-KR" altLang="en-US" sz="1000" b="0" i="0" u="none" strike="noStrike" kern="1200" cap="none" normalizeH="0" baseline="0" smtClean="0">
+                          <a:ln>
+                            <a:noFill/>
+                          </a:ln>
+                          <a:solidFill>
+                            <a:schemeClr val="tx1"/>
+                          </a:solidFill>
+                          <a:effectLst/>
+                          <a:latin typeface="+mn-lt"/>
+                          <a:ea typeface="+mn-ea"/>
+                          <a:cs typeface="+mn-cs"/>
+                        </a:rPr>
+                        <a:t>달이내 개</a:t>
+                      </a:r>
+                      <a:endParaRPr kumimoji="1" lang="en-US" altLang="ko-KR" sz="1000" b="0" i="0" u="none" strike="noStrike" kern="1200" cap="none" normalizeH="0" baseline="0" smtClean="0">
+                        <a:ln>
+                          <a:noFill/>
+                        </a:ln>
+                        <a:solidFill>
+                          <a:schemeClr val="tx1"/>
+                        </a:solidFill>
+                        <a:effectLst/>
+                        <a:latin typeface="+mn-lt"/>
+                        <a:ea typeface="+mn-ea"/>
+                        <a:cs typeface="+mn-cs"/>
+                      </a:endParaRPr>
+                    </a:p>
+                    <a:p>
+                      <a:pPr marL="0" marR="0" lvl="0" indent="0" algn="l" defTabSz="914400" rtl="0" eaLnBrk="1" fontAlgn="base" latinLnBrk="1" hangingPunct="1">
+                        <a:lnSpc>
+                          <a:spcPct val="100000"/>
+                        </a:lnSpc>
+                        <a:spcBef>
+                          <a:spcPct val="20000"/>
+                        </a:spcBef>
+                        <a:spcAft>
+                          <a:spcPct val="0"/>
+                        </a:spcAft>
+                        <a:buClr>
+                          <a:srgbClr val="FF0000"/>
+                        </a:buClr>
+                        <a:buSzTx/>
+                        <a:buFont typeface="Wingdings" pitchFamily="2" charset="2"/>
+                        <a:buNone/>
+                        <a:tabLst/>
+                        <a:defRPr/>
+                      </a:pPr>
+                      <a:r>
+                        <a:rPr kumimoji="1" lang="en-US" altLang="ko-KR" sz="1000" b="0" i="0" u="none" strike="noStrike" kern="1200" cap="none" normalizeH="0" baseline="0" smtClean="0">
+                          <a:ln>
+                            <a:noFill/>
+                          </a:ln>
+                          <a:solidFill>
+                            <a:schemeClr val="tx1"/>
+                          </a:solidFill>
+                          <a:effectLst/>
+                          <a:latin typeface="+mn-lt"/>
+                          <a:ea typeface="+mn-ea"/>
+                          <a:cs typeface="+mn-cs"/>
+                        </a:rPr>
+                        <a:t>      </a:t>
+                      </a:r>
+                      <a:r>
+                        <a:rPr kumimoji="1" lang="ko-KR" altLang="en-US" sz="1000" b="0" i="0" u="none" strike="noStrike" kern="1200" cap="none" normalizeH="0" baseline="0" smtClean="0">
+                          <a:ln>
+                            <a:noFill/>
+                          </a:ln>
+                          <a:solidFill>
+                            <a:schemeClr val="tx1"/>
+                          </a:solidFill>
+                          <a:effectLst/>
+                          <a:latin typeface="+mn-lt"/>
+                          <a:ea typeface="+mn-ea"/>
+                          <a:cs typeface="+mn-cs"/>
+                        </a:rPr>
+                        <a:t>선 완료 목표</a:t>
+                      </a:r>
+                      <a:endParaRPr kumimoji="1" lang="en-US" altLang="ko-KR" sz="1000" b="0" i="0" u="none" strike="noStrike" kern="1200" cap="none" normalizeH="0" baseline="0" smtClean="0">
+                        <a:ln>
+                          <a:noFill/>
+                        </a:ln>
+                        <a:solidFill>
+                          <a:schemeClr val="tx1"/>
+                        </a:solidFill>
+                        <a:effectLst/>
+                        <a:latin typeface="+mn-lt"/>
+                        <a:ea typeface="+mn-ea"/>
+                        <a:cs typeface="+mn-cs"/>
+                      </a:endParaRPr>
+                    </a:p>
+                    <a:p>
+                      <a:pPr marL="0" marR="0" lvl="0" indent="0" algn="l" defTabSz="914400" rtl="0" eaLnBrk="1" fontAlgn="base" latinLnBrk="1" hangingPunct="1">
+                        <a:lnSpc>
+                          <a:spcPct val="100000"/>
+                        </a:lnSpc>
+                        <a:spcBef>
+                          <a:spcPct val="20000"/>
+                        </a:spcBef>
+                        <a:spcAft>
+                          <a:spcPct val="0"/>
+                        </a:spcAft>
+                        <a:buClr>
+                          <a:srgbClr val="FF0000"/>
+                        </a:buClr>
+                        <a:buSzTx/>
+                        <a:buFont typeface="Wingdings" pitchFamily="2" charset="2"/>
+                        <a:buNone/>
+                        <a:tabLst/>
+                        <a:defRPr/>
+                      </a:pPr>
+                      <a:r>
+                        <a:rPr kumimoji="1" lang="en-US" altLang="ko-KR" sz="1000" b="0" i="0" u="none" strike="noStrike" kern="1200" cap="none" normalizeH="0" baseline="0" smtClean="0">
+                          <a:ln>
+                            <a:noFill/>
+                          </a:ln>
+                          <a:solidFill>
+                            <a:schemeClr val="tx1"/>
+                          </a:solidFill>
+                          <a:effectLst/>
+                          <a:latin typeface="+mn-lt"/>
+                          <a:ea typeface="+mn-ea"/>
+                          <a:cs typeface="+mn-cs"/>
+                        </a:rPr>
+                        <a:t>      (</a:t>
+                      </a:r>
+                      <a:r>
+                        <a:rPr kumimoji="1" lang="ko-KR" altLang="en-US" sz="1000" b="0" i="0" u="none" strike="noStrike" kern="1200" cap="none" normalizeH="0" baseline="0" smtClean="0">
+                          <a:ln>
+                            <a:noFill/>
+                          </a:ln>
+                          <a:solidFill>
+                            <a:schemeClr val="tx1"/>
+                          </a:solidFill>
+                          <a:effectLst/>
+                          <a:latin typeface="+mn-lt"/>
+                          <a:ea typeface="+mn-ea"/>
+                          <a:cs typeface="+mn-cs"/>
+                        </a:rPr>
+                        <a:t>최대 </a:t>
+                      </a:r>
+                      <a:r>
+                        <a:rPr kumimoji="1" lang="en-US" altLang="ko-KR" sz="1000" b="0" i="0" u="none" strike="noStrike" kern="1200" cap="none" normalizeH="0" baseline="0" smtClean="0">
+                          <a:ln>
+                            <a:noFill/>
+                          </a:ln>
+                          <a:solidFill>
+                            <a:schemeClr val="tx1"/>
+                          </a:solidFill>
+                          <a:effectLst/>
+                          <a:latin typeface="+mn-lt"/>
+                          <a:ea typeface="+mn-ea"/>
+                          <a:cs typeface="+mn-cs"/>
+                        </a:rPr>
+                        <a:t>2~3</a:t>
+                      </a:r>
+                      <a:r>
+                        <a:rPr kumimoji="1" lang="ko-KR" altLang="en-US" sz="1000" b="0" i="0" u="none" strike="noStrike" kern="1200" cap="none" normalizeH="0" baseline="0" smtClean="0">
+                          <a:ln>
+                            <a:noFill/>
+                          </a:ln>
+                          <a:solidFill>
+                            <a:schemeClr val="tx1"/>
+                          </a:solidFill>
+                          <a:effectLst/>
+                          <a:latin typeface="+mn-lt"/>
+                          <a:ea typeface="+mn-ea"/>
+                          <a:cs typeface="+mn-cs"/>
+                        </a:rPr>
+                        <a:t>달이내 개선점 안보이면 </a:t>
+                      </a:r>
+                      <a:r>
+                        <a:rPr kumimoji="1" lang="en-US" altLang="ko-KR" sz="1000" b="0" i="0" u="none" strike="noStrike" kern="1200" cap="none" normalizeH="0" baseline="0" smtClean="0">
+                          <a:ln>
+                            <a:noFill/>
+                          </a:ln>
+                          <a:solidFill>
+                            <a:schemeClr val="tx1"/>
+                          </a:solidFill>
+                          <a:effectLst/>
+                          <a:latin typeface="+mn-lt"/>
+                          <a:ea typeface="+mn-ea"/>
+                          <a:cs typeface="+mn-cs"/>
+                        </a:rPr>
+                        <a:t>SV (</a:t>
+                      </a:r>
+                      <a:r>
+                        <a:rPr kumimoji="1" lang="ko-KR" altLang="en-US" sz="1000" b="0" i="0" u="none" strike="noStrike" kern="1200" cap="none" normalizeH="0" baseline="0" smtClean="0">
+                          <a:ln>
+                            <a:noFill/>
+                          </a:ln>
+                          <a:solidFill>
+                            <a:schemeClr val="tx1"/>
+                          </a:solidFill>
+                          <a:effectLst/>
+                          <a:latin typeface="+mn-lt"/>
+                          <a:ea typeface="+mn-ea"/>
+                          <a:cs typeface="+mn-cs"/>
+                        </a:rPr>
+                        <a:t>두원</a:t>
+                      </a:r>
+                      <a:r>
+                        <a:rPr kumimoji="1" lang="en-US" altLang="ko-KR" sz="1000" b="0" i="0" u="none" strike="noStrike" kern="1200" cap="none" normalizeH="0" baseline="0" smtClean="0">
+                          <a:ln>
+                            <a:noFill/>
+                          </a:ln>
+                          <a:solidFill>
+                            <a:schemeClr val="tx1"/>
+                          </a:solidFill>
+                          <a:effectLst/>
+                          <a:latin typeface="+mn-lt"/>
+                          <a:ea typeface="+mn-ea"/>
+                          <a:cs typeface="+mn-cs"/>
+                        </a:rPr>
+                        <a:t>) </a:t>
+                      </a:r>
+                      <a:r>
+                        <a:rPr kumimoji="1" lang="ko-KR" altLang="en-US" sz="1000" b="0" i="0" u="none" strike="noStrike" kern="1200" cap="none" normalizeH="0" baseline="0" smtClean="0">
+                          <a:ln>
+                            <a:noFill/>
+                          </a:ln>
+                          <a:solidFill>
+                            <a:schemeClr val="tx1"/>
+                          </a:solidFill>
+                          <a:effectLst/>
+                          <a:latin typeface="+mn-lt"/>
+                          <a:ea typeface="+mn-ea"/>
+                          <a:cs typeface="+mn-cs"/>
+                        </a:rPr>
+                        <a:t>로 대체</a:t>
+                      </a:r>
+                      <a:r>
+                        <a:rPr kumimoji="1" lang="en-US" altLang="ko-KR" sz="1000" b="0" i="0" u="none" strike="noStrike" kern="1200" cap="none" normalizeH="0" baseline="0" smtClean="0">
+                          <a:ln>
+                            <a:noFill/>
+                          </a:ln>
+                          <a:solidFill>
+                            <a:schemeClr val="tx1"/>
+                          </a:solidFill>
+                          <a:effectLst/>
+                          <a:latin typeface="+mn-lt"/>
+                          <a:ea typeface="+mn-ea"/>
+                          <a:cs typeface="+mn-cs"/>
+                        </a:rPr>
+                        <a:t>)</a:t>
+                      </a:r>
+                    </a:p>
+                    <a:p>
+                      <a:pPr marL="0" marR="0" lvl="0" indent="0" algn="l" defTabSz="914400" rtl="0" eaLnBrk="1" fontAlgn="base" latinLnBrk="1" hangingPunct="1">
+                        <a:lnSpc>
+                          <a:spcPct val="100000"/>
+                        </a:lnSpc>
+                        <a:spcBef>
+                          <a:spcPct val="20000"/>
+                        </a:spcBef>
+                        <a:spcAft>
+                          <a:spcPct val="0"/>
+                        </a:spcAft>
+                        <a:buClr>
+                          <a:srgbClr val="FF0000"/>
+                        </a:buClr>
+                        <a:buSzTx/>
+                        <a:buFont typeface="Wingdings" pitchFamily="2" charset="2"/>
+                        <a:buNone/>
+                        <a:tabLst/>
+                        <a:defRPr/>
+                      </a:pPr>
+                      <a:endParaRPr kumimoji="1" lang="en-US" altLang="ko-KR" sz="1000" b="0" i="0" u="none" strike="noStrike" kern="1200" cap="none" normalizeH="0" baseline="0" smtClean="0">
+                        <a:ln>
+                          <a:noFill/>
+                        </a:ln>
+                        <a:solidFill>
+                          <a:srgbClr val="0000FF"/>
+                        </a:solidFill>
+                        <a:effectLst/>
+                        <a:latin typeface="+mn-lt"/>
+                        <a:ea typeface="+mn-ea"/>
+                        <a:cs typeface="+mn-cs"/>
+                      </a:endParaRPr>
                     </a:p>
                   </a:txBody>
                   <a:tcPr marL="86400" marR="86400" marT="43172" marB="43172" horzOverflow="overflow">
@@ -24448,7 +26050,7 @@
           <p:nvPr>
             <p:extLst>
               <p:ext uri="{D42A27DB-BD31-4B8C-83A1-F6EECF244321}">
-                <p14:modId xmlns:p14="http://schemas.microsoft.com/office/powerpoint/2010/main" val="1721576955"/>
+                <p14:modId xmlns:p14="http://schemas.microsoft.com/office/powerpoint/2010/main" val="1410095248"/>
               </p:ext>
             </p:extLst>
           </p:nvPr>
@@ -25227,7 +26829,23 @@
                           <a:cs typeface="+mn-cs"/>
                           <a:sym typeface="Wingdings" pitchFamily="2" charset="2"/>
                         </a:rPr>
-                        <a:t>   - </a:t>
+                        <a:t>   </a:t>
+                      </a:r>
+                      <a:r>
+                        <a:rPr kumimoji="1" lang="en-US" altLang="ko-KR" sz="1000" b="0" i="0" u="none" strike="noStrike" kern="1200" cap="none" normalizeH="0" baseline="0" smtClean="0">
+                          <a:ln>
+                            <a:noFill/>
+                          </a:ln>
+                          <a:solidFill>
+                            <a:schemeClr val="tx1"/>
+                          </a:solidFill>
+                          <a:effectLst/>
+                          <a:latin typeface="+mn-lt"/>
+                          <a:ea typeface="+mn-ea"/>
+                          <a:cs typeface="+mn-cs"/>
+                          <a:sym typeface="Wingdings" pitchFamily="2" charset="2"/>
+                        </a:rPr>
+                        <a:t>- 8</a:t>
                       </a:r>
                       <a:r>
                         <a:rPr kumimoji="1" lang="ko-KR" altLang="en-US" sz="1000" b="0" i="0" u="none" strike="noStrike" kern="1200" cap="none" normalizeH="0" baseline="0" smtClean="0">
@@ -25243,7 +26861,39 @@
                           <a:cs typeface="+mn-cs"/>
                           <a:sym typeface="Wingdings" pitchFamily="2" charset="2"/>
                         </a:rPr>
-                        <a:t>부품 교체 및 리워크 일정 고객사 협의 중</a:t>
+                        <a:t>월 </a:t>
+                      </a:r>
+                      <a:r>
+                        <a:rPr kumimoji="1" lang="en-US" altLang="ko-KR" sz="1000" b="0" i="0" u="none" strike="noStrike" kern="1200" cap="none" normalizeH="0" baseline="0" smtClean="0">
+                          <a:ln>
+                            <a:noFill/>
+                          </a:ln>
+                          <a:solidFill>
+                            <a:schemeClr val="tx1"/>
+                          </a:solidFill>
+                          <a:effectLst/>
+                          <a:latin typeface="+mn-lt"/>
+                          <a:ea typeface="+mn-ea"/>
+                          <a:cs typeface="+mn-cs"/>
+                          <a:sym typeface="Wingdings" pitchFamily="2" charset="2"/>
+                        </a:rPr>
+                        <a:t>3</a:t>
+                      </a:r>
+                      <a:r>
+                        <a:rPr kumimoji="1" lang="ko-KR" altLang="en-US" sz="1000" b="0" i="0" u="none" strike="noStrike" kern="1200" cap="none" normalizeH="0" baseline="0" smtClean="0">
+                          <a:ln>
+                            <a:noFill/>
+                          </a:ln>
+                          <a:solidFill>
+                            <a:schemeClr val="tx1"/>
+                          </a:solidFill>
+                          <a:effectLst/>
+                          <a:latin typeface="+mn-lt"/>
+                          <a:ea typeface="+mn-ea"/>
+                          <a:cs typeface="+mn-cs"/>
+                          <a:sym typeface="Wingdings" pitchFamily="2" charset="2"/>
+                        </a:rPr>
+                        <a:t>주차 교체 및 평가 예정</a:t>
                       </a:r>
                       <a:endParaRPr kumimoji="1" lang="en-US" altLang="ko-KR" sz="1000" b="0" i="0" u="none" strike="noStrike" kern="1200" cap="none" normalizeH="0" baseline="0" smtClean="0">
                         <a:ln>
